--- a/modules/10-premium-fabric-capacity/assets/premium-fabric-capacity.pptx
+++ b/modules/10-premium-fabric-capacity/assets/premium-fabric-capacity.pptx
@@ -119,6 +119,1866 @@
     </a:lvl9pPr>
   </p:defaultTextStyle>
 </p:presentation>
+</file>
+
+<file path=ppt/notesMasters/notesMaster1.xml><?xml version="1.0" encoding="utf-8"?>
+<p:notesMaster xmlns:a="http://schemas.openxmlformats.org/drawingml/2006/main" xmlns:p="http://schemas.openxmlformats.org/presentationml/2006/main" xmlns:r="http://schemas.openxmlformats.org/officeDocument/2006/relationships">
+  <p:cSld>
+    <p:bg>
+      <p:bgRef idx="1001">
+        <a:schemeClr val="bg1"/>
+      </p:bgRef>
+    </p:bg>
+    <p:spTree>
+      <p:nvGrpSpPr>
+        <p:cNvPr id="1" name=""/>
+        <p:cNvGrpSpPr/>
+        <p:nvPr/>
+      </p:nvGrpSpPr>
+      <p:grpSpPr>
+        <a:xfrm>
+          <a:off x="0" y="0"/>
+          <a:ext cx="0" cy="0"/>
+          <a:chOff x="0" y="0"/>
+          <a:chExt cx="0" cy="0"/>
+        </a:xfrm>
+      </p:grpSpPr>
+      <p:sp>
+        <p:nvSpPr>
+          <p:cNvPr id="2" name="Header Placeholder 1"/>
+          <p:cNvSpPr>
+            <a:spLocks noGrp="1"/>
+          </p:cNvSpPr>
+          <p:nvPr>
+            <p:ph type="hdr" sz="quarter"/>
+          </p:nvPr>
+        </p:nvSpPr>
+        <p:spPr>
+          <a:xfrm>
+            <a:off x="0" y="0"/>
+            <a:ext cx="2971800" cy="457200"/>
+          </a:xfrm>
+          <a:prstGeom prst="rect">
+            <a:avLst/>
+          </a:prstGeom>
+        </p:spPr>
+        <p:txBody>
+          <a:bodyPr vert="horz" lIns="91440" tIns="45720" rIns="91440" bIns="45720" rtlCol="0"/>
+          <a:lstStyle>
+            <a:lvl1pPr algn="l">
+              <a:defRPr sz="1200"/>
+            </a:lvl1pPr>
+          </a:lstStyle>
+          <a:p>
+            <a:endParaRPr lang="en-US"/>
+          </a:p>
+        </p:txBody>
+      </p:sp>
+      <p:sp>
+        <p:nvSpPr>
+          <p:cNvPr id="3" name="Date Placeholder 2"/>
+          <p:cNvSpPr>
+            <a:spLocks noGrp="1"/>
+          </p:cNvSpPr>
+          <p:nvPr>
+            <p:ph type="dt" idx="1"/>
+          </p:nvPr>
+        </p:nvSpPr>
+        <p:spPr>
+          <a:xfrm>
+            <a:off x="3884613" y="0"/>
+            <a:ext cx="2971800" cy="457200"/>
+          </a:xfrm>
+          <a:prstGeom prst="rect">
+            <a:avLst/>
+          </a:prstGeom>
+        </p:spPr>
+        <p:txBody>
+          <a:bodyPr vert="horz" lIns="91440" tIns="45720" rIns="91440" bIns="45720" rtlCol="0"/>
+          <a:lstStyle>
+            <a:lvl1pPr algn="r">
+              <a:defRPr sz="1200"/>
+            </a:lvl1pPr>
+          </a:lstStyle>
+          <a:p>
+            <a:fld id="{0F89C1C7-3DCD-1040-A9CF-14679D8B5DDD}" type="datetimeFigureOut">
+              <a:rPr lang="en-US" smtClean="0"/>
+              <a:t>10/17/16</a:t>
+            </a:fld>
+            <a:endParaRPr lang="en-US"/>
+          </a:p>
+        </p:txBody>
+      </p:sp>
+      <p:sp>
+        <p:nvSpPr>
+          <p:cNvPr id="4" name="Slide Image Placeholder 3"/>
+          <p:cNvSpPr>
+            <a:spLocks noGrp="1" noRot="1" noChangeAspect="1"/>
+          </p:cNvSpPr>
+          <p:nvPr>
+            <p:ph type="sldImg" idx="2"/>
+          </p:nvPr>
+        </p:nvSpPr>
+        <p:spPr>
+          <a:xfrm>
+            <a:off x="1143000" y="685800"/>
+            <a:ext cx="4572000" cy="3429000"/>
+          </a:xfrm>
+          <a:prstGeom prst="rect">
+            <a:avLst/>
+          </a:prstGeom>
+          <a:noFill/>
+          <a:ln w="12700">
+            <a:solidFill>
+              <a:prstClr val="black"/>
+            </a:solidFill>
+          </a:ln>
+        </p:spPr>
+        <p:txBody>
+          <a:bodyPr vert="horz" lIns="91440" tIns="45720" rIns="91440" bIns="45720" rtlCol="0" anchor="ctr"/>
+          <a:lstStyle/>
+          <a:p>
+            <a:endParaRPr lang="en-US"/>
+          </a:p>
+        </p:txBody>
+      </p:sp>
+      <p:sp>
+        <p:nvSpPr>
+          <p:cNvPr id="5" name="Notes Placeholder 4"/>
+          <p:cNvSpPr>
+            <a:spLocks noGrp="1"/>
+          </p:cNvSpPr>
+          <p:nvPr>
+            <p:ph type="body" sz="quarter" idx="3"/>
+          </p:nvPr>
+        </p:nvSpPr>
+        <p:spPr>
+          <a:xfrm>
+            <a:off x="685800" y="4343400"/>
+            <a:ext cx="5486400" cy="4114800"/>
+          </a:xfrm>
+          <a:prstGeom prst="rect">
+            <a:avLst/>
+          </a:prstGeom>
+        </p:spPr>
+        <p:txBody>
+          <a:bodyPr vert="horz" lIns="91440" tIns="45720" rIns="91440" bIns="45720" rtlCol="0"/>
+          <a:lstStyle/>
+          <a:p>
+            <a:pPr lvl="0"/>
+            <a:r>
+              <a:rPr lang="en-US" smtClean="0"/>
+              <a:t>Click to edit Master text styles</a:t>
+            </a:r>
+          </a:p>
+          <a:p>
+            <a:pPr lvl="1"/>
+            <a:r>
+              <a:rPr lang="en-US" smtClean="0"/>
+              <a:t>Second level</a:t>
+            </a:r>
+          </a:p>
+          <a:p>
+            <a:pPr lvl="2"/>
+            <a:r>
+              <a:rPr lang="en-US" smtClean="0"/>
+              <a:t>Third level</a:t>
+            </a:r>
+          </a:p>
+          <a:p>
+            <a:pPr lvl="3"/>
+            <a:r>
+              <a:rPr lang="en-US" smtClean="0"/>
+              <a:t>Fourth level</a:t>
+            </a:r>
+          </a:p>
+          <a:p>
+            <a:pPr lvl="4"/>
+            <a:r>
+              <a:rPr lang="en-US" smtClean="0"/>
+              <a:t>Fifth level</a:t>
+            </a:r>
+            <a:endParaRPr lang="en-US"/>
+          </a:p>
+        </p:txBody>
+      </p:sp>
+      <p:sp>
+        <p:nvSpPr>
+          <p:cNvPr id="6" name="Footer Placeholder 5"/>
+          <p:cNvSpPr>
+            <a:spLocks noGrp="1"/>
+          </p:cNvSpPr>
+          <p:nvPr>
+            <p:ph type="ftr" sz="quarter" idx="4"/>
+          </p:nvPr>
+        </p:nvSpPr>
+        <p:spPr>
+          <a:xfrm>
+            <a:off x="0" y="8685213"/>
+            <a:ext cx="2971800" cy="457200"/>
+          </a:xfrm>
+          <a:prstGeom prst="rect">
+            <a:avLst/>
+          </a:prstGeom>
+        </p:spPr>
+        <p:txBody>
+          <a:bodyPr vert="horz" lIns="91440" tIns="45720" rIns="91440" bIns="45720" rtlCol="0" anchor="b"/>
+          <a:lstStyle>
+            <a:lvl1pPr algn="l">
+              <a:defRPr sz="1200"/>
+            </a:lvl1pPr>
+          </a:lstStyle>
+          <a:p>
+            <a:endParaRPr lang="en-US"/>
+          </a:p>
+        </p:txBody>
+      </p:sp>
+      <p:sp>
+        <p:nvSpPr>
+          <p:cNvPr id="7" name="Slide Number Placeholder 6"/>
+          <p:cNvSpPr>
+            <a:spLocks noGrp="1"/>
+          </p:cNvSpPr>
+          <p:nvPr>
+            <p:ph type="sldNum" sz="quarter" idx="5"/>
+          </p:nvPr>
+        </p:nvSpPr>
+        <p:spPr>
+          <a:xfrm>
+            <a:off x="3884613" y="8685213"/>
+            <a:ext cx="2971800" cy="457200"/>
+          </a:xfrm>
+          <a:prstGeom prst="rect">
+            <a:avLst/>
+          </a:prstGeom>
+        </p:spPr>
+        <p:txBody>
+          <a:bodyPr vert="horz" lIns="91440" tIns="45720" rIns="91440" bIns="45720" rtlCol="0" anchor="b"/>
+          <a:lstStyle>
+            <a:lvl1pPr algn="r">
+              <a:defRPr sz="1200"/>
+            </a:lvl1pPr>
+          </a:lstStyle>
+          <a:p>
+            <a:fld id="{BB5E49A5-4136-284D-997B-48E1D791AD67}" type="slidenum">
+              <a:rPr lang="en-US" smtClean="0"/>
+              <a:t>‹#›</a:t>
+            </a:fld>
+            <a:endParaRPr lang="en-US"/>
+          </a:p>
+        </p:txBody>
+      </p:sp>
+    </p:spTree>
+    <p:extLst>
+      <p:ext uri="{BB962C8B-B14F-4D97-AF65-F5344CB8AC3E}">
+        <p14:creationId xmlns:p14="http://schemas.microsoft.com/office/powerpoint/2010/main" val="2623252185"/>
+      </p:ext>
+    </p:extLst>
+  </p:cSld>
+  <p:clrMap bg1="lt1" tx1="dk1" bg2="lt2" tx2="dk2" accent1="accent1" accent2="accent2" accent3="accent3" accent4="accent4" accent5="accent5" accent6="accent6" hlink="hlink" folHlink="folHlink"/>
+  <p:notesStyle>
+    <a:lvl1pPr marL="0" algn="l" defTabSz="457200" rtl="0" eaLnBrk="1" latinLnBrk="0" hangingPunct="1">
+      <a:defRPr sz="1200" kern="1200">
+        <a:solidFill>
+          <a:schemeClr val="tx1"/>
+        </a:solidFill>
+        <a:latin typeface="+mn-lt"/>
+        <a:ea typeface="+mn-ea"/>
+        <a:cs typeface="+mn-cs"/>
+      </a:defRPr>
+    </a:lvl1pPr>
+    <a:lvl2pPr marL="457200" algn="l" defTabSz="457200" rtl="0" eaLnBrk="1" latinLnBrk="0" hangingPunct="1">
+      <a:defRPr sz="1200" kern="1200">
+        <a:solidFill>
+          <a:schemeClr val="tx1"/>
+        </a:solidFill>
+        <a:latin typeface="+mn-lt"/>
+        <a:ea typeface="+mn-ea"/>
+        <a:cs typeface="+mn-cs"/>
+      </a:defRPr>
+    </a:lvl2pPr>
+    <a:lvl3pPr marL="914400" algn="l" defTabSz="457200" rtl="0" eaLnBrk="1" latinLnBrk="0" hangingPunct="1">
+      <a:defRPr sz="1200" kern="1200">
+        <a:solidFill>
+          <a:schemeClr val="tx1"/>
+        </a:solidFill>
+        <a:latin typeface="+mn-lt"/>
+        <a:ea typeface="+mn-ea"/>
+        <a:cs typeface="+mn-cs"/>
+      </a:defRPr>
+    </a:lvl3pPr>
+    <a:lvl4pPr marL="1371600" algn="l" defTabSz="457200" rtl="0" eaLnBrk="1" latinLnBrk="0" hangingPunct="1">
+      <a:defRPr sz="1200" kern="1200">
+        <a:solidFill>
+          <a:schemeClr val="tx1"/>
+        </a:solidFill>
+        <a:latin typeface="+mn-lt"/>
+        <a:ea typeface="+mn-ea"/>
+        <a:cs typeface="+mn-cs"/>
+      </a:defRPr>
+    </a:lvl4pPr>
+    <a:lvl5pPr marL="1828800" algn="l" defTabSz="457200" rtl="0" eaLnBrk="1" latinLnBrk="0" hangingPunct="1">
+      <a:defRPr sz="1200" kern="1200">
+        <a:solidFill>
+          <a:schemeClr val="tx1"/>
+        </a:solidFill>
+        <a:latin typeface="+mn-lt"/>
+        <a:ea typeface="+mn-ea"/>
+        <a:cs typeface="+mn-cs"/>
+      </a:defRPr>
+    </a:lvl5pPr>
+    <a:lvl6pPr marL="2286000" algn="l" defTabSz="457200" rtl="0" eaLnBrk="1" latinLnBrk="0" hangingPunct="1">
+      <a:defRPr sz="1200" kern="1200">
+        <a:solidFill>
+          <a:schemeClr val="tx1"/>
+        </a:solidFill>
+        <a:latin typeface="+mn-lt"/>
+        <a:ea typeface="+mn-ea"/>
+        <a:cs typeface="+mn-cs"/>
+      </a:defRPr>
+    </a:lvl6pPr>
+    <a:lvl7pPr marL="2743200" algn="l" defTabSz="457200" rtl="0" eaLnBrk="1" latinLnBrk="0" hangingPunct="1">
+      <a:defRPr sz="1200" kern="1200">
+        <a:solidFill>
+          <a:schemeClr val="tx1"/>
+        </a:solidFill>
+        <a:latin typeface="+mn-lt"/>
+        <a:ea typeface="+mn-ea"/>
+        <a:cs typeface="+mn-cs"/>
+      </a:defRPr>
+    </a:lvl7pPr>
+    <a:lvl8pPr marL="3200400" algn="l" defTabSz="457200" rtl="0" eaLnBrk="1" latinLnBrk="0" hangingPunct="1">
+      <a:defRPr sz="1200" kern="1200">
+        <a:solidFill>
+          <a:schemeClr val="tx1"/>
+        </a:solidFill>
+        <a:latin typeface="+mn-lt"/>
+        <a:ea typeface="+mn-ea"/>
+        <a:cs typeface="+mn-cs"/>
+      </a:defRPr>
+    </a:lvl8pPr>
+    <a:lvl9pPr marL="3657600" algn="l" defTabSz="457200" rtl="0" eaLnBrk="1" latinLnBrk="0" hangingPunct="1">
+      <a:defRPr sz="1200" kern="1200">
+        <a:solidFill>
+          <a:schemeClr val="tx1"/>
+        </a:solidFill>
+        <a:latin typeface="+mn-lt"/>
+        <a:ea typeface="+mn-ea"/>
+        <a:cs typeface="+mn-cs"/>
+      </a:defRPr>
+    </a:lvl9pPr>
+  </p:notesStyle>
+</p:notesMaster>
+</file>
+
+<file path=ppt/notesSlides/notesSlide1.xml><?xml version="1.0" encoding="utf-8"?>
+<p:notes xmlns:a="http://schemas.openxmlformats.org/drawingml/2006/main" xmlns:p="http://schemas.openxmlformats.org/presentationml/2006/main" xmlns:r="http://schemas.openxmlformats.org/officeDocument/2006/relationships">
+  <p:cSld>
+    <p:spTree>
+      <p:nvGrpSpPr>
+        <p:cNvPr id="1" name=""/>
+        <p:cNvGrpSpPr/>
+        <p:nvPr/>
+      </p:nvGrpSpPr>
+      <p:grpSpPr>
+        <a:xfrm>
+          <a:off x="0" y="0"/>
+          <a:ext cx="0" cy="0"/>
+          <a:chOff x="0" y="0"/>
+          <a:chExt cx="0" cy="0"/>
+        </a:xfrm>
+      </p:grpSpPr>
+      <p:sp>
+        <p:nvSpPr>
+          <p:cNvPr id="2" name="Slide Image Placeholder 1"/>
+          <p:cNvSpPr>
+            <a:spLocks noGrp="1"/>
+          </p:cNvSpPr>
+          <p:nvPr>
+            <p:ph type="sldImg" idx="2"/>
+          </p:nvPr>
+        </p:nvSpPr>
+        <p:spPr/>
+      </p:sp>
+      <p:sp>
+        <p:nvSpPr>
+          <p:cNvPr id="3" name="Notes Placeholder 2"/>
+          <p:cNvSpPr>
+            <a:spLocks noGrp="1"/>
+          </p:cNvSpPr>
+          <p:nvPr>
+            <p:ph type="body" idx="3" sz="quarter"/>
+          </p:nvPr>
+        </p:nvSpPr>
+        <p:spPr/>
+        <p:txBody>
+          <a:bodyPr/>
+          <a:lstStyle/>
+          <a:p>
+            <a:r>
+              <a:t>Opening talk track: Welcome students to this module and explain that the goal is not to memorize features. The goal is to understand when a pattern helps authors build more trustworthy, maintainable, user-friendly Power BI solutions.</a:t>
+            </a:r>
+          </a:p>
+          <a:p>
+            <a:r>
+              <a:t>Module framing: Frame this module as architecture decision-making. Tie features to workload requirements and tenant validation.</a:t>
+            </a:r>
+          </a:p>
+          <a:p>
+            <a:r>
+              <a:t>Set expectations: presentation will introduce the theme, then the lab will let learners build or evaluate the pattern hands-on. Encourage questions about tradeoffs, not just button clicks.</a:t>
+            </a:r>
+          </a:p>
+          <a:p>
+            <a:r>
+              <a:t>Further learning: Power BI Premium: https://learn.microsoft.com/power-bi/enterprise/service-premium-what-is | Microsoft Fabric capacities: https://learn.microsoft.com/fabric/enterprise/licenses | Direct Lake: https://learn.microsoft.com/fabric/get-started/direct-lake-overview</a:t>
+            </a:r>
+          </a:p>
+        </p:txBody>
+      </p:sp>
+      <p:sp>
+        <p:nvSpPr>
+          <p:cNvPr id="4" name="Slide Number Placeholder 3"/>
+          <p:cNvSpPr>
+            <a:spLocks noGrp="1"/>
+          </p:cNvSpPr>
+          <p:nvPr>
+            <p:ph type="sldNum" idx="5" sz="quarter"/>
+          </p:nvPr>
+        </p:nvSpPr>
+        <p:spPr/>
+      </p:sp>
+    </p:spTree>
+  </p:cSld>
+  <p:clrMapOvr>
+    <a:masterClrMapping/>
+  </p:clrMapOvr>
+</p:notes>
+</file>
+
+<file path=ppt/notesSlides/notesSlide10.xml><?xml version="1.0" encoding="utf-8"?>
+<p:notes xmlns:a="http://schemas.openxmlformats.org/drawingml/2006/main" xmlns:p="http://schemas.openxmlformats.org/presentationml/2006/main" xmlns:r="http://schemas.openxmlformats.org/officeDocument/2006/relationships">
+  <p:cSld>
+    <p:spTree>
+      <p:nvGrpSpPr>
+        <p:cNvPr id="1" name=""/>
+        <p:cNvGrpSpPr/>
+        <p:nvPr/>
+      </p:nvGrpSpPr>
+      <p:grpSpPr>
+        <a:xfrm>
+          <a:off x="0" y="0"/>
+          <a:ext cx="0" cy="0"/>
+          <a:chOff x="0" y="0"/>
+          <a:chExt cx="0" cy="0"/>
+        </a:xfrm>
+      </p:grpSpPr>
+      <p:sp>
+        <p:nvSpPr>
+          <p:cNvPr id="2" name="Slide Image Placeholder 1"/>
+          <p:cNvSpPr>
+            <a:spLocks noGrp="1"/>
+          </p:cNvSpPr>
+          <p:nvPr>
+            <p:ph type="sldImg" idx="2"/>
+          </p:nvPr>
+        </p:nvSpPr>
+        <p:spPr/>
+      </p:sp>
+      <p:sp>
+        <p:nvSpPr>
+          <p:cNvPr id="3" name="Notes Placeholder 2"/>
+          <p:cNvSpPr>
+            <a:spLocks noGrp="1"/>
+          </p:cNvSpPr>
+          <p:nvPr>
+            <p:ph type="body" idx="3" sz="quarter"/>
+          </p:nvPr>
+        </p:nvSpPr>
+        <p:spPr/>
+        <p:txBody>
+          <a:bodyPr/>
+          <a:lstStyle/>
+          <a:p>
+            <a:r>
+              <a:t>Core message: 8. OneLake, Lakehouse, and Warehouse.</a:t>
+            </a:r>
+          </a:p>
+          <a:p>
+            <a:r>
+              <a:t>Talking points to expand: Talking points, learner value, and lab connection Talking points • OneLake concept • Lakehouse pattern Why it helps • Warehouse pattern • Power BI integration Lab connection Coverage: Covered. Use the lab README to demonstrate or discuss this topic. Review terms: pattern. 10</a:t>
+            </a:r>
+          </a:p>
+          <a:p>
+            <a:r>
+              <a:t>Why it matters: Frame this module as architecture decision-making. Tie features to workload requirements and tenant validation.</a:t>
+            </a:r>
+          </a:p>
+          <a:p>
+            <a:r>
+              <a:t>How it helps users: connect the technical pattern to clearer decisions, fewer confusing report interactions, better trust in results, or easier support.</a:t>
+            </a:r>
+          </a:p>
+          <a:p>
+            <a:r>
+              <a:t>How it builds on prior lessons: reference the previous layer in the workshop, such as prepared data, a clean model, tested measures, or report UX conventions.</a:t>
+            </a:r>
+          </a:p>
+          <a:p>
+            <a:r>
+              <a:t>Lab connection: Show where this concept appears in the module lab. If the lab path is conceptual or Verify for Gov, explain what learners should document instead of building hands-on.</a:t>
+            </a:r>
+          </a:p>
+          <a:p>
+            <a:r>
+              <a:t>Instructor prompt: Ask one learner to describe the risk of skipping this pattern or using it without validation.</a:t>
+            </a:r>
+          </a:p>
+          <a:p>
+            <a:r>
+              <a:t>Further learning: Power BI Premium: https://learn.microsoft.com/power-bi/enterprise/service-premium-what-is | Microsoft Fabric capacities: https://learn.microsoft.com/fabric/enterprise/licenses | Direct Lake: https://learn.microsoft.com/fabric/get-started/direct-lake-overview</a:t>
+            </a:r>
+          </a:p>
+        </p:txBody>
+      </p:sp>
+      <p:sp>
+        <p:nvSpPr>
+          <p:cNvPr id="4" name="Slide Number Placeholder 3"/>
+          <p:cNvSpPr>
+            <a:spLocks noGrp="1"/>
+          </p:cNvSpPr>
+          <p:nvPr>
+            <p:ph type="sldNum" idx="5" sz="quarter"/>
+          </p:nvPr>
+        </p:nvSpPr>
+        <p:spPr/>
+      </p:sp>
+    </p:spTree>
+  </p:cSld>
+  <p:clrMapOvr>
+    <a:masterClrMapping/>
+  </p:clrMapOvr>
+</p:notes>
+</file>
+
+<file path=ppt/notesSlides/notesSlide11.xml><?xml version="1.0" encoding="utf-8"?>
+<p:notes xmlns:a="http://schemas.openxmlformats.org/drawingml/2006/main" xmlns:p="http://schemas.openxmlformats.org/presentationml/2006/main" xmlns:r="http://schemas.openxmlformats.org/officeDocument/2006/relationships">
+  <p:cSld>
+    <p:spTree>
+      <p:nvGrpSpPr>
+        <p:cNvPr id="1" name=""/>
+        <p:cNvGrpSpPr/>
+        <p:nvPr/>
+      </p:nvGrpSpPr>
+      <p:grpSpPr>
+        <a:xfrm>
+          <a:off x="0" y="0"/>
+          <a:ext cx="0" cy="0"/>
+          <a:chOff x="0" y="0"/>
+          <a:chExt cx="0" cy="0"/>
+        </a:xfrm>
+      </p:grpSpPr>
+      <p:sp>
+        <p:nvSpPr>
+          <p:cNvPr id="2" name="Slide Image Placeholder 1"/>
+          <p:cNvSpPr>
+            <a:spLocks noGrp="1"/>
+          </p:cNvSpPr>
+          <p:nvPr>
+            <p:ph type="sldImg" idx="2"/>
+          </p:nvPr>
+        </p:nvSpPr>
+        <p:spPr/>
+      </p:sp>
+      <p:sp>
+        <p:nvSpPr>
+          <p:cNvPr id="3" name="Notes Placeholder 2"/>
+          <p:cNvSpPr>
+            <a:spLocks noGrp="1"/>
+          </p:cNvSpPr>
+          <p:nvPr>
+            <p:ph type="body" idx="3" sz="quarter"/>
+          </p:nvPr>
+        </p:nvSpPr>
+        <p:spPr/>
+        <p:txBody>
+          <a:bodyPr/>
+          <a:lstStyle/>
+          <a:p>
+            <a:r>
+              <a:t>Core message: 9. Semantic Link.</a:t>
+            </a:r>
+          </a:p>
+          <a:p>
+            <a:r>
+              <a:t>Talking points to expand: Talking points, learner value, and lab connection Talking points • Notebook integration • Semantic model access Why it helps • Data science workflows • Availability caveats Lab connection Coverage: Covered. Use the lab README to demonstrate or discuss this topic. Review terms: science, workflows. 11</a:t>
+            </a:r>
+          </a:p>
+          <a:p>
+            <a:r>
+              <a:t>Why it matters: Frame this module as architecture decision-making. Tie features to workload requirements and tenant validation.</a:t>
+            </a:r>
+          </a:p>
+          <a:p>
+            <a:r>
+              <a:t>How it helps users: connect the technical pattern to clearer decisions, fewer confusing report interactions, better trust in results, or easier support.</a:t>
+            </a:r>
+          </a:p>
+          <a:p>
+            <a:r>
+              <a:t>How it builds on prior lessons: reference the previous layer in the workshop, such as prepared data, a clean model, tested measures, or report UX conventions.</a:t>
+            </a:r>
+          </a:p>
+          <a:p>
+            <a:r>
+              <a:t>Lab connection: Show where this concept appears in the module lab. If the lab path is conceptual or Verify for Gov, explain what learners should document instead of building hands-on.</a:t>
+            </a:r>
+          </a:p>
+          <a:p>
+            <a:r>
+              <a:t>Instructor prompt: Ask one learner to describe the risk of skipping this pattern or using it without validation.</a:t>
+            </a:r>
+          </a:p>
+          <a:p>
+            <a:r>
+              <a:t>Further learning: Power BI Premium: https://learn.microsoft.com/power-bi/enterprise/service-premium-what-is | Microsoft Fabric capacities: https://learn.microsoft.com/fabric/enterprise/licenses | Direct Lake: https://learn.microsoft.com/fabric/get-started/direct-lake-overview</a:t>
+            </a:r>
+          </a:p>
+        </p:txBody>
+      </p:sp>
+      <p:sp>
+        <p:nvSpPr>
+          <p:cNvPr id="4" name="Slide Number Placeholder 3"/>
+          <p:cNvSpPr>
+            <a:spLocks noGrp="1"/>
+          </p:cNvSpPr>
+          <p:nvPr>
+            <p:ph type="sldNum" idx="5" sz="quarter"/>
+          </p:nvPr>
+        </p:nvSpPr>
+        <p:spPr/>
+      </p:sp>
+    </p:spTree>
+  </p:cSld>
+  <p:clrMapOvr>
+    <a:masterClrMapping/>
+  </p:clrMapOvr>
+</p:notes>
+</file>
+
+<file path=ppt/notesSlides/notesSlide12.xml><?xml version="1.0" encoding="utf-8"?>
+<p:notes xmlns:a="http://schemas.openxmlformats.org/drawingml/2006/main" xmlns:p="http://schemas.openxmlformats.org/presentationml/2006/main" xmlns:r="http://schemas.openxmlformats.org/officeDocument/2006/relationships">
+  <p:cSld>
+    <p:spTree>
+      <p:nvGrpSpPr>
+        <p:cNvPr id="1" name=""/>
+        <p:cNvGrpSpPr/>
+        <p:nvPr/>
+      </p:nvGrpSpPr>
+      <p:grpSpPr>
+        <a:xfrm>
+          <a:off x="0" y="0"/>
+          <a:ext cx="0" cy="0"/>
+          <a:chOff x="0" y="0"/>
+          <a:chExt cx="0" cy="0"/>
+        </a:xfrm>
+      </p:grpSpPr>
+      <p:sp>
+        <p:nvSpPr>
+          <p:cNvPr id="2" name="Slide Image Placeholder 1"/>
+          <p:cNvSpPr>
+            <a:spLocks noGrp="1"/>
+          </p:cNvSpPr>
+          <p:nvPr>
+            <p:ph type="sldImg" idx="2"/>
+          </p:nvPr>
+        </p:nvSpPr>
+        <p:spPr/>
+      </p:sp>
+      <p:sp>
+        <p:nvSpPr>
+          <p:cNvPr id="3" name="Notes Placeholder 2"/>
+          <p:cNvSpPr>
+            <a:spLocks noGrp="1"/>
+          </p:cNvSpPr>
+          <p:nvPr>
+            <p:ph type="body" idx="3" sz="quarter"/>
+          </p:nvPr>
+        </p:nvSpPr>
+        <p:spPr/>
+        <p:txBody>
+          <a:bodyPr/>
+          <a:lstStyle/>
+          <a:p>
+            <a:r>
+              <a:t>Core message: 10. Capacity metrics and throttling.</a:t>
+            </a:r>
+          </a:p>
+          <a:p>
+            <a:r>
+              <a:t>Talking points to expand: Talking points, learner value, and lab connection Talking points • Interactive workload • Background workload Why it helps • Refresh pressure • Throttling signals Lab connection Coverage: Covered. Use the lab README to demonstrate or discuss this topic. Review terms: signals. 12</a:t>
+            </a:r>
+          </a:p>
+          <a:p>
+            <a:r>
+              <a:t>Why it matters: Frame this module as architecture decision-making. Tie features to workload requirements and tenant validation.</a:t>
+            </a:r>
+          </a:p>
+          <a:p>
+            <a:r>
+              <a:t>How it helps users: connect the technical pattern to clearer decisions, fewer confusing report interactions, better trust in results, or easier support.</a:t>
+            </a:r>
+          </a:p>
+          <a:p>
+            <a:r>
+              <a:t>How it builds on prior lessons: reference the previous layer in the workshop, such as prepared data, a clean model, tested measures, or report UX conventions.</a:t>
+            </a:r>
+          </a:p>
+          <a:p>
+            <a:r>
+              <a:t>Lab connection: Show where this concept appears in the module lab. If the lab path is conceptual or Verify for Gov, explain what learners should document instead of building hands-on.</a:t>
+            </a:r>
+          </a:p>
+          <a:p>
+            <a:r>
+              <a:t>Instructor prompt: Ask one learner to describe the risk of skipping this pattern or using it without validation.</a:t>
+            </a:r>
+          </a:p>
+          <a:p>
+            <a:r>
+              <a:t>Further learning: Power BI Premium: https://learn.microsoft.com/power-bi/enterprise/service-premium-what-is | Microsoft Fabric capacities: https://learn.microsoft.com/fabric/enterprise/licenses | Direct Lake: https://learn.microsoft.com/fabric/get-started/direct-lake-overview</a:t>
+            </a:r>
+          </a:p>
+        </p:txBody>
+      </p:sp>
+      <p:sp>
+        <p:nvSpPr>
+          <p:cNvPr id="4" name="Slide Number Placeholder 3"/>
+          <p:cNvSpPr>
+            <a:spLocks noGrp="1"/>
+          </p:cNvSpPr>
+          <p:nvPr>
+            <p:ph type="sldNum" idx="5" sz="quarter"/>
+          </p:nvPr>
+        </p:nvSpPr>
+        <p:spPr/>
+      </p:sp>
+    </p:spTree>
+  </p:cSld>
+  <p:clrMapOvr>
+    <a:masterClrMapping/>
+  </p:clrMapOvr>
+</p:notes>
+</file>
+
+<file path=ppt/notesSlides/notesSlide13.xml><?xml version="1.0" encoding="utf-8"?>
+<p:notes xmlns:a="http://schemas.openxmlformats.org/drawingml/2006/main" xmlns:p="http://schemas.openxmlformats.org/presentationml/2006/main" xmlns:r="http://schemas.openxmlformats.org/officeDocument/2006/relationships">
+  <p:cSld>
+    <p:spTree>
+      <p:nvGrpSpPr>
+        <p:cNvPr id="1" name=""/>
+        <p:cNvGrpSpPr/>
+        <p:nvPr/>
+      </p:nvGrpSpPr>
+      <p:grpSpPr>
+        <a:xfrm>
+          <a:off x="0" y="0"/>
+          <a:ext cx="0" cy="0"/>
+          <a:chOff x="0" y="0"/>
+          <a:chExt cx="0" cy="0"/>
+        </a:xfrm>
+      </p:grpSpPr>
+      <p:sp>
+        <p:nvSpPr>
+          <p:cNvPr id="2" name="Slide Image Placeholder 1"/>
+          <p:cNvSpPr>
+            <a:spLocks noGrp="1"/>
+          </p:cNvSpPr>
+          <p:nvPr>
+            <p:ph type="sldImg" idx="2"/>
+          </p:nvPr>
+        </p:nvSpPr>
+        <p:spPr/>
+      </p:sp>
+      <p:sp>
+        <p:nvSpPr>
+          <p:cNvPr id="3" name="Notes Placeholder 2"/>
+          <p:cNvSpPr>
+            <a:spLocks noGrp="1"/>
+          </p:cNvSpPr>
+          <p:nvPr>
+            <p:ph type="body" idx="3" sz="quarter"/>
+          </p:nvPr>
+        </p:nvSpPr>
+        <p:spPr/>
+        <p:txBody>
+          <a:bodyPr/>
+          <a:lstStyle/>
+          <a:p>
+            <a:r>
+              <a:t>Core message: 11. Azure Government considerations.</a:t>
+            </a:r>
+          </a:p>
+          <a:p>
+            <a:r>
+              <a:t>Talking points to expand: Talking points, learner value, and lab connection Talking points • Validate cloud parity • Validate licensing and capacity Why it helps • Validate tenant settings • Provide Gov-safe fallback Lab connection Coverage: Covered. Use the lab README to demonstrate or discuss this topic. Review terms: parity. 13</a:t>
+            </a:r>
+          </a:p>
+          <a:p>
+            <a:r>
+              <a:t>Why it matters: Frame this module as architecture decision-making. Tie features to workload requirements and tenant validation.</a:t>
+            </a:r>
+          </a:p>
+          <a:p>
+            <a:r>
+              <a:t>How it helps users: connect the technical pattern to clearer decisions, fewer confusing report interactions, better trust in results, or easier support.</a:t>
+            </a:r>
+          </a:p>
+          <a:p>
+            <a:r>
+              <a:t>How it builds on prior lessons: reference the previous layer in the workshop, such as prepared data, a clean model, tested measures, or report UX conventions.</a:t>
+            </a:r>
+          </a:p>
+          <a:p>
+            <a:r>
+              <a:t>Lab connection: Show where this concept appears in the module lab. If the lab path is conceptual or Verify for Gov, explain what learners should document instead of building hands-on.</a:t>
+            </a:r>
+          </a:p>
+          <a:p>
+            <a:r>
+              <a:t>Instructor prompt: Ask one learner to describe the risk of skipping this pattern or using it without validation.</a:t>
+            </a:r>
+          </a:p>
+          <a:p>
+            <a:r>
+              <a:t>Further learning: Power BI Premium: https://learn.microsoft.com/power-bi/enterprise/service-premium-what-is | Microsoft Fabric capacities: https://learn.microsoft.com/fabric/enterprise/licenses | Direct Lake: https://learn.microsoft.com/fabric/get-started/direct-lake-overview</a:t>
+            </a:r>
+          </a:p>
+        </p:txBody>
+      </p:sp>
+      <p:sp>
+        <p:nvSpPr>
+          <p:cNvPr id="4" name="Slide Number Placeholder 3"/>
+          <p:cNvSpPr>
+            <a:spLocks noGrp="1"/>
+          </p:cNvSpPr>
+          <p:nvPr>
+            <p:ph type="sldNum" idx="5" sz="quarter"/>
+          </p:nvPr>
+        </p:nvSpPr>
+        <p:spPr/>
+      </p:sp>
+    </p:spTree>
+  </p:cSld>
+  <p:clrMapOvr>
+    <a:masterClrMapping/>
+  </p:clrMapOvr>
+</p:notes>
+</file>
+
+<file path=ppt/notesSlides/notesSlide14.xml><?xml version="1.0" encoding="utf-8"?>
+<p:notes xmlns:a="http://schemas.openxmlformats.org/drawingml/2006/main" xmlns:p="http://schemas.openxmlformats.org/presentationml/2006/main" xmlns:r="http://schemas.openxmlformats.org/officeDocument/2006/relationships">
+  <p:cSld>
+    <p:spTree>
+      <p:nvGrpSpPr>
+        <p:cNvPr id="1" name=""/>
+        <p:cNvGrpSpPr/>
+        <p:nvPr/>
+      </p:nvGrpSpPr>
+      <p:grpSpPr>
+        <a:xfrm>
+          <a:off x="0" y="0"/>
+          <a:ext cx="0" cy="0"/>
+          <a:chOff x="0" y="0"/>
+          <a:chExt cx="0" cy="0"/>
+        </a:xfrm>
+      </p:grpSpPr>
+      <p:sp>
+        <p:nvSpPr>
+          <p:cNvPr id="2" name="Slide Image Placeholder 1"/>
+          <p:cNvSpPr>
+            <a:spLocks noGrp="1"/>
+          </p:cNvSpPr>
+          <p:nvPr>
+            <p:ph type="sldImg" idx="2"/>
+          </p:nvPr>
+        </p:nvSpPr>
+        <p:spPr/>
+      </p:sp>
+      <p:sp>
+        <p:nvSpPr>
+          <p:cNvPr id="3" name="Notes Placeholder 2"/>
+          <p:cNvSpPr>
+            <a:spLocks noGrp="1"/>
+          </p:cNvSpPr>
+          <p:nvPr>
+            <p:ph type="body" idx="3" sz="quarter"/>
+          </p:nvPr>
+        </p:nvSpPr>
+        <p:spPr/>
+        <p:txBody>
+          <a:bodyPr/>
+          <a:lstStyle/>
+          <a:p>
+            <a:r>
+              <a:t>Core message: 12. Architecture decision review.</a:t>
+            </a:r>
+          </a:p>
+          <a:p>
+            <a:r>
+              <a:t>Talking points to expand: Talking points, learner value, and lab connection Talking points • Requirements • Options Why it helps • Risks • Validation plan Lab connection Coverage: Covered. Use the lab README to demonstrate or discuss this topic. Review terms: decision, risks. 14</a:t>
+            </a:r>
+          </a:p>
+          <a:p>
+            <a:r>
+              <a:t>Why it matters: Frame this module as architecture decision-making. Tie features to workload requirements and tenant validation.</a:t>
+            </a:r>
+          </a:p>
+          <a:p>
+            <a:r>
+              <a:t>How it helps users: connect the technical pattern to clearer decisions, fewer confusing report interactions, better trust in results, or easier support.</a:t>
+            </a:r>
+          </a:p>
+          <a:p>
+            <a:r>
+              <a:t>How it builds on prior lessons: reference the previous layer in the workshop, such as prepared data, a clean model, tested measures, or report UX conventions.</a:t>
+            </a:r>
+          </a:p>
+          <a:p>
+            <a:r>
+              <a:t>Lab connection: Show where this concept appears in the module lab. If the lab path is conceptual or Verify for Gov, explain what learners should document instead of building hands-on.</a:t>
+            </a:r>
+          </a:p>
+          <a:p>
+            <a:r>
+              <a:t>Instructor prompt: Ask one learner to describe the risk of skipping this pattern or using it without validation.</a:t>
+            </a:r>
+          </a:p>
+          <a:p>
+            <a:r>
+              <a:t>Further learning: Power BI Premium: https://learn.microsoft.com/power-bi/enterprise/service-premium-what-is | Microsoft Fabric capacities: https://learn.microsoft.com/fabric/enterprise/licenses | Direct Lake: https://learn.microsoft.com/fabric/get-started/direct-lake-overview</a:t>
+            </a:r>
+          </a:p>
+        </p:txBody>
+      </p:sp>
+      <p:sp>
+        <p:nvSpPr>
+          <p:cNvPr id="4" name="Slide Number Placeholder 3"/>
+          <p:cNvSpPr>
+            <a:spLocks noGrp="1"/>
+          </p:cNvSpPr>
+          <p:nvPr>
+            <p:ph type="sldNum" idx="5" sz="quarter"/>
+          </p:nvPr>
+        </p:nvSpPr>
+        <p:spPr/>
+      </p:sp>
+    </p:spTree>
+  </p:cSld>
+  <p:clrMapOvr>
+    <a:masterClrMapping/>
+  </p:clrMapOvr>
+</p:notes>
+</file>
+
+<file path=ppt/notesSlides/notesSlide15.xml><?xml version="1.0" encoding="utf-8"?>
+<p:notes xmlns:a="http://schemas.openxmlformats.org/drawingml/2006/main" xmlns:p="http://schemas.openxmlformats.org/presentationml/2006/main" xmlns:r="http://schemas.openxmlformats.org/officeDocument/2006/relationships">
+  <p:cSld>
+    <p:spTree>
+      <p:nvGrpSpPr>
+        <p:cNvPr id="1" name=""/>
+        <p:cNvGrpSpPr/>
+        <p:nvPr/>
+      </p:nvGrpSpPr>
+      <p:grpSpPr>
+        <a:xfrm>
+          <a:off x="0" y="0"/>
+          <a:ext cx="0" cy="0"/>
+          <a:chOff x="0" y="0"/>
+          <a:chExt cx="0" cy="0"/>
+        </a:xfrm>
+      </p:grpSpPr>
+      <p:sp>
+        <p:nvSpPr>
+          <p:cNvPr id="2" name="Slide Image Placeholder 1"/>
+          <p:cNvSpPr>
+            <a:spLocks noGrp="1"/>
+          </p:cNvSpPr>
+          <p:nvPr>
+            <p:ph type="sldImg" idx="2"/>
+          </p:nvPr>
+        </p:nvSpPr>
+        <p:spPr/>
+      </p:sp>
+      <p:sp>
+        <p:nvSpPr>
+          <p:cNvPr id="3" name="Notes Placeholder 2"/>
+          <p:cNvSpPr>
+            <a:spLocks noGrp="1"/>
+          </p:cNvSpPr>
+          <p:nvPr>
+            <p:ph type="body" idx="3" sz="quarter"/>
+          </p:nvPr>
+        </p:nvSpPr>
+        <p:spPr/>
+        <p:txBody>
+          <a:bodyPr/>
+          <a:lstStyle/>
+          <a:p>
+            <a:r>
+              <a:t>Speaker guidance: Use this slide as the handoff for self-study. Do not read every link aloud. Point out which source is most relevant to the lab just completed and which source helps learners go deeper after class.</a:t>
+            </a:r>
+          </a:p>
+          <a:p>
+            <a:r>
+              <a:t>Suggested prompt: Ask learners to bookmark the source that best matches the skill they want to improve next.</a:t>
+            </a:r>
+          </a:p>
+          <a:p>
+            <a:r>
+              <a:t>Further learning: Power BI Premium: https://learn.microsoft.com/power-bi/enterprise/service-premium-what-is | Microsoft Fabric capacities: https://learn.microsoft.com/fabric/enterprise/licenses | Direct Lake: https://learn.microsoft.com/fabric/get-started/direct-lake-overview</a:t>
+            </a:r>
+          </a:p>
+        </p:txBody>
+      </p:sp>
+      <p:sp>
+        <p:nvSpPr>
+          <p:cNvPr id="4" name="Slide Number Placeholder 3"/>
+          <p:cNvSpPr>
+            <a:spLocks noGrp="1"/>
+          </p:cNvSpPr>
+          <p:nvPr>
+            <p:ph type="sldNum" idx="5" sz="quarter"/>
+          </p:nvPr>
+        </p:nvSpPr>
+        <p:spPr/>
+      </p:sp>
+    </p:spTree>
+  </p:cSld>
+  <p:clrMapOvr>
+    <a:masterClrMapping/>
+  </p:clrMapOvr>
+</p:notes>
+</file>
+
+<file path=ppt/notesSlides/notesSlide2.xml><?xml version="1.0" encoding="utf-8"?>
+<p:notes xmlns:a="http://schemas.openxmlformats.org/drawingml/2006/main" xmlns:p="http://schemas.openxmlformats.org/presentationml/2006/main" xmlns:r="http://schemas.openxmlformats.org/officeDocument/2006/relationships">
+  <p:cSld>
+    <p:spTree>
+      <p:nvGrpSpPr>
+        <p:cNvPr id="1" name=""/>
+        <p:cNvGrpSpPr/>
+        <p:nvPr/>
+      </p:nvGrpSpPr>
+      <p:grpSpPr>
+        <a:xfrm>
+          <a:off x="0" y="0"/>
+          <a:ext cx="0" cy="0"/>
+          <a:chOff x="0" y="0"/>
+          <a:chExt cx="0" cy="0"/>
+        </a:xfrm>
+      </p:grpSpPr>
+      <p:sp>
+        <p:nvSpPr>
+          <p:cNvPr id="2" name="Slide Image Placeholder 1"/>
+          <p:cNvSpPr>
+            <a:spLocks noGrp="1"/>
+          </p:cNvSpPr>
+          <p:nvPr>
+            <p:ph type="sldImg" idx="2"/>
+          </p:nvPr>
+        </p:nvSpPr>
+        <p:spPr/>
+      </p:sp>
+      <p:sp>
+        <p:nvSpPr>
+          <p:cNvPr id="3" name="Notes Placeholder 2"/>
+          <p:cNvSpPr>
+            <a:spLocks noGrp="1"/>
+          </p:cNvSpPr>
+          <p:nvPr>
+            <p:ph type="body" idx="3" sz="quarter"/>
+          </p:nvPr>
+        </p:nvSpPr>
+        <p:spPr/>
+        <p:txBody>
+          <a:bodyPr/>
+          <a:lstStyle/>
+          <a:p>
+            <a:r>
+              <a:t>Speaker guidance: Emphasize sequence and dependency. Explain what students should already know from prior modules and what this module adds on top.</a:t>
+            </a:r>
+          </a:p>
+          <a:p>
+            <a:r>
+              <a:t>Module framing: Frame this module as architecture decision-making. Tie features to workload requirements and tenant validation.</a:t>
+            </a:r>
+          </a:p>
+          <a:p>
+            <a:r>
+              <a:t>Transition: After this slide, move from the concept map into the specific pattern or lab activity.</a:t>
+            </a:r>
+          </a:p>
+          <a:p>
+            <a:r>
+              <a:t>Further learning: Power BI Premium: https://learn.microsoft.com/power-bi/enterprise/service-premium-what-is | Microsoft Fabric capacities: https://learn.microsoft.com/fabric/enterprise/licenses | Direct Lake: https://learn.microsoft.com/fabric/get-started/direct-lake-overview</a:t>
+            </a:r>
+          </a:p>
+        </p:txBody>
+      </p:sp>
+      <p:sp>
+        <p:nvSpPr>
+          <p:cNvPr id="4" name="Slide Number Placeholder 3"/>
+          <p:cNvSpPr>
+            <a:spLocks noGrp="1"/>
+          </p:cNvSpPr>
+          <p:nvPr>
+            <p:ph type="sldNum" idx="5" sz="quarter"/>
+          </p:nvPr>
+        </p:nvSpPr>
+        <p:spPr/>
+      </p:sp>
+    </p:spTree>
+  </p:cSld>
+  <p:clrMapOvr>
+    <a:masterClrMapping/>
+  </p:clrMapOvr>
+</p:notes>
+</file>
+
+<file path=ppt/notesSlides/notesSlide3.xml><?xml version="1.0" encoding="utf-8"?>
+<p:notes xmlns:a="http://schemas.openxmlformats.org/drawingml/2006/main" xmlns:p="http://schemas.openxmlformats.org/presentationml/2006/main" xmlns:r="http://schemas.openxmlformats.org/officeDocument/2006/relationships">
+  <p:cSld>
+    <p:spTree>
+      <p:nvGrpSpPr>
+        <p:cNvPr id="1" name=""/>
+        <p:cNvGrpSpPr/>
+        <p:nvPr/>
+      </p:nvGrpSpPr>
+      <p:grpSpPr>
+        <a:xfrm>
+          <a:off x="0" y="0"/>
+          <a:ext cx="0" cy="0"/>
+          <a:chOff x="0" y="0"/>
+          <a:chExt cx="0" cy="0"/>
+        </a:xfrm>
+      </p:grpSpPr>
+      <p:sp>
+        <p:nvSpPr>
+          <p:cNvPr id="2" name="Slide Image Placeholder 1"/>
+          <p:cNvSpPr>
+            <a:spLocks noGrp="1"/>
+          </p:cNvSpPr>
+          <p:nvPr>
+            <p:ph type="sldImg" idx="2"/>
+          </p:nvPr>
+        </p:nvSpPr>
+        <p:spPr/>
+      </p:sp>
+      <p:sp>
+        <p:nvSpPr>
+          <p:cNvPr id="3" name="Notes Placeholder 2"/>
+          <p:cNvSpPr>
+            <a:spLocks noGrp="1"/>
+          </p:cNvSpPr>
+          <p:nvPr>
+            <p:ph type="body" idx="3" sz="quarter"/>
+          </p:nvPr>
+        </p:nvSpPr>
+        <p:spPr/>
+        <p:txBody>
+          <a:bodyPr/>
+          <a:lstStyle/>
+          <a:p>
+            <a:r>
+              <a:t>Core message: 1. Capacity-aware architecture.</a:t>
+            </a:r>
+          </a:p>
+          <a:p>
+            <a:r>
+              <a:t>Talking points to expand: Talking points, learner value, and lab connection Talking points • User scale • Data size • Refresh needs Why it helps • Query performance • Governance Lab connection Coverage: Covered. Use the lab README to demonstrate or discuss this topic. Review terms: performance. 03</a:t>
+            </a:r>
+          </a:p>
+          <a:p>
+            <a:r>
+              <a:t>Why it matters: Frame this module as architecture decision-making. Tie features to workload requirements and tenant validation.</a:t>
+            </a:r>
+          </a:p>
+          <a:p>
+            <a:r>
+              <a:t>How it helps users: connect the technical pattern to clearer decisions, fewer confusing report interactions, better trust in results, or easier support.</a:t>
+            </a:r>
+          </a:p>
+          <a:p>
+            <a:r>
+              <a:t>How it builds on prior lessons: reference the previous layer in the workshop, such as prepared data, a clean model, tested measures, or report UX conventions.</a:t>
+            </a:r>
+          </a:p>
+          <a:p>
+            <a:r>
+              <a:t>Lab connection: Show where this concept appears in the module lab. If the lab path is conceptual or Verify for Gov, explain what learners should document instead of building hands-on.</a:t>
+            </a:r>
+          </a:p>
+          <a:p>
+            <a:r>
+              <a:t>Instructor prompt: Ask one learner to describe the risk of skipping this pattern or using it without validation.</a:t>
+            </a:r>
+          </a:p>
+          <a:p>
+            <a:r>
+              <a:t>Further learning: Power BI Premium: https://learn.microsoft.com/power-bi/enterprise/service-premium-what-is | Microsoft Fabric capacities: https://learn.microsoft.com/fabric/enterprise/licenses | Direct Lake: https://learn.microsoft.com/fabric/get-started/direct-lake-overview</a:t>
+            </a:r>
+          </a:p>
+        </p:txBody>
+      </p:sp>
+      <p:sp>
+        <p:nvSpPr>
+          <p:cNvPr id="4" name="Slide Number Placeholder 3"/>
+          <p:cNvSpPr>
+            <a:spLocks noGrp="1"/>
+          </p:cNvSpPr>
+          <p:nvPr>
+            <p:ph type="sldNum" idx="5" sz="quarter"/>
+          </p:nvPr>
+        </p:nvSpPr>
+        <p:spPr/>
+      </p:sp>
+    </p:spTree>
+  </p:cSld>
+  <p:clrMapOvr>
+    <a:masterClrMapping/>
+  </p:clrMapOvr>
+</p:notes>
+</file>
+
+<file path=ppt/notesSlides/notesSlide4.xml><?xml version="1.0" encoding="utf-8"?>
+<p:notes xmlns:a="http://schemas.openxmlformats.org/drawingml/2006/main" xmlns:p="http://schemas.openxmlformats.org/presentationml/2006/main" xmlns:r="http://schemas.openxmlformats.org/officeDocument/2006/relationships">
+  <p:cSld>
+    <p:spTree>
+      <p:nvGrpSpPr>
+        <p:cNvPr id="1" name=""/>
+        <p:cNvGrpSpPr/>
+        <p:nvPr/>
+      </p:nvGrpSpPr>
+      <p:grpSpPr>
+        <a:xfrm>
+          <a:off x="0" y="0"/>
+          <a:ext cx="0" cy="0"/>
+          <a:chOff x="0" y="0"/>
+          <a:chExt cx="0" cy="0"/>
+        </a:xfrm>
+      </p:grpSpPr>
+      <p:sp>
+        <p:nvSpPr>
+          <p:cNvPr id="2" name="Slide Image Placeholder 1"/>
+          <p:cNvSpPr>
+            <a:spLocks noGrp="1"/>
+          </p:cNvSpPr>
+          <p:nvPr>
+            <p:ph type="sldImg" idx="2"/>
+          </p:nvPr>
+        </p:nvSpPr>
+        <p:spPr/>
+      </p:sp>
+      <p:sp>
+        <p:nvSpPr>
+          <p:cNvPr id="3" name="Notes Placeholder 2"/>
+          <p:cNvSpPr>
+            <a:spLocks noGrp="1"/>
+          </p:cNvSpPr>
+          <p:nvPr>
+            <p:ph type="body" idx="3" sz="quarter"/>
+          </p:nvPr>
+        </p:nvSpPr>
+        <p:spPr/>
+        <p:txBody>
+          <a:bodyPr/>
+          <a:lstStyle/>
+          <a:p>
+            <a:r>
+              <a:t>Core message: 2. Licensing and capacity options.</a:t>
+            </a:r>
+          </a:p>
+          <a:p>
+            <a:r>
+              <a:t>Talking points to expand: Talking points, learner value, and lab connection Talking points • Power BI Pro • Premium Per User • Premium capacity Why it helps • Fabric capacity • Workspace assignment Lab connection Coverage: Covered. Use the lab README to demonstrate or discuss this topic. Review terms: assignment. 04</a:t>
+            </a:r>
+          </a:p>
+          <a:p>
+            <a:r>
+              <a:t>Why it matters: Frame this module as architecture decision-making. Tie features to workload requirements and tenant validation.</a:t>
+            </a:r>
+          </a:p>
+          <a:p>
+            <a:r>
+              <a:t>How it helps users: connect the technical pattern to clearer decisions, fewer confusing report interactions, better trust in results, or easier support.</a:t>
+            </a:r>
+          </a:p>
+          <a:p>
+            <a:r>
+              <a:t>How it builds on prior lessons: reference the previous layer in the workshop, such as prepared data, a clean model, tested measures, or report UX conventions.</a:t>
+            </a:r>
+          </a:p>
+          <a:p>
+            <a:r>
+              <a:t>Lab connection: Show where this concept appears in the module lab. If the lab path is conceptual or Verify for Gov, explain what learners should document instead of building hands-on.</a:t>
+            </a:r>
+          </a:p>
+          <a:p>
+            <a:r>
+              <a:t>Instructor prompt: Ask one learner to describe the risk of skipping this pattern or using it without validation.</a:t>
+            </a:r>
+          </a:p>
+          <a:p>
+            <a:r>
+              <a:t>Further learning: Power BI Premium: https://learn.microsoft.com/power-bi/enterprise/service-premium-what-is | Microsoft Fabric capacities: https://learn.microsoft.com/fabric/enterprise/licenses | Direct Lake: https://learn.microsoft.com/fabric/get-started/direct-lake-overview</a:t>
+            </a:r>
+          </a:p>
+        </p:txBody>
+      </p:sp>
+      <p:sp>
+        <p:nvSpPr>
+          <p:cNvPr id="4" name="Slide Number Placeholder 3"/>
+          <p:cNvSpPr>
+            <a:spLocks noGrp="1"/>
+          </p:cNvSpPr>
+          <p:nvPr>
+            <p:ph type="sldNum" idx="5" sz="quarter"/>
+          </p:nvPr>
+        </p:nvSpPr>
+        <p:spPr/>
+      </p:sp>
+    </p:spTree>
+  </p:cSld>
+  <p:clrMapOvr>
+    <a:masterClrMapping/>
+  </p:clrMapOvr>
+</p:notes>
+</file>
+
+<file path=ppt/notesSlides/notesSlide5.xml><?xml version="1.0" encoding="utf-8"?>
+<p:notes xmlns:a="http://schemas.openxmlformats.org/drawingml/2006/main" xmlns:p="http://schemas.openxmlformats.org/presentationml/2006/main" xmlns:r="http://schemas.openxmlformats.org/officeDocument/2006/relationships">
+  <p:cSld>
+    <p:spTree>
+      <p:nvGrpSpPr>
+        <p:cNvPr id="1" name=""/>
+        <p:cNvGrpSpPr/>
+        <p:nvPr/>
+      </p:nvGrpSpPr>
+      <p:grpSpPr>
+        <a:xfrm>
+          <a:off x="0" y="0"/>
+          <a:ext cx="0" cy="0"/>
+          <a:chOff x="0" y="0"/>
+          <a:chExt cx="0" cy="0"/>
+        </a:xfrm>
+      </p:grpSpPr>
+      <p:sp>
+        <p:nvSpPr>
+          <p:cNvPr id="2" name="Slide Image Placeholder 1"/>
+          <p:cNvSpPr>
+            <a:spLocks noGrp="1"/>
+          </p:cNvSpPr>
+          <p:nvPr>
+            <p:ph type="sldImg" idx="2"/>
+          </p:nvPr>
+        </p:nvSpPr>
+        <p:spPr/>
+      </p:sp>
+      <p:sp>
+        <p:nvSpPr>
+          <p:cNvPr id="3" name="Notes Placeholder 2"/>
+          <p:cNvSpPr>
+            <a:spLocks noGrp="1"/>
+          </p:cNvSpPr>
+          <p:nvPr>
+            <p:ph type="body" idx="3" sz="quarter"/>
+          </p:nvPr>
+        </p:nvSpPr>
+        <p:spPr/>
+        <p:txBody>
+          <a:bodyPr/>
+          <a:lstStyle/>
+          <a:p>
+            <a:r>
+              <a:t>Core message: 3. Large semantic models.</a:t>
+            </a:r>
+          </a:p>
+          <a:p>
+            <a:r>
+              <a:t>Talking points to expand: Talking points, learner value, and lab connection Talking points • Model size • Memory • Refresh Why it helps • Storage format • Capacity dependency Lab connection Coverage: Covered. Use the lab README to demonstrate or discuss this topic. Review terms: dependency, format, storage. 05</a:t>
+            </a:r>
+          </a:p>
+          <a:p>
+            <a:r>
+              <a:t>Why it matters: Frame this module as architecture decision-making. Tie features to workload requirements and tenant validation.</a:t>
+            </a:r>
+          </a:p>
+          <a:p>
+            <a:r>
+              <a:t>How it helps users: connect the technical pattern to clearer decisions, fewer confusing report interactions, better trust in results, or easier support.</a:t>
+            </a:r>
+          </a:p>
+          <a:p>
+            <a:r>
+              <a:t>How it builds on prior lessons: reference the previous layer in the workshop, such as prepared data, a clean model, tested measures, or report UX conventions.</a:t>
+            </a:r>
+          </a:p>
+          <a:p>
+            <a:r>
+              <a:t>Lab connection: Show where this concept appears in the module lab. If the lab path is conceptual or Verify for Gov, explain what learners should document instead of building hands-on.</a:t>
+            </a:r>
+          </a:p>
+          <a:p>
+            <a:r>
+              <a:t>Instructor prompt: Ask one learner to describe the risk of skipping this pattern or using it without validation.</a:t>
+            </a:r>
+          </a:p>
+          <a:p>
+            <a:r>
+              <a:t>Further learning: Power BI Premium: https://learn.microsoft.com/power-bi/enterprise/service-premium-what-is | Microsoft Fabric capacities: https://learn.microsoft.com/fabric/enterprise/licenses | Direct Lake: https://learn.microsoft.com/fabric/get-started/direct-lake-overview</a:t>
+            </a:r>
+          </a:p>
+        </p:txBody>
+      </p:sp>
+      <p:sp>
+        <p:nvSpPr>
+          <p:cNvPr id="4" name="Slide Number Placeholder 3"/>
+          <p:cNvSpPr>
+            <a:spLocks noGrp="1"/>
+          </p:cNvSpPr>
+          <p:nvPr>
+            <p:ph type="sldNum" idx="5" sz="quarter"/>
+          </p:nvPr>
+        </p:nvSpPr>
+        <p:spPr/>
+      </p:sp>
+    </p:spTree>
+  </p:cSld>
+  <p:clrMapOvr>
+    <a:masterClrMapping/>
+  </p:clrMapOvr>
+</p:notes>
+</file>
+
+<file path=ppt/notesSlides/notesSlide6.xml><?xml version="1.0" encoding="utf-8"?>
+<p:notes xmlns:a="http://schemas.openxmlformats.org/drawingml/2006/main" xmlns:p="http://schemas.openxmlformats.org/presentationml/2006/main" xmlns:r="http://schemas.openxmlformats.org/officeDocument/2006/relationships">
+  <p:cSld>
+    <p:spTree>
+      <p:nvGrpSpPr>
+        <p:cNvPr id="1" name=""/>
+        <p:cNvGrpSpPr/>
+        <p:nvPr/>
+      </p:nvGrpSpPr>
+      <p:grpSpPr>
+        <a:xfrm>
+          <a:off x="0" y="0"/>
+          <a:ext cx="0" cy="0"/>
+          <a:chOff x="0" y="0"/>
+          <a:chExt cx="0" cy="0"/>
+        </a:xfrm>
+      </p:grpSpPr>
+      <p:sp>
+        <p:nvSpPr>
+          <p:cNvPr id="2" name="Slide Image Placeholder 1"/>
+          <p:cNvSpPr>
+            <a:spLocks noGrp="1"/>
+          </p:cNvSpPr>
+          <p:nvPr>
+            <p:ph type="sldImg" idx="2"/>
+          </p:nvPr>
+        </p:nvSpPr>
+        <p:spPr/>
+      </p:sp>
+      <p:sp>
+        <p:nvSpPr>
+          <p:cNvPr id="3" name="Notes Placeholder 2"/>
+          <p:cNvSpPr>
+            <a:spLocks noGrp="1"/>
+          </p:cNvSpPr>
+          <p:nvPr>
+            <p:ph type="body" idx="3" sz="quarter"/>
+          </p:nvPr>
+        </p:nvSpPr>
+        <p:spPr/>
+        <p:txBody>
+          <a:bodyPr/>
+          <a:lstStyle/>
+          <a:p>
+            <a:r>
+              <a:t>Core message: 4. XMLA endpoint.</a:t>
+            </a:r>
+          </a:p>
+          <a:p>
+            <a:r>
+              <a:t>Talking points to expand: Talking points, learner value, and lab connection Talking points • Read/write workflows • External tools Why it helps • ALM patterns • Security and admin settings Lab connection Coverage: Covered. Use the lab README to demonstrate or discuss this topic. Review terms: external, patterns, tools, workflows. 06</a:t>
+            </a:r>
+          </a:p>
+          <a:p>
+            <a:r>
+              <a:t>Why it matters: Frame this module as architecture decision-making. Tie features to workload requirements and tenant validation.</a:t>
+            </a:r>
+          </a:p>
+          <a:p>
+            <a:r>
+              <a:t>How it helps users: connect the technical pattern to clearer decisions, fewer confusing report interactions, better trust in results, or easier support.</a:t>
+            </a:r>
+          </a:p>
+          <a:p>
+            <a:r>
+              <a:t>How it builds on prior lessons: reference the previous layer in the workshop, such as prepared data, a clean model, tested measures, or report UX conventions.</a:t>
+            </a:r>
+          </a:p>
+          <a:p>
+            <a:r>
+              <a:t>Lab connection: Show where this concept appears in the module lab. If the lab path is conceptual or Verify for Gov, explain what learners should document instead of building hands-on.</a:t>
+            </a:r>
+          </a:p>
+          <a:p>
+            <a:r>
+              <a:t>Instructor prompt: Ask one learner to describe the risk of skipping this pattern or using it without validation.</a:t>
+            </a:r>
+          </a:p>
+          <a:p>
+            <a:r>
+              <a:t>Further learning: Power BI Premium: https://learn.microsoft.com/power-bi/enterprise/service-premium-what-is | Microsoft Fabric capacities: https://learn.microsoft.com/fabric/enterprise/licenses | Direct Lake: https://learn.microsoft.com/fabric/get-started/direct-lake-overview</a:t>
+            </a:r>
+          </a:p>
+        </p:txBody>
+      </p:sp>
+      <p:sp>
+        <p:nvSpPr>
+          <p:cNvPr id="4" name="Slide Number Placeholder 3"/>
+          <p:cNvSpPr>
+            <a:spLocks noGrp="1"/>
+          </p:cNvSpPr>
+          <p:nvPr>
+            <p:ph type="sldNum" idx="5" sz="quarter"/>
+          </p:nvPr>
+        </p:nvSpPr>
+        <p:spPr/>
+      </p:sp>
+    </p:spTree>
+  </p:cSld>
+  <p:clrMapOvr>
+    <a:masterClrMapping/>
+  </p:clrMapOvr>
+</p:notes>
+</file>
+
+<file path=ppt/notesSlides/notesSlide7.xml><?xml version="1.0" encoding="utf-8"?>
+<p:notes xmlns:a="http://schemas.openxmlformats.org/drawingml/2006/main" xmlns:p="http://schemas.openxmlformats.org/presentationml/2006/main" xmlns:r="http://schemas.openxmlformats.org/officeDocument/2006/relationships">
+  <p:cSld>
+    <p:spTree>
+      <p:nvGrpSpPr>
+        <p:cNvPr id="1" name=""/>
+        <p:cNvGrpSpPr/>
+        <p:nvPr/>
+      </p:nvGrpSpPr>
+      <p:grpSpPr>
+        <a:xfrm>
+          <a:off x="0" y="0"/>
+          <a:ext cx="0" cy="0"/>
+          <a:chOff x="0" y="0"/>
+          <a:chExt cx="0" cy="0"/>
+        </a:xfrm>
+      </p:grpSpPr>
+      <p:sp>
+        <p:nvSpPr>
+          <p:cNvPr id="2" name="Slide Image Placeholder 1"/>
+          <p:cNvSpPr>
+            <a:spLocks noGrp="1"/>
+          </p:cNvSpPr>
+          <p:nvPr>
+            <p:ph type="sldImg" idx="2"/>
+          </p:nvPr>
+        </p:nvSpPr>
+        <p:spPr/>
+      </p:sp>
+      <p:sp>
+        <p:nvSpPr>
+          <p:cNvPr id="3" name="Notes Placeholder 2"/>
+          <p:cNvSpPr>
+            <a:spLocks noGrp="1"/>
+          </p:cNvSpPr>
+          <p:nvPr>
+            <p:ph type="body" idx="3" sz="quarter"/>
+          </p:nvPr>
+        </p:nvSpPr>
+        <p:spPr/>
+        <p:txBody>
+          <a:bodyPr/>
+          <a:lstStyle/>
+          <a:p>
+            <a:r>
+              <a:t>Core message: 5. Paginated reports.</a:t>
+            </a:r>
+          </a:p>
+          <a:p>
+            <a:r>
+              <a:t>Talking points to expand: Talking points, learner value, and lab connection Talking points • Pixel-perfect reporting • Operational reports Why it helps • Export scenarios • Report Builder Lab connection Coverage: Covered. Use the lab README to demonstrate or discuss this topic. Review terms: perfect, pixel, reporting. 07</a:t>
+            </a:r>
+          </a:p>
+          <a:p>
+            <a:r>
+              <a:t>Why it matters: Frame this module as architecture decision-making. Tie features to workload requirements and tenant validation.</a:t>
+            </a:r>
+          </a:p>
+          <a:p>
+            <a:r>
+              <a:t>How it helps users: connect the technical pattern to clearer decisions, fewer confusing report interactions, better trust in results, or easier support.</a:t>
+            </a:r>
+          </a:p>
+          <a:p>
+            <a:r>
+              <a:t>How it builds on prior lessons: reference the previous layer in the workshop, such as prepared data, a clean model, tested measures, or report UX conventions.</a:t>
+            </a:r>
+          </a:p>
+          <a:p>
+            <a:r>
+              <a:t>Lab connection: Show where this concept appears in the module lab. If the lab path is conceptual or Verify for Gov, explain what learners should document instead of building hands-on.</a:t>
+            </a:r>
+          </a:p>
+          <a:p>
+            <a:r>
+              <a:t>Instructor prompt: Ask one learner to describe the risk of skipping this pattern or using it without validation.</a:t>
+            </a:r>
+          </a:p>
+          <a:p>
+            <a:r>
+              <a:t>Further learning: Power BI Premium: https://learn.microsoft.com/power-bi/enterprise/service-premium-what-is | Microsoft Fabric capacities: https://learn.microsoft.com/fabric/enterprise/licenses | Direct Lake: https://learn.microsoft.com/fabric/get-started/direct-lake-overview</a:t>
+            </a:r>
+          </a:p>
+        </p:txBody>
+      </p:sp>
+      <p:sp>
+        <p:nvSpPr>
+          <p:cNvPr id="4" name="Slide Number Placeholder 3"/>
+          <p:cNvSpPr>
+            <a:spLocks noGrp="1"/>
+          </p:cNvSpPr>
+          <p:nvPr>
+            <p:ph type="sldNum" idx="5" sz="quarter"/>
+          </p:nvPr>
+        </p:nvSpPr>
+        <p:spPr/>
+      </p:sp>
+    </p:spTree>
+  </p:cSld>
+  <p:clrMapOvr>
+    <a:masterClrMapping/>
+  </p:clrMapOvr>
+</p:notes>
+</file>
+
+<file path=ppt/notesSlides/notesSlide8.xml><?xml version="1.0" encoding="utf-8"?>
+<p:notes xmlns:a="http://schemas.openxmlformats.org/drawingml/2006/main" xmlns:p="http://schemas.openxmlformats.org/presentationml/2006/main" xmlns:r="http://schemas.openxmlformats.org/officeDocument/2006/relationships">
+  <p:cSld>
+    <p:spTree>
+      <p:nvGrpSpPr>
+        <p:cNvPr id="1" name=""/>
+        <p:cNvGrpSpPr/>
+        <p:nvPr/>
+      </p:nvGrpSpPr>
+      <p:grpSpPr>
+        <a:xfrm>
+          <a:off x="0" y="0"/>
+          <a:ext cx="0" cy="0"/>
+          <a:chOff x="0" y="0"/>
+          <a:chExt cx="0" cy="0"/>
+        </a:xfrm>
+      </p:grpSpPr>
+      <p:sp>
+        <p:nvSpPr>
+          <p:cNvPr id="2" name="Slide Image Placeholder 1"/>
+          <p:cNvSpPr>
+            <a:spLocks noGrp="1"/>
+          </p:cNvSpPr>
+          <p:nvPr>
+            <p:ph type="sldImg" idx="2"/>
+          </p:nvPr>
+        </p:nvSpPr>
+        <p:spPr/>
+      </p:sp>
+      <p:sp>
+        <p:nvSpPr>
+          <p:cNvPr id="3" name="Notes Placeholder 2"/>
+          <p:cNvSpPr>
+            <a:spLocks noGrp="1"/>
+          </p:cNvSpPr>
+          <p:nvPr>
+            <p:ph type="body" idx="3" sz="quarter"/>
+          </p:nvPr>
+        </p:nvSpPr>
+        <p:spPr/>
+        <p:txBody>
+          <a:bodyPr/>
+          <a:lstStyle/>
+          <a:p>
+            <a:r>
+              <a:t>Core message: 6. Fabric capacity.</a:t>
+            </a:r>
+          </a:p>
+          <a:p>
+            <a:r>
+              <a:t>Talking points to expand: Talking points, learner value, and lab connection Talking points • Capacity units • Workloads Why it helps • Workspace experience • Gov validation Lab connection Coverage: Covered. Use the lab README to demonstrate or discuss this topic. Review terms: experience, units, workloads. 08</a:t>
+            </a:r>
+          </a:p>
+          <a:p>
+            <a:r>
+              <a:t>Why it matters: Frame this module as architecture decision-making. Tie features to workload requirements and tenant validation.</a:t>
+            </a:r>
+          </a:p>
+          <a:p>
+            <a:r>
+              <a:t>How it helps users: connect the technical pattern to clearer decisions, fewer confusing report interactions, better trust in results, or easier support.</a:t>
+            </a:r>
+          </a:p>
+          <a:p>
+            <a:r>
+              <a:t>How it builds on prior lessons: reference the previous layer in the workshop, such as prepared data, a clean model, tested measures, or report UX conventions.</a:t>
+            </a:r>
+          </a:p>
+          <a:p>
+            <a:r>
+              <a:t>Lab connection: Show where this concept appears in the module lab. If the lab path is conceptual or Verify for Gov, explain what learners should document instead of building hands-on.</a:t>
+            </a:r>
+          </a:p>
+          <a:p>
+            <a:r>
+              <a:t>Instructor prompt: Ask one learner to describe the risk of skipping this pattern or using it without validation.</a:t>
+            </a:r>
+          </a:p>
+          <a:p>
+            <a:r>
+              <a:t>Further learning: Power BI Premium: https://learn.microsoft.com/power-bi/enterprise/service-premium-what-is | Microsoft Fabric capacities: https://learn.microsoft.com/fabric/enterprise/licenses | Direct Lake: https://learn.microsoft.com/fabric/get-started/direct-lake-overview</a:t>
+            </a:r>
+          </a:p>
+        </p:txBody>
+      </p:sp>
+      <p:sp>
+        <p:nvSpPr>
+          <p:cNvPr id="4" name="Slide Number Placeholder 3"/>
+          <p:cNvSpPr>
+            <a:spLocks noGrp="1"/>
+          </p:cNvSpPr>
+          <p:nvPr>
+            <p:ph type="sldNum" idx="5" sz="quarter"/>
+          </p:nvPr>
+        </p:nvSpPr>
+        <p:spPr/>
+      </p:sp>
+    </p:spTree>
+  </p:cSld>
+  <p:clrMapOvr>
+    <a:masterClrMapping/>
+  </p:clrMapOvr>
+</p:notes>
+</file>
+
+<file path=ppt/notesSlides/notesSlide9.xml><?xml version="1.0" encoding="utf-8"?>
+<p:notes xmlns:a="http://schemas.openxmlformats.org/drawingml/2006/main" xmlns:p="http://schemas.openxmlformats.org/presentationml/2006/main" xmlns:r="http://schemas.openxmlformats.org/officeDocument/2006/relationships">
+  <p:cSld>
+    <p:spTree>
+      <p:nvGrpSpPr>
+        <p:cNvPr id="1" name=""/>
+        <p:cNvGrpSpPr/>
+        <p:nvPr/>
+      </p:nvGrpSpPr>
+      <p:grpSpPr>
+        <a:xfrm>
+          <a:off x="0" y="0"/>
+          <a:ext cx="0" cy="0"/>
+          <a:chOff x="0" y="0"/>
+          <a:chExt cx="0" cy="0"/>
+        </a:xfrm>
+      </p:grpSpPr>
+      <p:sp>
+        <p:nvSpPr>
+          <p:cNvPr id="2" name="Slide Image Placeholder 1"/>
+          <p:cNvSpPr>
+            <a:spLocks noGrp="1"/>
+          </p:cNvSpPr>
+          <p:nvPr>
+            <p:ph type="sldImg" idx="2"/>
+          </p:nvPr>
+        </p:nvSpPr>
+        <p:spPr/>
+      </p:sp>
+      <p:sp>
+        <p:nvSpPr>
+          <p:cNvPr id="3" name="Notes Placeholder 2"/>
+          <p:cNvSpPr>
+            <a:spLocks noGrp="1"/>
+          </p:cNvSpPr>
+          <p:nvPr>
+            <p:ph type="body" idx="3" sz="quarter"/>
+          </p:nvPr>
+        </p:nvSpPr>
+        <p:spPr/>
+        <p:txBody>
+          <a:bodyPr/>
+          <a:lstStyle/>
+          <a:p>
+            <a:r>
+              <a:t>Core message: 7. Direct Lake.</a:t>
+            </a:r>
+          </a:p>
+          <a:p>
+            <a:r>
+              <a:t>Talking points to expand: Talking points, learner value, and lab connection Talking points • Import vs. DirectQuery vs. Direct Lake • Data freshness Why it helps • Modeling considerations • Fallback options Lab connection Coverage: Covered. Use the lab README to demonstrate or discuss this topic. Review terms: freshness, modeling. 09</a:t>
+            </a:r>
+          </a:p>
+          <a:p>
+            <a:r>
+              <a:t>Why it matters: Frame this module as architecture decision-making. Tie features to workload requirements and tenant validation.</a:t>
+            </a:r>
+          </a:p>
+          <a:p>
+            <a:r>
+              <a:t>How it helps users: connect the technical pattern to clearer decisions, fewer confusing report interactions, better trust in results, or easier support.</a:t>
+            </a:r>
+          </a:p>
+          <a:p>
+            <a:r>
+              <a:t>How it builds on prior lessons: reference the previous layer in the workshop, such as prepared data, a clean model, tested measures, or report UX conventions.</a:t>
+            </a:r>
+          </a:p>
+          <a:p>
+            <a:r>
+              <a:t>Lab connection: Show where this concept appears in the module lab. If the lab path is conceptual or Verify for Gov, explain what learners should document instead of building hands-on.</a:t>
+            </a:r>
+          </a:p>
+          <a:p>
+            <a:r>
+              <a:t>Instructor prompt: Ask one learner to describe the risk of skipping this pattern or using it without validation.</a:t>
+            </a:r>
+          </a:p>
+          <a:p>
+            <a:r>
+              <a:t>Further learning: Power BI Premium: https://learn.microsoft.com/power-bi/enterprise/service-premium-what-is | Microsoft Fabric capacities: https://learn.microsoft.com/fabric/enterprise/licenses | Direct Lake: https://learn.microsoft.com/fabric/get-started/direct-lake-overview</a:t>
+            </a:r>
+          </a:p>
+        </p:txBody>
+      </p:sp>
+      <p:sp>
+        <p:nvSpPr>
+          <p:cNvPr id="4" name="Slide Number Placeholder 3"/>
+          <p:cNvSpPr>
+            <a:spLocks noGrp="1"/>
+          </p:cNvSpPr>
+          <p:nvPr>
+            <p:ph type="sldNum" idx="5" sz="quarter"/>
+          </p:nvPr>
+        </p:nvSpPr>
+        <p:spPr/>
+      </p:sp>
+    </p:spTree>
+  </p:cSld>
+  <p:clrMapOvr>
+    <a:masterClrMapping/>
+  </p:clrMapOvr>
+</p:notes>
 </file>
 
 <file path=ppt/slideLayouts/slideLayout1.xml><?xml version="1.0" encoding="utf-8"?>
@@ -13283,4 +15143,324 @@
   </a:objectDefaults>
   <a:extraClrSchemeLst/>
 </a:theme>
+</file>
+
+<file path=ppt/theme/theme2.xml><?xml version="1.0" encoding="utf-8"?>
+<a:theme xmlns:a="http://schemas.openxmlformats.org/drawingml/2006/main" name="Office Theme">
+  <a:themeElements>
+    <a:clrScheme name="Office">
+      <a:dk1>
+        <a:sysClr val="windowText" lastClr="000000"/>
+      </a:dk1>
+      <a:lt1>
+        <a:sysClr val="window" lastClr="FFFFFF"/>
+      </a:lt1>
+      <a:dk2>
+        <a:srgbClr val="1F497D"/>
+      </a:dk2>
+      <a:lt2>
+        <a:srgbClr val="EEECE1"/>
+      </a:lt2>
+      <a:accent1>
+        <a:srgbClr val="4F81BD"/>
+      </a:accent1>
+      <a:accent2>
+        <a:srgbClr val="C0504D"/>
+      </a:accent2>
+      <a:accent3>
+        <a:srgbClr val="9BBB59"/>
+      </a:accent3>
+      <a:accent4>
+        <a:srgbClr val="8064A2"/>
+      </a:accent4>
+      <a:accent5>
+        <a:srgbClr val="4BACC6"/>
+      </a:accent5>
+      <a:accent6>
+        <a:srgbClr val="F79646"/>
+      </a:accent6>
+      <a:hlink>
+        <a:srgbClr val="0000FF"/>
+      </a:hlink>
+      <a:folHlink>
+        <a:srgbClr val="800080"/>
+      </a:folHlink>
+    </a:clrScheme>
+    <a:fontScheme name="Office">
+      <a:majorFont>
+        <a:latin typeface="Calibri"/>
+        <a:ea typeface=""/>
+        <a:cs typeface=""/>
+        <a:font script="Jpan" typeface="ＭＳ Ｐゴシック"/>
+        <a:font script="Hang" typeface="맑은 고딕"/>
+        <a:font script="Hans" typeface="宋体"/>
+        <a:font script="Hant" typeface="新細明體"/>
+        <a:font script="Arab" typeface="Times New Roman"/>
+        <a:font script="Hebr" typeface="Times New Roman"/>
+        <a:font script="Thai" typeface="Angsana New"/>
+        <a:font script="Ethi" typeface="Nyala"/>
+        <a:font script="Beng" typeface="Vrinda"/>
+        <a:font script="Gujr" typeface="Shruti"/>
+        <a:font script="Khmr" typeface="MoolBoran"/>
+        <a:font script="Knda" typeface="Tunga"/>
+        <a:font script="Guru" typeface="Raavi"/>
+        <a:font script="Cans" typeface="Euphemia"/>
+        <a:font script="Cher" typeface="Plantagenet Cherokee"/>
+        <a:font script="Yiii" typeface="Microsoft Yi Baiti"/>
+        <a:font script="Tibt" typeface="Microsoft Himalaya"/>
+        <a:font script="Thaa" typeface="MV Boli"/>
+        <a:font script="Deva" typeface="Mangal"/>
+        <a:font script="Telu" typeface="Gautami"/>
+        <a:font script="Taml" typeface="Latha"/>
+        <a:font script="Syrc" typeface="Estrangelo Edessa"/>
+        <a:font script="Orya" typeface="Kalinga"/>
+        <a:font script="Mlym" typeface="Kartika"/>
+        <a:font script="Laoo" typeface="DokChampa"/>
+        <a:font script="Sinh" typeface="Iskoola Pota"/>
+        <a:font script="Mong" typeface="Mongolian Baiti"/>
+        <a:font script="Viet" typeface="Times New Roman"/>
+        <a:font script="Uigh" typeface="Microsoft Uighur"/>
+        <a:font script="Geor" typeface="Sylfaen"/>
+      </a:majorFont>
+      <a:minorFont>
+        <a:latin typeface="Calibri"/>
+        <a:ea typeface=""/>
+        <a:cs typeface=""/>
+        <a:font script="Jpan" typeface="ＭＳ Ｐゴシック"/>
+        <a:font script="Hang" typeface="맑은 고딕"/>
+        <a:font script="Hans" typeface="宋体"/>
+        <a:font script="Hant" typeface="新細明體"/>
+        <a:font script="Arab" typeface="Arial"/>
+        <a:font script="Hebr" typeface="Arial"/>
+        <a:font script="Thai" typeface="Cordia New"/>
+        <a:font script="Ethi" typeface="Nyala"/>
+        <a:font script="Beng" typeface="Vrinda"/>
+        <a:font script="Gujr" typeface="Shruti"/>
+        <a:font script="Khmr" typeface="DaunPenh"/>
+        <a:font script="Knda" typeface="Tunga"/>
+        <a:font script="Guru" typeface="Raavi"/>
+        <a:font script="Cans" typeface="Euphemia"/>
+        <a:font script="Cher" typeface="Plantagenet Cherokee"/>
+        <a:font script="Yiii" typeface="Microsoft Yi Baiti"/>
+        <a:font script="Tibt" typeface="Microsoft Himalaya"/>
+        <a:font script="Thaa" typeface="MV Boli"/>
+        <a:font script="Deva" typeface="Mangal"/>
+        <a:font script="Telu" typeface="Gautami"/>
+        <a:font script="Taml" typeface="Latha"/>
+        <a:font script="Syrc" typeface="Estrangelo Edessa"/>
+        <a:font script="Orya" typeface="Kalinga"/>
+        <a:font script="Mlym" typeface="Kartika"/>
+        <a:font script="Laoo" typeface="DokChampa"/>
+        <a:font script="Sinh" typeface="Iskoola Pota"/>
+        <a:font script="Mong" typeface="Mongolian Baiti"/>
+        <a:font script="Viet" typeface="Arial"/>
+        <a:font script="Uigh" typeface="Microsoft Uighur"/>
+        <a:font script="Geor" typeface="Sylfaen"/>
+      </a:minorFont>
+    </a:fontScheme>
+    <a:fmtScheme name="Office">
+      <a:fillStyleLst>
+        <a:solidFill>
+          <a:schemeClr val="phClr"/>
+        </a:solidFill>
+        <a:gradFill rotWithShape="1">
+          <a:gsLst>
+            <a:gs pos="0">
+              <a:schemeClr val="phClr">
+                <a:tint val="50000"/>
+                <a:satMod val="300000"/>
+              </a:schemeClr>
+            </a:gs>
+            <a:gs pos="35000">
+              <a:schemeClr val="phClr">
+                <a:tint val="37000"/>
+                <a:satMod val="300000"/>
+              </a:schemeClr>
+            </a:gs>
+            <a:gs pos="100000">
+              <a:schemeClr val="phClr">
+                <a:tint val="15000"/>
+                <a:satMod val="350000"/>
+              </a:schemeClr>
+            </a:gs>
+          </a:gsLst>
+          <a:lin ang="16200000" scaled="1"/>
+        </a:gradFill>
+        <a:gradFill rotWithShape="1">
+          <a:gsLst>
+            <a:gs pos="0">
+              <a:schemeClr val="phClr">
+                <a:tint val="100000"/>
+                <a:shade val="100000"/>
+                <a:satMod val="130000"/>
+              </a:schemeClr>
+            </a:gs>
+            <a:gs pos="100000">
+              <a:schemeClr val="phClr">
+                <a:tint val="50000"/>
+                <a:shade val="100000"/>
+                <a:satMod val="350000"/>
+              </a:schemeClr>
+            </a:gs>
+          </a:gsLst>
+          <a:lin ang="16200000" scaled="0"/>
+        </a:gradFill>
+      </a:fillStyleLst>
+      <a:lnStyleLst>
+        <a:ln w="9525" cap="flat" cmpd="sng" algn="ctr">
+          <a:solidFill>
+            <a:schemeClr val="phClr">
+              <a:shade val="95000"/>
+              <a:satMod val="105000"/>
+            </a:schemeClr>
+          </a:solidFill>
+          <a:prstDash val="solid"/>
+        </a:ln>
+        <a:ln w="25400" cap="flat" cmpd="sng" algn="ctr">
+          <a:solidFill>
+            <a:schemeClr val="phClr"/>
+          </a:solidFill>
+          <a:prstDash val="solid"/>
+        </a:ln>
+        <a:ln w="38100" cap="flat" cmpd="sng" algn="ctr">
+          <a:solidFill>
+            <a:schemeClr val="phClr"/>
+          </a:solidFill>
+          <a:prstDash val="solid"/>
+        </a:ln>
+      </a:lnStyleLst>
+      <a:effectStyleLst>
+        <a:effectStyle>
+          <a:effectLst>
+            <a:outerShdw blurRad="40000" dist="20000" dir="5400000" rotWithShape="0">
+              <a:srgbClr val="000000">
+                <a:alpha val="38000"/>
+              </a:srgbClr>
+            </a:outerShdw>
+          </a:effectLst>
+        </a:effectStyle>
+        <a:effectStyle>
+          <a:effectLst>
+            <a:outerShdw blurRad="40000" dist="23000" dir="5400000" rotWithShape="0">
+              <a:srgbClr val="000000">
+                <a:alpha val="35000"/>
+              </a:srgbClr>
+            </a:outerShdw>
+          </a:effectLst>
+        </a:effectStyle>
+        <a:effectStyle>
+          <a:effectLst>
+            <a:outerShdw blurRad="40000" dist="23000" dir="5400000" rotWithShape="0">
+              <a:srgbClr val="000000">
+                <a:alpha val="35000"/>
+              </a:srgbClr>
+            </a:outerShdw>
+          </a:effectLst>
+          <a:scene3d>
+            <a:camera prst="orthographicFront">
+              <a:rot lat="0" lon="0" rev="0"/>
+            </a:camera>
+            <a:lightRig rig="threePt" dir="t">
+              <a:rot lat="0" lon="0" rev="1200000"/>
+            </a:lightRig>
+          </a:scene3d>
+          <a:sp3d>
+            <a:bevelT w="63500" h="25400"/>
+          </a:sp3d>
+        </a:effectStyle>
+      </a:effectStyleLst>
+      <a:bgFillStyleLst>
+        <a:solidFill>
+          <a:schemeClr val="phClr"/>
+        </a:solidFill>
+        <a:gradFill rotWithShape="1">
+          <a:gsLst>
+            <a:gs pos="0">
+              <a:schemeClr val="phClr">
+                <a:tint val="40000"/>
+                <a:satMod val="350000"/>
+              </a:schemeClr>
+            </a:gs>
+            <a:gs pos="40000">
+              <a:schemeClr val="phClr">
+                <a:tint val="45000"/>
+                <a:shade val="99000"/>
+                <a:satMod val="350000"/>
+              </a:schemeClr>
+            </a:gs>
+            <a:gs pos="100000">
+              <a:schemeClr val="phClr">
+                <a:shade val="20000"/>
+                <a:satMod val="255000"/>
+              </a:schemeClr>
+            </a:gs>
+          </a:gsLst>
+          <a:path path="circle">
+            <a:fillToRect l="50000" t="-80000" r="50000" b="180000"/>
+          </a:path>
+        </a:gradFill>
+        <a:gradFill rotWithShape="1">
+          <a:gsLst>
+            <a:gs pos="0">
+              <a:schemeClr val="phClr">
+                <a:tint val="80000"/>
+                <a:satMod val="300000"/>
+              </a:schemeClr>
+            </a:gs>
+            <a:gs pos="100000">
+              <a:schemeClr val="phClr">
+                <a:shade val="30000"/>
+                <a:satMod val="200000"/>
+              </a:schemeClr>
+            </a:gs>
+          </a:gsLst>
+          <a:path path="circle">
+            <a:fillToRect l="50000" t="50000" r="50000" b="50000"/>
+          </a:path>
+        </a:gradFill>
+      </a:bgFillStyleLst>
+    </a:fmtScheme>
+  </a:themeElements>
+  <a:objectDefaults>
+    <a:spDef>
+      <a:spPr/>
+      <a:bodyPr/>
+      <a:lstStyle/>
+      <a:style>
+        <a:lnRef idx="1">
+          <a:schemeClr val="accent1"/>
+        </a:lnRef>
+        <a:fillRef idx="3">
+          <a:schemeClr val="accent1"/>
+        </a:fillRef>
+        <a:effectRef idx="2">
+          <a:schemeClr val="accent1"/>
+        </a:effectRef>
+        <a:fontRef idx="minor">
+          <a:schemeClr val="lt1"/>
+        </a:fontRef>
+      </a:style>
+    </a:spDef>
+    <a:lnDef>
+      <a:spPr/>
+      <a:bodyPr/>
+      <a:lstStyle/>
+      <a:style>
+        <a:lnRef idx="2">
+          <a:schemeClr val="accent1"/>
+        </a:lnRef>
+        <a:fillRef idx="0">
+          <a:schemeClr val="accent1"/>
+        </a:fillRef>
+        <a:effectRef idx="1">
+          <a:schemeClr val="accent1"/>
+        </a:effectRef>
+        <a:fontRef idx="minor">
+          <a:schemeClr val="tx1"/>
+        </a:fontRef>
+      </a:style>
+    </a:lnDef>
+  </a:objectDefaults>
+  <a:extraClrSchemeLst/>
+</a:theme>
 </file>
--- a/modules/10-premium-fabric-capacity/assets/premium-fabric-capacity.pptx
+++ b/modules/10-premium-fabric-capacity/assets/premium-fabric-capacity.pptx
@@ -5072,7 +5072,7 @@
               </a:defRPr>
             </a:pPr>
             <a:r>
-              <a:t>Power BI Advanced Factory teaching deck</a:t>
+              <a:t>Student module overview</a:t>
             </a:r>
           </a:p>
         </p:txBody>
@@ -5596,42 +5596,6 @@
       </p:sp>
       <p:sp>
         <p:nvSpPr>
-          <p:cNvPr id="4" name="TextBox 3"/>
-          <p:cNvSpPr txBox="1"/>
-          <p:nvPr/>
-        </p:nvSpPr>
-        <p:spPr>
-          <a:xfrm>
-            <a:off x="530352" y="914400"/>
-            <a:ext cx="10515600" cy="320040"/>
-          </a:xfrm>
-          <a:prstGeom prst="rect">
-            <a:avLst/>
-          </a:prstGeom>
-          <a:noFill/>
-        </p:spPr>
-        <p:txBody>
-          <a:bodyPr wrap="none">
-            <a:spAutoFit/>
-          </a:bodyPr>
-          <a:lstStyle/>
-          <a:p>
-            <a:pPr>
-              <a:defRPr sz="1200">
-                <a:solidFill>
-                  <a:srgbClr val="5C5C5C"/>
-                </a:solidFill>
-                <a:latin typeface="Aptos"/>
-              </a:defRPr>
-            </a:pPr>
-            <a:r>
-              <a:t>Talking points, learner value, and lab connection</a:t>
-            </a:r>
-          </a:p>
-        </p:txBody>
-      </p:sp>
-      <p:sp>
-        <p:nvSpPr>
           <p:cNvPr id="5" name="Rounded Rectangle 4"/>
           <p:cNvSpPr/>
           <p:nvPr/>
@@ -5749,7 +5713,139 @@
               </a:defRPr>
             </a:pPr>
             <a:r>
-              <a:t>Talking points</a:t>
+              <a:t>Key ideas</a:t>
+            </a:r>
+            <a:br/>
+            <a:r>
+              <a:t>• OneLake concept</a:t>
+            </a:r>
+            <a:br/>
+            <a:r>
+              <a:t>• Lakehouse pattern</a:t>
+            </a:r>
+          </a:p>
+        </p:txBody>
+      </p:sp>
+      <p:sp>
+        <p:nvSpPr>
+          <p:cNvPr id="8" name="Rounded Rectangle 7"/>
+          <p:cNvSpPr/>
+          <p:nvPr/>
+        </p:nvSpPr>
+        <p:spPr>
+          <a:xfrm>
+            <a:off x="6263640" y="1234440"/>
+            <a:ext cx="5303520" cy="1828800"/>
+          </a:xfrm>
+          <a:prstGeom prst="roundRect">
+            <a:avLst/>
+          </a:prstGeom>
+          <a:solidFill>
+            <a:srgbClr val="FFFFFF"/>
+          </a:solidFill>
+          <a:ln>
+            <a:solidFill>
+              <a:srgbClr val="DCDCDC"/>
+            </a:solidFill>
+          </a:ln>
+        </p:spPr>
+        <p:style>
+          <a:lnRef idx="1">
+            <a:schemeClr val="accent1"/>
+          </a:lnRef>
+          <a:fillRef idx="3">
+            <a:schemeClr val="accent1"/>
+          </a:fillRef>
+          <a:effectRef idx="2">
+            <a:schemeClr val="accent1"/>
+          </a:effectRef>
+          <a:fontRef idx="minor">
+            <a:schemeClr val="lt1"/>
+          </a:fontRef>
+        </p:style>
+        <p:txBody>
+          <a:bodyPr rtlCol="0" anchor="ctr"/>
+          <a:lstStyle/>
+          <a:p>
+            <a:pPr algn="ctr"/>
+          </a:p>
+        </p:txBody>
+      </p:sp>
+      <p:sp>
+        <p:nvSpPr>
+          <p:cNvPr id="9" name="Rectangle 8"/>
+          <p:cNvSpPr/>
+          <p:nvPr/>
+        </p:nvSpPr>
+        <p:spPr>
+          <a:xfrm>
+            <a:off x="6263640" y="1234440"/>
+            <a:ext cx="91440" cy="1828800"/>
+          </a:xfrm>
+          <a:prstGeom prst="rect">
+            <a:avLst/>
+          </a:prstGeom>
+          <a:solidFill>
+            <a:srgbClr val="02C39A"/>
+          </a:solidFill>
+          <a:ln>
+            <a:noFill/>
+          </a:ln>
+        </p:spPr>
+        <p:style>
+          <a:lnRef idx="1">
+            <a:schemeClr val="accent1"/>
+          </a:lnRef>
+          <a:fillRef idx="3">
+            <a:schemeClr val="accent1"/>
+          </a:fillRef>
+          <a:effectRef idx="2">
+            <a:schemeClr val="accent1"/>
+          </a:effectRef>
+          <a:fontRef idx="minor">
+            <a:schemeClr val="lt1"/>
+          </a:fontRef>
+        </p:style>
+        <p:txBody>
+          <a:bodyPr rtlCol="0" anchor="ctr"/>
+          <a:lstStyle/>
+          <a:p>
+            <a:pPr algn="ctr"/>
+          </a:p>
+        </p:txBody>
+      </p:sp>
+      <p:sp>
+        <p:nvSpPr>
+          <p:cNvPr id="10" name="TextBox 9"/>
+          <p:cNvSpPr txBox="1"/>
+          <p:nvPr/>
+        </p:nvSpPr>
+        <p:spPr>
+          <a:xfrm>
+            <a:off x="6446520" y="1344168"/>
+            <a:ext cx="4983480" cy="1664208"/>
+          </a:xfrm>
+          <a:prstGeom prst="rect">
+            <a:avLst/>
+          </a:prstGeom>
+          <a:noFill/>
+        </p:spPr>
+        <p:txBody>
+          <a:bodyPr wrap="square" lIns="0" rIns="0">
+            <a:spAutoFit/>
+          </a:bodyPr>
+          <a:lstStyle/>
+          <a:p>
+            <a:pPr>
+              <a:defRPr b="1" sz="1500">
+                <a:solidFill>
+                  <a:srgbClr val="1E2761"/>
+                </a:solidFill>
+                <a:latin typeface="Aptos Display"/>
+              </a:defRPr>
+            </a:pPr>
+            <a:r>
+              <a:t>Why it helps</a:t>
             </a:r>
           </a:p>
           <a:p>
@@ -5765,25 +5861,25 @@
               </a:defRPr>
             </a:pPr>
             <a:r>
-              <a:t>• OneLake concept</a:t>
+              <a:t>• Warehouse pattern</a:t>
             </a:r>
             <a:br/>
             <a:r>
-              <a:t>• Lakehouse pattern</a:t>
-            </a:r>
-          </a:p>
-        </p:txBody>
-      </p:sp>
-      <p:sp>
-        <p:nvSpPr>
-          <p:cNvPr id="8" name="Rounded Rectangle 7"/>
+              <a:t>• Power BI integration</a:t>
+            </a:r>
+          </a:p>
+        </p:txBody>
+      </p:sp>
+      <p:sp>
+        <p:nvSpPr>
+          <p:cNvPr id="11" name="Rounded Rectangle 10"/>
           <p:cNvSpPr/>
           <p:nvPr/>
         </p:nvSpPr>
         <p:spPr>
           <a:xfrm>
-            <a:off x="6263640" y="1234440"/>
-            <a:ext cx="5303520" cy="1828800"/>
+            <a:off x="822960" y="4160520"/>
+            <a:ext cx="10424160" cy="868680"/>
           </a:xfrm>
           <a:prstGeom prst="roundRect">
             <a:avLst/>
@@ -5821,20 +5917,20 @@
       </p:sp>
       <p:sp>
         <p:nvSpPr>
-          <p:cNvPr id="9" name="Rectangle 8"/>
+          <p:cNvPr id="12" name="Rectangle 11"/>
           <p:cNvSpPr/>
           <p:nvPr/>
         </p:nvSpPr>
         <p:spPr>
           <a:xfrm>
-            <a:off x="6263640" y="1234440"/>
-            <a:ext cx="91440" cy="1828800"/>
+            <a:off x="822960" y="4160520"/>
+            <a:ext cx="91440" cy="868680"/>
           </a:xfrm>
           <a:prstGeom prst="rect">
             <a:avLst/>
           </a:prstGeom>
           <a:solidFill>
-            <a:srgbClr val="02C39A"/>
+            <a:srgbClr val="F9B700"/>
           </a:solidFill>
           <a:ln>
             <a:noFill/>
@@ -5864,14 +5960,14 @@
       </p:sp>
       <p:sp>
         <p:nvSpPr>
-          <p:cNvPr id="10" name="TextBox 9"/>
+          <p:cNvPr id="13" name="TextBox 12"/>
           <p:cNvSpPr txBox="1"/>
           <p:nvPr/>
         </p:nvSpPr>
         <p:spPr>
           <a:xfrm>
-            <a:off x="6446520" y="1344168"/>
-            <a:ext cx="4983480" cy="1664208"/>
+            <a:off x="1005840" y="4270248"/>
+            <a:ext cx="10104120" cy="704088"/>
           </a:xfrm>
           <a:prstGeom prst="rect">
             <a:avLst/>
@@ -5893,167 +5989,7 @@
               </a:defRPr>
             </a:pPr>
             <a:r>
-              <a:t>Why it helps</a:t>
-            </a:r>
-          </a:p>
-          <a:p>
-            <a:pPr>
-              <a:spcBef>
-                <a:spcPts val="400"/>
-              </a:spcBef>
-              <a:defRPr sz="1050">
-                <a:solidFill>
-                  <a:srgbClr val="242424"/>
-                </a:solidFill>
-                <a:latin typeface="Aptos"/>
-              </a:defRPr>
-            </a:pPr>
-            <a:r>
-              <a:t>• Warehouse pattern</a:t>
-            </a:r>
-            <a:br/>
-            <a:r>
-              <a:t>• Power BI integration</a:t>
-            </a:r>
-          </a:p>
-        </p:txBody>
-      </p:sp>
-      <p:sp>
-        <p:nvSpPr>
-          <p:cNvPr id="11" name="Rounded Rectangle 10"/>
-          <p:cNvSpPr/>
-          <p:nvPr/>
-        </p:nvSpPr>
-        <p:spPr>
-          <a:xfrm>
-            <a:off x="822960" y="4160520"/>
-            <a:ext cx="10424160" cy="868680"/>
-          </a:xfrm>
-          <a:prstGeom prst="roundRect">
-            <a:avLst/>
-          </a:prstGeom>
-          <a:solidFill>
-            <a:srgbClr val="FFFFFF"/>
-          </a:solidFill>
-          <a:ln>
-            <a:solidFill>
-              <a:srgbClr val="DCDCDC"/>
-            </a:solidFill>
-          </a:ln>
-        </p:spPr>
-        <p:style>
-          <a:lnRef idx="1">
-            <a:schemeClr val="accent1"/>
-          </a:lnRef>
-          <a:fillRef idx="3">
-            <a:schemeClr val="accent1"/>
-          </a:fillRef>
-          <a:effectRef idx="2">
-            <a:schemeClr val="accent1"/>
-          </a:effectRef>
-          <a:fontRef idx="minor">
-            <a:schemeClr val="lt1"/>
-          </a:fontRef>
-        </p:style>
-        <p:txBody>
-          <a:bodyPr rtlCol="0" anchor="ctr"/>
-          <a:lstStyle/>
-          <a:p>
-            <a:pPr algn="ctr"/>
-          </a:p>
-        </p:txBody>
-      </p:sp>
-      <p:sp>
-        <p:nvSpPr>
-          <p:cNvPr id="12" name="Rectangle 11"/>
-          <p:cNvSpPr/>
-          <p:nvPr/>
-        </p:nvSpPr>
-        <p:spPr>
-          <a:xfrm>
-            <a:off x="822960" y="4160520"/>
-            <a:ext cx="91440" cy="868680"/>
-          </a:xfrm>
-          <a:prstGeom prst="rect">
-            <a:avLst/>
-          </a:prstGeom>
-          <a:solidFill>
-            <a:srgbClr val="F9B700"/>
-          </a:solidFill>
-          <a:ln>
-            <a:noFill/>
-          </a:ln>
-        </p:spPr>
-        <p:style>
-          <a:lnRef idx="1">
-            <a:schemeClr val="accent1"/>
-          </a:lnRef>
-          <a:fillRef idx="3">
-            <a:schemeClr val="accent1"/>
-          </a:fillRef>
-          <a:effectRef idx="2">
-            <a:schemeClr val="accent1"/>
-          </a:effectRef>
-          <a:fontRef idx="minor">
-            <a:schemeClr val="lt1"/>
-          </a:fontRef>
-        </p:style>
-        <p:txBody>
-          <a:bodyPr rtlCol="0" anchor="ctr"/>
-          <a:lstStyle/>
-          <a:p>
-            <a:pPr algn="ctr"/>
-          </a:p>
-        </p:txBody>
-      </p:sp>
-      <p:sp>
-        <p:nvSpPr>
-          <p:cNvPr id="13" name="TextBox 12"/>
-          <p:cNvSpPr txBox="1"/>
-          <p:nvPr/>
-        </p:nvSpPr>
-        <p:spPr>
-          <a:xfrm>
-            <a:off x="1005840" y="4270248"/>
-            <a:ext cx="10104120" cy="704088"/>
-          </a:xfrm>
-          <a:prstGeom prst="rect">
-            <a:avLst/>
-          </a:prstGeom>
-          <a:noFill/>
-        </p:spPr>
-        <p:txBody>
-          <a:bodyPr wrap="square" lIns="0" rIns="0">
-            <a:spAutoFit/>
-          </a:bodyPr>
-          <a:lstStyle/>
-          <a:p>
-            <a:pPr>
-              <a:defRPr b="1" sz="1500">
-                <a:solidFill>
-                  <a:srgbClr val="1E2761"/>
-                </a:solidFill>
-                <a:latin typeface="Aptos Display"/>
-              </a:defRPr>
-            </a:pPr>
-            <a:r>
-              <a:t>Lab connection</a:t>
-            </a:r>
-          </a:p>
-          <a:p>
-            <a:pPr>
-              <a:spcBef>
-                <a:spcPts val="400"/>
-              </a:spcBef>
-              <a:defRPr sz="1050">
-                <a:solidFill>
-                  <a:srgbClr val="242424"/>
-                </a:solidFill>
-                <a:latin typeface="Aptos"/>
-              </a:defRPr>
-            </a:pPr>
-            <a:r>
-              <a:t>Coverage: Covered. Use the lab README to demonstrate or discuss this topic. Review terms: pattern.</a:t>
+              <a:t>In the lab, you will apply this pattern, validate the expected behavior, and discuss where it fits in a real Power BI solution.</a:t>
             </a:r>
           </a:p>
         </p:txBody>
@@ -6192,42 +6128,6 @@
       </p:sp>
       <p:sp>
         <p:nvSpPr>
-          <p:cNvPr id="4" name="TextBox 3"/>
-          <p:cNvSpPr txBox="1"/>
-          <p:nvPr/>
-        </p:nvSpPr>
-        <p:spPr>
-          <a:xfrm>
-            <a:off x="530352" y="914400"/>
-            <a:ext cx="10515600" cy="320040"/>
-          </a:xfrm>
-          <a:prstGeom prst="rect">
-            <a:avLst/>
-          </a:prstGeom>
-          <a:noFill/>
-        </p:spPr>
-        <p:txBody>
-          <a:bodyPr wrap="none">
-            <a:spAutoFit/>
-          </a:bodyPr>
-          <a:lstStyle/>
-          <a:p>
-            <a:pPr>
-              <a:defRPr sz="1200">
-                <a:solidFill>
-                  <a:srgbClr val="5C5C5C"/>
-                </a:solidFill>
-                <a:latin typeface="Aptos"/>
-              </a:defRPr>
-            </a:pPr>
-            <a:r>
-              <a:t>Talking points, learner value, and lab connection</a:t>
-            </a:r>
-          </a:p>
-        </p:txBody>
-      </p:sp>
-      <p:sp>
-        <p:nvSpPr>
           <p:cNvPr id="5" name="Rounded Rectangle 4"/>
           <p:cNvSpPr/>
           <p:nvPr/>
@@ -6345,7 +6245,139 @@
               </a:defRPr>
             </a:pPr>
             <a:r>
-              <a:t>Talking points</a:t>
+              <a:t>Key ideas</a:t>
+            </a:r>
+            <a:br/>
+            <a:r>
+              <a:t>• Notebook integration</a:t>
+            </a:r>
+            <a:br/>
+            <a:r>
+              <a:t>• Semantic model access</a:t>
+            </a:r>
+          </a:p>
+        </p:txBody>
+      </p:sp>
+      <p:sp>
+        <p:nvSpPr>
+          <p:cNvPr id="8" name="Rounded Rectangle 7"/>
+          <p:cNvSpPr/>
+          <p:nvPr/>
+        </p:nvSpPr>
+        <p:spPr>
+          <a:xfrm>
+            <a:off x="6263640" y="1234440"/>
+            <a:ext cx="5303520" cy="1828800"/>
+          </a:xfrm>
+          <a:prstGeom prst="roundRect">
+            <a:avLst/>
+          </a:prstGeom>
+          <a:solidFill>
+            <a:srgbClr val="FFFFFF"/>
+          </a:solidFill>
+          <a:ln>
+            <a:solidFill>
+              <a:srgbClr val="DCDCDC"/>
+            </a:solidFill>
+          </a:ln>
+        </p:spPr>
+        <p:style>
+          <a:lnRef idx="1">
+            <a:schemeClr val="accent1"/>
+          </a:lnRef>
+          <a:fillRef idx="3">
+            <a:schemeClr val="accent1"/>
+          </a:fillRef>
+          <a:effectRef idx="2">
+            <a:schemeClr val="accent1"/>
+          </a:effectRef>
+          <a:fontRef idx="minor">
+            <a:schemeClr val="lt1"/>
+          </a:fontRef>
+        </p:style>
+        <p:txBody>
+          <a:bodyPr rtlCol="0" anchor="ctr"/>
+          <a:lstStyle/>
+          <a:p>
+            <a:pPr algn="ctr"/>
+          </a:p>
+        </p:txBody>
+      </p:sp>
+      <p:sp>
+        <p:nvSpPr>
+          <p:cNvPr id="9" name="Rectangle 8"/>
+          <p:cNvSpPr/>
+          <p:nvPr/>
+        </p:nvSpPr>
+        <p:spPr>
+          <a:xfrm>
+            <a:off x="6263640" y="1234440"/>
+            <a:ext cx="91440" cy="1828800"/>
+          </a:xfrm>
+          <a:prstGeom prst="rect">
+            <a:avLst/>
+          </a:prstGeom>
+          <a:solidFill>
+            <a:srgbClr val="02C39A"/>
+          </a:solidFill>
+          <a:ln>
+            <a:noFill/>
+          </a:ln>
+        </p:spPr>
+        <p:style>
+          <a:lnRef idx="1">
+            <a:schemeClr val="accent1"/>
+          </a:lnRef>
+          <a:fillRef idx="3">
+            <a:schemeClr val="accent1"/>
+          </a:fillRef>
+          <a:effectRef idx="2">
+            <a:schemeClr val="accent1"/>
+          </a:effectRef>
+          <a:fontRef idx="minor">
+            <a:schemeClr val="lt1"/>
+          </a:fontRef>
+        </p:style>
+        <p:txBody>
+          <a:bodyPr rtlCol="0" anchor="ctr"/>
+          <a:lstStyle/>
+          <a:p>
+            <a:pPr algn="ctr"/>
+          </a:p>
+        </p:txBody>
+      </p:sp>
+      <p:sp>
+        <p:nvSpPr>
+          <p:cNvPr id="10" name="TextBox 9"/>
+          <p:cNvSpPr txBox="1"/>
+          <p:nvPr/>
+        </p:nvSpPr>
+        <p:spPr>
+          <a:xfrm>
+            <a:off x="6446520" y="1344168"/>
+            <a:ext cx="4983480" cy="1664208"/>
+          </a:xfrm>
+          <a:prstGeom prst="rect">
+            <a:avLst/>
+          </a:prstGeom>
+          <a:noFill/>
+        </p:spPr>
+        <p:txBody>
+          <a:bodyPr wrap="square" lIns="0" rIns="0">
+            <a:spAutoFit/>
+          </a:bodyPr>
+          <a:lstStyle/>
+          <a:p>
+            <a:pPr>
+              <a:defRPr b="1" sz="1500">
+                <a:solidFill>
+                  <a:srgbClr val="1E2761"/>
+                </a:solidFill>
+                <a:latin typeface="Aptos Display"/>
+              </a:defRPr>
+            </a:pPr>
+            <a:r>
+              <a:t>Why it helps</a:t>
             </a:r>
           </a:p>
           <a:p>
@@ -6361,25 +6393,25 @@
               </a:defRPr>
             </a:pPr>
             <a:r>
-              <a:t>• Notebook integration</a:t>
+              <a:t>• Data science workflows</a:t>
             </a:r>
             <a:br/>
             <a:r>
-              <a:t>• Semantic model access</a:t>
-            </a:r>
-          </a:p>
-        </p:txBody>
-      </p:sp>
-      <p:sp>
-        <p:nvSpPr>
-          <p:cNvPr id="8" name="Rounded Rectangle 7"/>
+              <a:t>• Availability caveats</a:t>
+            </a:r>
+          </a:p>
+        </p:txBody>
+      </p:sp>
+      <p:sp>
+        <p:nvSpPr>
+          <p:cNvPr id="11" name="Rounded Rectangle 10"/>
           <p:cNvSpPr/>
           <p:nvPr/>
         </p:nvSpPr>
         <p:spPr>
           <a:xfrm>
-            <a:off x="6263640" y="1234440"/>
-            <a:ext cx="5303520" cy="1828800"/>
+            <a:off x="822960" y="4160520"/>
+            <a:ext cx="10424160" cy="868680"/>
           </a:xfrm>
           <a:prstGeom prst="roundRect">
             <a:avLst/>
@@ -6417,20 +6449,20 @@
       </p:sp>
       <p:sp>
         <p:nvSpPr>
-          <p:cNvPr id="9" name="Rectangle 8"/>
+          <p:cNvPr id="12" name="Rectangle 11"/>
           <p:cNvSpPr/>
           <p:nvPr/>
         </p:nvSpPr>
         <p:spPr>
           <a:xfrm>
-            <a:off x="6263640" y="1234440"/>
-            <a:ext cx="91440" cy="1828800"/>
+            <a:off x="822960" y="4160520"/>
+            <a:ext cx="91440" cy="868680"/>
           </a:xfrm>
           <a:prstGeom prst="rect">
             <a:avLst/>
           </a:prstGeom>
           <a:solidFill>
-            <a:srgbClr val="02C39A"/>
+            <a:srgbClr val="F9B700"/>
           </a:solidFill>
           <a:ln>
             <a:noFill/>
@@ -6460,14 +6492,14 @@
       </p:sp>
       <p:sp>
         <p:nvSpPr>
-          <p:cNvPr id="10" name="TextBox 9"/>
+          <p:cNvPr id="13" name="TextBox 12"/>
           <p:cNvSpPr txBox="1"/>
           <p:nvPr/>
         </p:nvSpPr>
         <p:spPr>
           <a:xfrm>
-            <a:off x="6446520" y="1344168"/>
-            <a:ext cx="4983480" cy="1664208"/>
+            <a:off x="1005840" y="4270248"/>
+            <a:ext cx="10104120" cy="704088"/>
           </a:xfrm>
           <a:prstGeom prst="rect">
             <a:avLst/>
@@ -6489,167 +6521,7 @@
               </a:defRPr>
             </a:pPr>
             <a:r>
-              <a:t>Why it helps</a:t>
-            </a:r>
-          </a:p>
-          <a:p>
-            <a:pPr>
-              <a:spcBef>
-                <a:spcPts val="400"/>
-              </a:spcBef>
-              <a:defRPr sz="1050">
-                <a:solidFill>
-                  <a:srgbClr val="242424"/>
-                </a:solidFill>
-                <a:latin typeface="Aptos"/>
-              </a:defRPr>
-            </a:pPr>
-            <a:r>
-              <a:t>• Data science workflows</a:t>
-            </a:r>
-            <a:br/>
-            <a:r>
-              <a:t>• Availability caveats</a:t>
-            </a:r>
-          </a:p>
-        </p:txBody>
-      </p:sp>
-      <p:sp>
-        <p:nvSpPr>
-          <p:cNvPr id="11" name="Rounded Rectangle 10"/>
-          <p:cNvSpPr/>
-          <p:nvPr/>
-        </p:nvSpPr>
-        <p:spPr>
-          <a:xfrm>
-            <a:off x="822960" y="4160520"/>
-            <a:ext cx="10424160" cy="868680"/>
-          </a:xfrm>
-          <a:prstGeom prst="roundRect">
-            <a:avLst/>
-          </a:prstGeom>
-          <a:solidFill>
-            <a:srgbClr val="FFFFFF"/>
-          </a:solidFill>
-          <a:ln>
-            <a:solidFill>
-              <a:srgbClr val="DCDCDC"/>
-            </a:solidFill>
-          </a:ln>
-        </p:spPr>
-        <p:style>
-          <a:lnRef idx="1">
-            <a:schemeClr val="accent1"/>
-          </a:lnRef>
-          <a:fillRef idx="3">
-            <a:schemeClr val="accent1"/>
-          </a:fillRef>
-          <a:effectRef idx="2">
-            <a:schemeClr val="accent1"/>
-          </a:effectRef>
-          <a:fontRef idx="minor">
-            <a:schemeClr val="lt1"/>
-          </a:fontRef>
-        </p:style>
-        <p:txBody>
-          <a:bodyPr rtlCol="0" anchor="ctr"/>
-          <a:lstStyle/>
-          <a:p>
-            <a:pPr algn="ctr"/>
-          </a:p>
-        </p:txBody>
-      </p:sp>
-      <p:sp>
-        <p:nvSpPr>
-          <p:cNvPr id="12" name="Rectangle 11"/>
-          <p:cNvSpPr/>
-          <p:nvPr/>
-        </p:nvSpPr>
-        <p:spPr>
-          <a:xfrm>
-            <a:off x="822960" y="4160520"/>
-            <a:ext cx="91440" cy="868680"/>
-          </a:xfrm>
-          <a:prstGeom prst="rect">
-            <a:avLst/>
-          </a:prstGeom>
-          <a:solidFill>
-            <a:srgbClr val="F9B700"/>
-          </a:solidFill>
-          <a:ln>
-            <a:noFill/>
-          </a:ln>
-        </p:spPr>
-        <p:style>
-          <a:lnRef idx="1">
-            <a:schemeClr val="accent1"/>
-          </a:lnRef>
-          <a:fillRef idx="3">
-            <a:schemeClr val="accent1"/>
-          </a:fillRef>
-          <a:effectRef idx="2">
-            <a:schemeClr val="accent1"/>
-          </a:effectRef>
-          <a:fontRef idx="minor">
-            <a:schemeClr val="lt1"/>
-          </a:fontRef>
-        </p:style>
-        <p:txBody>
-          <a:bodyPr rtlCol="0" anchor="ctr"/>
-          <a:lstStyle/>
-          <a:p>
-            <a:pPr algn="ctr"/>
-          </a:p>
-        </p:txBody>
-      </p:sp>
-      <p:sp>
-        <p:nvSpPr>
-          <p:cNvPr id="13" name="TextBox 12"/>
-          <p:cNvSpPr txBox="1"/>
-          <p:nvPr/>
-        </p:nvSpPr>
-        <p:spPr>
-          <a:xfrm>
-            <a:off x="1005840" y="4270248"/>
-            <a:ext cx="10104120" cy="704088"/>
-          </a:xfrm>
-          <a:prstGeom prst="rect">
-            <a:avLst/>
-          </a:prstGeom>
-          <a:noFill/>
-        </p:spPr>
-        <p:txBody>
-          <a:bodyPr wrap="square" lIns="0" rIns="0">
-            <a:spAutoFit/>
-          </a:bodyPr>
-          <a:lstStyle/>
-          <a:p>
-            <a:pPr>
-              <a:defRPr b="1" sz="1500">
-                <a:solidFill>
-                  <a:srgbClr val="1E2761"/>
-                </a:solidFill>
-                <a:latin typeface="Aptos Display"/>
-              </a:defRPr>
-            </a:pPr>
-            <a:r>
-              <a:t>Lab connection</a:t>
-            </a:r>
-          </a:p>
-          <a:p>
-            <a:pPr>
-              <a:spcBef>
-                <a:spcPts val="400"/>
-              </a:spcBef>
-              <a:defRPr sz="1050">
-                <a:solidFill>
-                  <a:srgbClr val="242424"/>
-                </a:solidFill>
-                <a:latin typeface="Aptos"/>
-              </a:defRPr>
-            </a:pPr>
-            <a:r>
-              <a:t>Coverage: Covered. Use the lab README to demonstrate or discuss this topic. Review terms: science, workflows.</a:t>
+              <a:t>In the lab, you will apply this pattern, validate the expected behavior, and discuss where it fits in a real Power BI solution.</a:t>
             </a:r>
           </a:p>
         </p:txBody>
@@ -6788,42 +6660,6 @@
       </p:sp>
       <p:sp>
         <p:nvSpPr>
-          <p:cNvPr id="4" name="TextBox 3"/>
-          <p:cNvSpPr txBox="1"/>
-          <p:nvPr/>
-        </p:nvSpPr>
-        <p:spPr>
-          <a:xfrm>
-            <a:off x="530352" y="914400"/>
-            <a:ext cx="10515600" cy="320040"/>
-          </a:xfrm>
-          <a:prstGeom prst="rect">
-            <a:avLst/>
-          </a:prstGeom>
-          <a:noFill/>
-        </p:spPr>
-        <p:txBody>
-          <a:bodyPr wrap="none">
-            <a:spAutoFit/>
-          </a:bodyPr>
-          <a:lstStyle/>
-          <a:p>
-            <a:pPr>
-              <a:defRPr sz="1200">
-                <a:solidFill>
-                  <a:srgbClr val="5C5C5C"/>
-                </a:solidFill>
-                <a:latin typeface="Aptos"/>
-              </a:defRPr>
-            </a:pPr>
-            <a:r>
-              <a:t>Talking points, learner value, and lab connection</a:t>
-            </a:r>
-          </a:p>
-        </p:txBody>
-      </p:sp>
-      <p:sp>
-        <p:nvSpPr>
           <p:cNvPr id="5" name="Rounded Rectangle 4"/>
           <p:cNvSpPr/>
           <p:nvPr/>
@@ -6941,7 +6777,139 @@
               </a:defRPr>
             </a:pPr>
             <a:r>
-              <a:t>Talking points</a:t>
+              <a:t>Key ideas</a:t>
+            </a:r>
+            <a:br/>
+            <a:r>
+              <a:t>• Interactive workload</a:t>
+            </a:r>
+            <a:br/>
+            <a:r>
+              <a:t>• Background workload</a:t>
+            </a:r>
+          </a:p>
+        </p:txBody>
+      </p:sp>
+      <p:sp>
+        <p:nvSpPr>
+          <p:cNvPr id="8" name="Rounded Rectangle 7"/>
+          <p:cNvSpPr/>
+          <p:nvPr/>
+        </p:nvSpPr>
+        <p:spPr>
+          <a:xfrm>
+            <a:off x="6263640" y="1234440"/>
+            <a:ext cx="5303520" cy="1828800"/>
+          </a:xfrm>
+          <a:prstGeom prst="roundRect">
+            <a:avLst/>
+          </a:prstGeom>
+          <a:solidFill>
+            <a:srgbClr val="FFFFFF"/>
+          </a:solidFill>
+          <a:ln>
+            <a:solidFill>
+              <a:srgbClr val="DCDCDC"/>
+            </a:solidFill>
+          </a:ln>
+        </p:spPr>
+        <p:style>
+          <a:lnRef idx="1">
+            <a:schemeClr val="accent1"/>
+          </a:lnRef>
+          <a:fillRef idx="3">
+            <a:schemeClr val="accent1"/>
+          </a:fillRef>
+          <a:effectRef idx="2">
+            <a:schemeClr val="accent1"/>
+          </a:effectRef>
+          <a:fontRef idx="minor">
+            <a:schemeClr val="lt1"/>
+          </a:fontRef>
+        </p:style>
+        <p:txBody>
+          <a:bodyPr rtlCol="0" anchor="ctr"/>
+          <a:lstStyle/>
+          <a:p>
+            <a:pPr algn="ctr"/>
+          </a:p>
+        </p:txBody>
+      </p:sp>
+      <p:sp>
+        <p:nvSpPr>
+          <p:cNvPr id="9" name="Rectangle 8"/>
+          <p:cNvSpPr/>
+          <p:nvPr/>
+        </p:nvSpPr>
+        <p:spPr>
+          <a:xfrm>
+            <a:off x="6263640" y="1234440"/>
+            <a:ext cx="91440" cy="1828800"/>
+          </a:xfrm>
+          <a:prstGeom prst="rect">
+            <a:avLst/>
+          </a:prstGeom>
+          <a:solidFill>
+            <a:srgbClr val="02C39A"/>
+          </a:solidFill>
+          <a:ln>
+            <a:noFill/>
+          </a:ln>
+        </p:spPr>
+        <p:style>
+          <a:lnRef idx="1">
+            <a:schemeClr val="accent1"/>
+          </a:lnRef>
+          <a:fillRef idx="3">
+            <a:schemeClr val="accent1"/>
+          </a:fillRef>
+          <a:effectRef idx="2">
+            <a:schemeClr val="accent1"/>
+          </a:effectRef>
+          <a:fontRef idx="minor">
+            <a:schemeClr val="lt1"/>
+          </a:fontRef>
+        </p:style>
+        <p:txBody>
+          <a:bodyPr rtlCol="0" anchor="ctr"/>
+          <a:lstStyle/>
+          <a:p>
+            <a:pPr algn="ctr"/>
+          </a:p>
+        </p:txBody>
+      </p:sp>
+      <p:sp>
+        <p:nvSpPr>
+          <p:cNvPr id="10" name="TextBox 9"/>
+          <p:cNvSpPr txBox="1"/>
+          <p:nvPr/>
+        </p:nvSpPr>
+        <p:spPr>
+          <a:xfrm>
+            <a:off x="6446520" y="1344168"/>
+            <a:ext cx="4983480" cy="1664208"/>
+          </a:xfrm>
+          <a:prstGeom prst="rect">
+            <a:avLst/>
+          </a:prstGeom>
+          <a:noFill/>
+        </p:spPr>
+        <p:txBody>
+          <a:bodyPr wrap="square" lIns="0" rIns="0">
+            <a:spAutoFit/>
+          </a:bodyPr>
+          <a:lstStyle/>
+          <a:p>
+            <a:pPr>
+              <a:defRPr b="1" sz="1500">
+                <a:solidFill>
+                  <a:srgbClr val="1E2761"/>
+                </a:solidFill>
+                <a:latin typeface="Aptos Display"/>
+              </a:defRPr>
+            </a:pPr>
+            <a:r>
+              <a:t>Why it helps</a:t>
             </a:r>
           </a:p>
           <a:p>
@@ -6957,25 +6925,25 @@
               </a:defRPr>
             </a:pPr>
             <a:r>
-              <a:t>• Interactive workload</a:t>
+              <a:t>• Refresh pressure</a:t>
             </a:r>
             <a:br/>
             <a:r>
-              <a:t>• Background workload</a:t>
-            </a:r>
-          </a:p>
-        </p:txBody>
-      </p:sp>
-      <p:sp>
-        <p:nvSpPr>
-          <p:cNvPr id="8" name="Rounded Rectangle 7"/>
+              <a:t>• Throttling signals</a:t>
+            </a:r>
+          </a:p>
+        </p:txBody>
+      </p:sp>
+      <p:sp>
+        <p:nvSpPr>
+          <p:cNvPr id="11" name="Rounded Rectangle 10"/>
           <p:cNvSpPr/>
           <p:nvPr/>
         </p:nvSpPr>
         <p:spPr>
           <a:xfrm>
-            <a:off x="6263640" y="1234440"/>
-            <a:ext cx="5303520" cy="1828800"/>
+            <a:off x="822960" y="4160520"/>
+            <a:ext cx="10424160" cy="868680"/>
           </a:xfrm>
           <a:prstGeom prst="roundRect">
             <a:avLst/>
@@ -7013,20 +6981,20 @@
       </p:sp>
       <p:sp>
         <p:nvSpPr>
-          <p:cNvPr id="9" name="Rectangle 8"/>
+          <p:cNvPr id="12" name="Rectangle 11"/>
           <p:cNvSpPr/>
           <p:nvPr/>
         </p:nvSpPr>
         <p:spPr>
           <a:xfrm>
-            <a:off x="6263640" y="1234440"/>
-            <a:ext cx="91440" cy="1828800"/>
+            <a:off x="822960" y="4160520"/>
+            <a:ext cx="91440" cy="868680"/>
           </a:xfrm>
           <a:prstGeom prst="rect">
             <a:avLst/>
           </a:prstGeom>
           <a:solidFill>
-            <a:srgbClr val="02C39A"/>
+            <a:srgbClr val="F9B700"/>
           </a:solidFill>
           <a:ln>
             <a:noFill/>
@@ -7056,14 +7024,14 @@
       </p:sp>
       <p:sp>
         <p:nvSpPr>
-          <p:cNvPr id="10" name="TextBox 9"/>
+          <p:cNvPr id="13" name="TextBox 12"/>
           <p:cNvSpPr txBox="1"/>
           <p:nvPr/>
         </p:nvSpPr>
         <p:spPr>
           <a:xfrm>
-            <a:off x="6446520" y="1344168"/>
-            <a:ext cx="4983480" cy="1664208"/>
+            <a:off x="1005840" y="4270248"/>
+            <a:ext cx="10104120" cy="704088"/>
           </a:xfrm>
           <a:prstGeom prst="rect">
             <a:avLst/>
@@ -7085,167 +7053,7 @@
               </a:defRPr>
             </a:pPr>
             <a:r>
-              <a:t>Why it helps</a:t>
-            </a:r>
-          </a:p>
-          <a:p>
-            <a:pPr>
-              <a:spcBef>
-                <a:spcPts val="400"/>
-              </a:spcBef>
-              <a:defRPr sz="1050">
-                <a:solidFill>
-                  <a:srgbClr val="242424"/>
-                </a:solidFill>
-                <a:latin typeface="Aptos"/>
-              </a:defRPr>
-            </a:pPr>
-            <a:r>
-              <a:t>• Refresh pressure</a:t>
-            </a:r>
-            <a:br/>
-            <a:r>
-              <a:t>• Throttling signals</a:t>
-            </a:r>
-          </a:p>
-        </p:txBody>
-      </p:sp>
-      <p:sp>
-        <p:nvSpPr>
-          <p:cNvPr id="11" name="Rounded Rectangle 10"/>
-          <p:cNvSpPr/>
-          <p:nvPr/>
-        </p:nvSpPr>
-        <p:spPr>
-          <a:xfrm>
-            <a:off x="822960" y="4160520"/>
-            <a:ext cx="10424160" cy="868680"/>
-          </a:xfrm>
-          <a:prstGeom prst="roundRect">
-            <a:avLst/>
-          </a:prstGeom>
-          <a:solidFill>
-            <a:srgbClr val="FFFFFF"/>
-          </a:solidFill>
-          <a:ln>
-            <a:solidFill>
-              <a:srgbClr val="DCDCDC"/>
-            </a:solidFill>
-          </a:ln>
-        </p:spPr>
-        <p:style>
-          <a:lnRef idx="1">
-            <a:schemeClr val="accent1"/>
-          </a:lnRef>
-          <a:fillRef idx="3">
-            <a:schemeClr val="accent1"/>
-          </a:fillRef>
-          <a:effectRef idx="2">
-            <a:schemeClr val="accent1"/>
-          </a:effectRef>
-          <a:fontRef idx="minor">
-            <a:schemeClr val="lt1"/>
-          </a:fontRef>
-        </p:style>
-        <p:txBody>
-          <a:bodyPr rtlCol="0" anchor="ctr"/>
-          <a:lstStyle/>
-          <a:p>
-            <a:pPr algn="ctr"/>
-          </a:p>
-        </p:txBody>
-      </p:sp>
-      <p:sp>
-        <p:nvSpPr>
-          <p:cNvPr id="12" name="Rectangle 11"/>
-          <p:cNvSpPr/>
-          <p:nvPr/>
-        </p:nvSpPr>
-        <p:spPr>
-          <a:xfrm>
-            <a:off x="822960" y="4160520"/>
-            <a:ext cx="91440" cy="868680"/>
-          </a:xfrm>
-          <a:prstGeom prst="rect">
-            <a:avLst/>
-          </a:prstGeom>
-          <a:solidFill>
-            <a:srgbClr val="F9B700"/>
-          </a:solidFill>
-          <a:ln>
-            <a:noFill/>
-          </a:ln>
-        </p:spPr>
-        <p:style>
-          <a:lnRef idx="1">
-            <a:schemeClr val="accent1"/>
-          </a:lnRef>
-          <a:fillRef idx="3">
-            <a:schemeClr val="accent1"/>
-          </a:fillRef>
-          <a:effectRef idx="2">
-            <a:schemeClr val="accent1"/>
-          </a:effectRef>
-          <a:fontRef idx="minor">
-            <a:schemeClr val="lt1"/>
-          </a:fontRef>
-        </p:style>
-        <p:txBody>
-          <a:bodyPr rtlCol="0" anchor="ctr"/>
-          <a:lstStyle/>
-          <a:p>
-            <a:pPr algn="ctr"/>
-          </a:p>
-        </p:txBody>
-      </p:sp>
-      <p:sp>
-        <p:nvSpPr>
-          <p:cNvPr id="13" name="TextBox 12"/>
-          <p:cNvSpPr txBox="1"/>
-          <p:nvPr/>
-        </p:nvSpPr>
-        <p:spPr>
-          <a:xfrm>
-            <a:off x="1005840" y="4270248"/>
-            <a:ext cx="10104120" cy="704088"/>
-          </a:xfrm>
-          <a:prstGeom prst="rect">
-            <a:avLst/>
-          </a:prstGeom>
-          <a:noFill/>
-        </p:spPr>
-        <p:txBody>
-          <a:bodyPr wrap="square" lIns="0" rIns="0">
-            <a:spAutoFit/>
-          </a:bodyPr>
-          <a:lstStyle/>
-          <a:p>
-            <a:pPr>
-              <a:defRPr b="1" sz="1500">
-                <a:solidFill>
-                  <a:srgbClr val="1E2761"/>
-                </a:solidFill>
-                <a:latin typeface="Aptos Display"/>
-              </a:defRPr>
-            </a:pPr>
-            <a:r>
-              <a:t>Lab connection</a:t>
-            </a:r>
-          </a:p>
-          <a:p>
-            <a:pPr>
-              <a:spcBef>
-                <a:spcPts val="400"/>
-              </a:spcBef>
-              <a:defRPr sz="1050">
-                <a:solidFill>
-                  <a:srgbClr val="242424"/>
-                </a:solidFill>
-                <a:latin typeface="Aptos"/>
-              </a:defRPr>
-            </a:pPr>
-            <a:r>
-              <a:t>Coverage: Covered. Use the lab README to demonstrate or discuss this topic. Review terms: signals.</a:t>
+              <a:t>In the lab, you will apply this pattern, validate the expected behavior, and discuss where it fits in a real Power BI solution.</a:t>
             </a:r>
           </a:p>
         </p:txBody>
@@ -7384,42 +7192,6 @@
       </p:sp>
       <p:sp>
         <p:nvSpPr>
-          <p:cNvPr id="4" name="TextBox 3"/>
-          <p:cNvSpPr txBox="1"/>
-          <p:nvPr/>
-        </p:nvSpPr>
-        <p:spPr>
-          <a:xfrm>
-            <a:off x="530352" y="914400"/>
-            <a:ext cx="10515600" cy="320040"/>
-          </a:xfrm>
-          <a:prstGeom prst="rect">
-            <a:avLst/>
-          </a:prstGeom>
-          <a:noFill/>
-        </p:spPr>
-        <p:txBody>
-          <a:bodyPr wrap="none">
-            <a:spAutoFit/>
-          </a:bodyPr>
-          <a:lstStyle/>
-          <a:p>
-            <a:pPr>
-              <a:defRPr sz="1200">
-                <a:solidFill>
-                  <a:srgbClr val="5C5C5C"/>
-                </a:solidFill>
-                <a:latin typeface="Aptos"/>
-              </a:defRPr>
-            </a:pPr>
-            <a:r>
-              <a:t>Talking points, learner value, and lab connection</a:t>
-            </a:r>
-          </a:p>
-        </p:txBody>
-      </p:sp>
-      <p:sp>
-        <p:nvSpPr>
           <p:cNvPr id="5" name="Rounded Rectangle 4"/>
           <p:cNvSpPr/>
           <p:nvPr/>
@@ -7537,7 +7309,139 @@
               </a:defRPr>
             </a:pPr>
             <a:r>
-              <a:t>Talking points</a:t>
+              <a:t>Key ideas</a:t>
+            </a:r>
+            <a:br/>
+            <a:r>
+              <a:t>• Validate cloud parity</a:t>
+            </a:r>
+            <a:br/>
+            <a:r>
+              <a:t>• Validate licensing and capacity</a:t>
+            </a:r>
+          </a:p>
+        </p:txBody>
+      </p:sp>
+      <p:sp>
+        <p:nvSpPr>
+          <p:cNvPr id="8" name="Rounded Rectangle 7"/>
+          <p:cNvSpPr/>
+          <p:nvPr/>
+        </p:nvSpPr>
+        <p:spPr>
+          <a:xfrm>
+            <a:off x="6263640" y="1234440"/>
+            <a:ext cx="5303520" cy="1828800"/>
+          </a:xfrm>
+          <a:prstGeom prst="roundRect">
+            <a:avLst/>
+          </a:prstGeom>
+          <a:solidFill>
+            <a:srgbClr val="FFFFFF"/>
+          </a:solidFill>
+          <a:ln>
+            <a:solidFill>
+              <a:srgbClr val="DCDCDC"/>
+            </a:solidFill>
+          </a:ln>
+        </p:spPr>
+        <p:style>
+          <a:lnRef idx="1">
+            <a:schemeClr val="accent1"/>
+          </a:lnRef>
+          <a:fillRef idx="3">
+            <a:schemeClr val="accent1"/>
+          </a:fillRef>
+          <a:effectRef idx="2">
+            <a:schemeClr val="accent1"/>
+          </a:effectRef>
+          <a:fontRef idx="minor">
+            <a:schemeClr val="lt1"/>
+          </a:fontRef>
+        </p:style>
+        <p:txBody>
+          <a:bodyPr rtlCol="0" anchor="ctr"/>
+          <a:lstStyle/>
+          <a:p>
+            <a:pPr algn="ctr"/>
+          </a:p>
+        </p:txBody>
+      </p:sp>
+      <p:sp>
+        <p:nvSpPr>
+          <p:cNvPr id="9" name="Rectangle 8"/>
+          <p:cNvSpPr/>
+          <p:nvPr/>
+        </p:nvSpPr>
+        <p:spPr>
+          <a:xfrm>
+            <a:off x="6263640" y="1234440"/>
+            <a:ext cx="91440" cy="1828800"/>
+          </a:xfrm>
+          <a:prstGeom prst="rect">
+            <a:avLst/>
+          </a:prstGeom>
+          <a:solidFill>
+            <a:srgbClr val="02C39A"/>
+          </a:solidFill>
+          <a:ln>
+            <a:noFill/>
+          </a:ln>
+        </p:spPr>
+        <p:style>
+          <a:lnRef idx="1">
+            <a:schemeClr val="accent1"/>
+          </a:lnRef>
+          <a:fillRef idx="3">
+            <a:schemeClr val="accent1"/>
+          </a:fillRef>
+          <a:effectRef idx="2">
+            <a:schemeClr val="accent1"/>
+          </a:effectRef>
+          <a:fontRef idx="minor">
+            <a:schemeClr val="lt1"/>
+          </a:fontRef>
+        </p:style>
+        <p:txBody>
+          <a:bodyPr rtlCol="0" anchor="ctr"/>
+          <a:lstStyle/>
+          <a:p>
+            <a:pPr algn="ctr"/>
+          </a:p>
+        </p:txBody>
+      </p:sp>
+      <p:sp>
+        <p:nvSpPr>
+          <p:cNvPr id="10" name="TextBox 9"/>
+          <p:cNvSpPr txBox="1"/>
+          <p:nvPr/>
+        </p:nvSpPr>
+        <p:spPr>
+          <a:xfrm>
+            <a:off x="6446520" y="1344168"/>
+            <a:ext cx="4983480" cy="1664208"/>
+          </a:xfrm>
+          <a:prstGeom prst="rect">
+            <a:avLst/>
+          </a:prstGeom>
+          <a:noFill/>
+        </p:spPr>
+        <p:txBody>
+          <a:bodyPr wrap="square" lIns="0" rIns="0">
+            <a:spAutoFit/>
+          </a:bodyPr>
+          <a:lstStyle/>
+          <a:p>
+            <a:pPr>
+              <a:defRPr b="1" sz="1500">
+                <a:solidFill>
+                  <a:srgbClr val="1E2761"/>
+                </a:solidFill>
+                <a:latin typeface="Aptos Display"/>
+              </a:defRPr>
+            </a:pPr>
+            <a:r>
+              <a:t>Why it helps</a:t>
             </a:r>
           </a:p>
           <a:p>
@@ -7553,25 +7457,25 @@
               </a:defRPr>
             </a:pPr>
             <a:r>
-              <a:t>• Validate cloud parity</a:t>
+              <a:t>• Validate tenant settings</a:t>
             </a:r>
             <a:br/>
             <a:r>
-              <a:t>• Validate licensing and capacity</a:t>
-            </a:r>
-          </a:p>
-        </p:txBody>
-      </p:sp>
-      <p:sp>
-        <p:nvSpPr>
-          <p:cNvPr id="8" name="Rounded Rectangle 7"/>
+              <a:t>• Provide Gov-safe fallback</a:t>
+            </a:r>
+          </a:p>
+        </p:txBody>
+      </p:sp>
+      <p:sp>
+        <p:nvSpPr>
+          <p:cNvPr id="11" name="Rounded Rectangle 10"/>
           <p:cNvSpPr/>
           <p:nvPr/>
         </p:nvSpPr>
         <p:spPr>
           <a:xfrm>
-            <a:off x="6263640" y="1234440"/>
-            <a:ext cx="5303520" cy="1828800"/>
+            <a:off x="822960" y="4160520"/>
+            <a:ext cx="10424160" cy="868680"/>
           </a:xfrm>
           <a:prstGeom prst="roundRect">
             <a:avLst/>
@@ -7609,20 +7513,20 @@
       </p:sp>
       <p:sp>
         <p:nvSpPr>
-          <p:cNvPr id="9" name="Rectangle 8"/>
+          <p:cNvPr id="12" name="Rectangle 11"/>
           <p:cNvSpPr/>
           <p:nvPr/>
         </p:nvSpPr>
         <p:spPr>
           <a:xfrm>
-            <a:off x="6263640" y="1234440"/>
-            <a:ext cx="91440" cy="1828800"/>
+            <a:off x="822960" y="4160520"/>
+            <a:ext cx="91440" cy="868680"/>
           </a:xfrm>
           <a:prstGeom prst="rect">
             <a:avLst/>
           </a:prstGeom>
           <a:solidFill>
-            <a:srgbClr val="02C39A"/>
+            <a:srgbClr val="F9B700"/>
           </a:solidFill>
           <a:ln>
             <a:noFill/>
@@ -7652,14 +7556,14 @@
       </p:sp>
       <p:sp>
         <p:nvSpPr>
-          <p:cNvPr id="10" name="TextBox 9"/>
+          <p:cNvPr id="13" name="TextBox 12"/>
           <p:cNvSpPr txBox="1"/>
           <p:nvPr/>
         </p:nvSpPr>
         <p:spPr>
           <a:xfrm>
-            <a:off x="6446520" y="1344168"/>
-            <a:ext cx="4983480" cy="1664208"/>
+            <a:off x="1005840" y="4270248"/>
+            <a:ext cx="10104120" cy="704088"/>
           </a:xfrm>
           <a:prstGeom prst="rect">
             <a:avLst/>
@@ -7681,167 +7585,7 @@
               </a:defRPr>
             </a:pPr>
             <a:r>
-              <a:t>Why it helps</a:t>
-            </a:r>
-          </a:p>
-          <a:p>
-            <a:pPr>
-              <a:spcBef>
-                <a:spcPts val="400"/>
-              </a:spcBef>
-              <a:defRPr sz="1050">
-                <a:solidFill>
-                  <a:srgbClr val="242424"/>
-                </a:solidFill>
-                <a:latin typeface="Aptos"/>
-              </a:defRPr>
-            </a:pPr>
-            <a:r>
-              <a:t>• Validate tenant settings</a:t>
-            </a:r>
-            <a:br/>
-            <a:r>
-              <a:t>• Provide Gov-safe fallback</a:t>
-            </a:r>
-          </a:p>
-        </p:txBody>
-      </p:sp>
-      <p:sp>
-        <p:nvSpPr>
-          <p:cNvPr id="11" name="Rounded Rectangle 10"/>
-          <p:cNvSpPr/>
-          <p:nvPr/>
-        </p:nvSpPr>
-        <p:spPr>
-          <a:xfrm>
-            <a:off x="822960" y="4160520"/>
-            <a:ext cx="10424160" cy="868680"/>
-          </a:xfrm>
-          <a:prstGeom prst="roundRect">
-            <a:avLst/>
-          </a:prstGeom>
-          <a:solidFill>
-            <a:srgbClr val="FFFFFF"/>
-          </a:solidFill>
-          <a:ln>
-            <a:solidFill>
-              <a:srgbClr val="DCDCDC"/>
-            </a:solidFill>
-          </a:ln>
-        </p:spPr>
-        <p:style>
-          <a:lnRef idx="1">
-            <a:schemeClr val="accent1"/>
-          </a:lnRef>
-          <a:fillRef idx="3">
-            <a:schemeClr val="accent1"/>
-          </a:fillRef>
-          <a:effectRef idx="2">
-            <a:schemeClr val="accent1"/>
-          </a:effectRef>
-          <a:fontRef idx="minor">
-            <a:schemeClr val="lt1"/>
-          </a:fontRef>
-        </p:style>
-        <p:txBody>
-          <a:bodyPr rtlCol="0" anchor="ctr"/>
-          <a:lstStyle/>
-          <a:p>
-            <a:pPr algn="ctr"/>
-          </a:p>
-        </p:txBody>
-      </p:sp>
-      <p:sp>
-        <p:nvSpPr>
-          <p:cNvPr id="12" name="Rectangle 11"/>
-          <p:cNvSpPr/>
-          <p:nvPr/>
-        </p:nvSpPr>
-        <p:spPr>
-          <a:xfrm>
-            <a:off x="822960" y="4160520"/>
-            <a:ext cx="91440" cy="868680"/>
-          </a:xfrm>
-          <a:prstGeom prst="rect">
-            <a:avLst/>
-          </a:prstGeom>
-          <a:solidFill>
-            <a:srgbClr val="F9B700"/>
-          </a:solidFill>
-          <a:ln>
-            <a:noFill/>
-          </a:ln>
-        </p:spPr>
-        <p:style>
-          <a:lnRef idx="1">
-            <a:schemeClr val="accent1"/>
-          </a:lnRef>
-          <a:fillRef idx="3">
-            <a:schemeClr val="accent1"/>
-          </a:fillRef>
-          <a:effectRef idx="2">
-            <a:schemeClr val="accent1"/>
-          </a:effectRef>
-          <a:fontRef idx="minor">
-            <a:schemeClr val="lt1"/>
-          </a:fontRef>
-        </p:style>
-        <p:txBody>
-          <a:bodyPr rtlCol="0" anchor="ctr"/>
-          <a:lstStyle/>
-          <a:p>
-            <a:pPr algn="ctr"/>
-          </a:p>
-        </p:txBody>
-      </p:sp>
-      <p:sp>
-        <p:nvSpPr>
-          <p:cNvPr id="13" name="TextBox 12"/>
-          <p:cNvSpPr txBox="1"/>
-          <p:nvPr/>
-        </p:nvSpPr>
-        <p:spPr>
-          <a:xfrm>
-            <a:off x="1005840" y="4270248"/>
-            <a:ext cx="10104120" cy="704088"/>
-          </a:xfrm>
-          <a:prstGeom prst="rect">
-            <a:avLst/>
-          </a:prstGeom>
-          <a:noFill/>
-        </p:spPr>
-        <p:txBody>
-          <a:bodyPr wrap="square" lIns="0" rIns="0">
-            <a:spAutoFit/>
-          </a:bodyPr>
-          <a:lstStyle/>
-          <a:p>
-            <a:pPr>
-              <a:defRPr b="1" sz="1500">
-                <a:solidFill>
-                  <a:srgbClr val="1E2761"/>
-                </a:solidFill>
-                <a:latin typeface="Aptos Display"/>
-              </a:defRPr>
-            </a:pPr>
-            <a:r>
-              <a:t>Lab connection</a:t>
-            </a:r>
-          </a:p>
-          <a:p>
-            <a:pPr>
-              <a:spcBef>
-                <a:spcPts val="400"/>
-              </a:spcBef>
-              <a:defRPr sz="1050">
-                <a:solidFill>
-                  <a:srgbClr val="242424"/>
-                </a:solidFill>
-                <a:latin typeface="Aptos"/>
-              </a:defRPr>
-            </a:pPr>
-            <a:r>
-              <a:t>Coverage: Covered. Use the lab README to demonstrate or discuss this topic. Review terms: parity.</a:t>
+              <a:t>In the lab, you will apply this pattern, validate the expected behavior, and discuss where it fits in a real Power BI solution.</a:t>
             </a:r>
           </a:p>
         </p:txBody>
@@ -7980,42 +7724,6 @@
       </p:sp>
       <p:sp>
         <p:nvSpPr>
-          <p:cNvPr id="4" name="TextBox 3"/>
-          <p:cNvSpPr txBox="1"/>
-          <p:nvPr/>
-        </p:nvSpPr>
-        <p:spPr>
-          <a:xfrm>
-            <a:off x="530352" y="914400"/>
-            <a:ext cx="10515600" cy="320040"/>
-          </a:xfrm>
-          <a:prstGeom prst="rect">
-            <a:avLst/>
-          </a:prstGeom>
-          <a:noFill/>
-        </p:spPr>
-        <p:txBody>
-          <a:bodyPr wrap="none">
-            <a:spAutoFit/>
-          </a:bodyPr>
-          <a:lstStyle/>
-          <a:p>
-            <a:pPr>
-              <a:defRPr sz="1200">
-                <a:solidFill>
-                  <a:srgbClr val="5C5C5C"/>
-                </a:solidFill>
-                <a:latin typeface="Aptos"/>
-              </a:defRPr>
-            </a:pPr>
-            <a:r>
-              <a:t>Talking points, learner value, and lab connection</a:t>
-            </a:r>
-          </a:p>
-        </p:txBody>
-      </p:sp>
-      <p:sp>
-        <p:nvSpPr>
           <p:cNvPr id="5" name="Rounded Rectangle 4"/>
           <p:cNvSpPr/>
           <p:nvPr/>
@@ -8133,7 +7841,139 @@
               </a:defRPr>
             </a:pPr>
             <a:r>
-              <a:t>Talking points</a:t>
+              <a:t>Key ideas</a:t>
+            </a:r>
+            <a:br/>
+            <a:r>
+              <a:t>• Requirements</a:t>
+            </a:r>
+            <a:br/>
+            <a:r>
+              <a:t>• Options</a:t>
+            </a:r>
+          </a:p>
+        </p:txBody>
+      </p:sp>
+      <p:sp>
+        <p:nvSpPr>
+          <p:cNvPr id="8" name="Rounded Rectangle 7"/>
+          <p:cNvSpPr/>
+          <p:nvPr/>
+        </p:nvSpPr>
+        <p:spPr>
+          <a:xfrm>
+            <a:off x="6263640" y="1234440"/>
+            <a:ext cx="5303520" cy="1828800"/>
+          </a:xfrm>
+          <a:prstGeom prst="roundRect">
+            <a:avLst/>
+          </a:prstGeom>
+          <a:solidFill>
+            <a:srgbClr val="FFFFFF"/>
+          </a:solidFill>
+          <a:ln>
+            <a:solidFill>
+              <a:srgbClr val="DCDCDC"/>
+            </a:solidFill>
+          </a:ln>
+        </p:spPr>
+        <p:style>
+          <a:lnRef idx="1">
+            <a:schemeClr val="accent1"/>
+          </a:lnRef>
+          <a:fillRef idx="3">
+            <a:schemeClr val="accent1"/>
+          </a:fillRef>
+          <a:effectRef idx="2">
+            <a:schemeClr val="accent1"/>
+          </a:effectRef>
+          <a:fontRef idx="minor">
+            <a:schemeClr val="lt1"/>
+          </a:fontRef>
+        </p:style>
+        <p:txBody>
+          <a:bodyPr rtlCol="0" anchor="ctr"/>
+          <a:lstStyle/>
+          <a:p>
+            <a:pPr algn="ctr"/>
+          </a:p>
+        </p:txBody>
+      </p:sp>
+      <p:sp>
+        <p:nvSpPr>
+          <p:cNvPr id="9" name="Rectangle 8"/>
+          <p:cNvSpPr/>
+          <p:nvPr/>
+        </p:nvSpPr>
+        <p:spPr>
+          <a:xfrm>
+            <a:off x="6263640" y="1234440"/>
+            <a:ext cx="91440" cy="1828800"/>
+          </a:xfrm>
+          <a:prstGeom prst="rect">
+            <a:avLst/>
+          </a:prstGeom>
+          <a:solidFill>
+            <a:srgbClr val="02C39A"/>
+          </a:solidFill>
+          <a:ln>
+            <a:noFill/>
+          </a:ln>
+        </p:spPr>
+        <p:style>
+          <a:lnRef idx="1">
+            <a:schemeClr val="accent1"/>
+          </a:lnRef>
+          <a:fillRef idx="3">
+            <a:schemeClr val="accent1"/>
+          </a:fillRef>
+          <a:effectRef idx="2">
+            <a:schemeClr val="accent1"/>
+          </a:effectRef>
+          <a:fontRef idx="minor">
+            <a:schemeClr val="lt1"/>
+          </a:fontRef>
+        </p:style>
+        <p:txBody>
+          <a:bodyPr rtlCol="0" anchor="ctr"/>
+          <a:lstStyle/>
+          <a:p>
+            <a:pPr algn="ctr"/>
+          </a:p>
+        </p:txBody>
+      </p:sp>
+      <p:sp>
+        <p:nvSpPr>
+          <p:cNvPr id="10" name="TextBox 9"/>
+          <p:cNvSpPr txBox="1"/>
+          <p:nvPr/>
+        </p:nvSpPr>
+        <p:spPr>
+          <a:xfrm>
+            <a:off x="6446520" y="1344168"/>
+            <a:ext cx="4983480" cy="1664208"/>
+          </a:xfrm>
+          <a:prstGeom prst="rect">
+            <a:avLst/>
+          </a:prstGeom>
+          <a:noFill/>
+        </p:spPr>
+        <p:txBody>
+          <a:bodyPr wrap="square" lIns="0" rIns="0">
+            <a:spAutoFit/>
+          </a:bodyPr>
+          <a:lstStyle/>
+          <a:p>
+            <a:pPr>
+              <a:defRPr b="1" sz="1500">
+                <a:solidFill>
+                  <a:srgbClr val="1E2761"/>
+                </a:solidFill>
+                <a:latin typeface="Aptos Display"/>
+              </a:defRPr>
+            </a:pPr>
+            <a:r>
+              <a:t>Why it helps</a:t>
             </a:r>
           </a:p>
           <a:p>
@@ -8149,25 +7989,25 @@
               </a:defRPr>
             </a:pPr>
             <a:r>
-              <a:t>• Requirements</a:t>
+              <a:t>• Risks</a:t>
             </a:r>
             <a:br/>
             <a:r>
-              <a:t>• Options</a:t>
-            </a:r>
-          </a:p>
-        </p:txBody>
-      </p:sp>
-      <p:sp>
-        <p:nvSpPr>
-          <p:cNvPr id="8" name="Rounded Rectangle 7"/>
+              <a:t>• Validation plan</a:t>
+            </a:r>
+          </a:p>
+        </p:txBody>
+      </p:sp>
+      <p:sp>
+        <p:nvSpPr>
+          <p:cNvPr id="11" name="Rounded Rectangle 10"/>
           <p:cNvSpPr/>
           <p:nvPr/>
         </p:nvSpPr>
         <p:spPr>
           <a:xfrm>
-            <a:off x="6263640" y="1234440"/>
-            <a:ext cx="5303520" cy="1828800"/>
+            <a:off x="822960" y="4160520"/>
+            <a:ext cx="10424160" cy="868680"/>
           </a:xfrm>
           <a:prstGeom prst="roundRect">
             <a:avLst/>
@@ -8205,20 +8045,20 @@
       </p:sp>
       <p:sp>
         <p:nvSpPr>
-          <p:cNvPr id="9" name="Rectangle 8"/>
+          <p:cNvPr id="12" name="Rectangle 11"/>
           <p:cNvSpPr/>
           <p:nvPr/>
         </p:nvSpPr>
         <p:spPr>
           <a:xfrm>
-            <a:off x="6263640" y="1234440"/>
-            <a:ext cx="91440" cy="1828800"/>
+            <a:off x="822960" y="4160520"/>
+            <a:ext cx="91440" cy="868680"/>
           </a:xfrm>
           <a:prstGeom prst="rect">
             <a:avLst/>
           </a:prstGeom>
           <a:solidFill>
-            <a:srgbClr val="02C39A"/>
+            <a:srgbClr val="F9B700"/>
           </a:solidFill>
           <a:ln>
             <a:noFill/>
@@ -8248,14 +8088,14 @@
       </p:sp>
       <p:sp>
         <p:nvSpPr>
-          <p:cNvPr id="10" name="TextBox 9"/>
+          <p:cNvPr id="13" name="TextBox 12"/>
           <p:cNvSpPr txBox="1"/>
           <p:nvPr/>
         </p:nvSpPr>
         <p:spPr>
           <a:xfrm>
-            <a:off x="6446520" y="1344168"/>
-            <a:ext cx="4983480" cy="1664208"/>
+            <a:off x="1005840" y="4270248"/>
+            <a:ext cx="10104120" cy="704088"/>
           </a:xfrm>
           <a:prstGeom prst="rect">
             <a:avLst/>
@@ -8277,167 +8117,7 @@
               </a:defRPr>
             </a:pPr>
             <a:r>
-              <a:t>Why it helps</a:t>
-            </a:r>
-          </a:p>
-          <a:p>
-            <a:pPr>
-              <a:spcBef>
-                <a:spcPts val="400"/>
-              </a:spcBef>
-              <a:defRPr sz="1050">
-                <a:solidFill>
-                  <a:srgbClr val="242424"/>
-                </a:solidFill>
-                <a:latin typeface="Aptos"/>
-              </a:defRPr>
-            </a:pPr>
-            <a:r>
-              <a:t>• Risks</a:t>
-            </a:r>
-            <a:br/>
-            <a:r>
-              <a:t>• Validation plan</a:t>
-            </a:r>
-          </a:p>
-        </p:txBody>
-      </p:sp>
-      <p:sp>
-        <p:nvSpPr>
-          <p:cNvPr id="11" name="Rounded Rectangle 10"/>
-          <p:cNvSpPr/>
-          <p:nvPr/>
-        </p:nvSpPr>
-        <p:spPr>
-          <a:xfrm>
-            <a:off x="822960" y="4160520"/>
-            <a:ext cx="10424160" cy="868680"/>
-          </a:xfrm>
-          <a:prstGeom prst="roundRect">
-            <a:avLst/>
-          </a:prstGeom>
-          <a:solidFill>
-            <a:srgbClr val="FFFFFF"/>
-          </a:solidFill>
-          <a:ln>
-            <a:solidFill>
-              <a:srgbClr val="DCDCDC"/>
-            </a:solidFill>
-          </a:ln>
-        </p:spPr>
-        <p:style>
-          <a:lnRef idx="1">
-            <a:schemeClr val="accent1"/>
-          </a:lnRef>
-          <a:fillRef idx="3">
-            <a:schemeClr val="accent1"/>
-          </a:fillRef>
-          <a:effectRef idx="2">
-            <a:schemeClr val="accent1"/>
-          </a:effectRef>
-          <a:fontRef idx="minor">
-            <a:schemeClr val="lt1"/>
-          </a:fontRef>
-        </p:style>
-        <p:txBody>
-          <a:bodyPr rtlCol="0" anchor="ctr"/>
-          <a:lstStyle/>
-          <a:p>
-            <a:pPr algn="ctr"/>
-          </a:p>
-        </p:txBody>
-      </p:sp>
-      <p:sp>
-        <p:nvSpPr>
-          <p:cNvPr id="12" name="Rectangle 11"/>
-          <p:cNvSpPr/>
-          <p:nvPr/>
-        </p:nvSpPr>
-        <p:spPr>
-          <a:xfrm>
-            <a:off x="822960" y="4160520"/>
-            <a:ext cx="91440" cy="868680"/>
-          </a:xfrm>
-          <a:prstGeom prst="rect">
-            <a:avLst/>
-          </a:prstGeom>
-          <a:solidFill>
-            <a:srgbClr val="F9B700"/>
-          </a:solidFill>
-          <a:ln>
-            <a:noFill/>
-          </a:ln>
-        </p:spPr>
-        <p:style>
-          <a:lnRef idx="1">
-            <a:schemeClr val="accent1"/>
-          </a:lnRef>
-          <a:fillRef idx="3">
-            <a:schemeClr val="accent1"/>
-          </a:fillRef>
-          <a:effectRef idx="2">
-            <a:schemeClr val="accent1"/>
-          </a:effectRef>
-          <a:fontRef idx="minor">
-            <a:schemeClr val="lt1"/>
-          </a:fontRef>
-        </p:style>
-        <p:txBody>
-          <a:bodyPr rtlCol="0" anchor="ctr"/>
-          <a:lstStyle/>
-          <a:p>
-            <a:pPr algn="ctr"/>
-          </a:p>
-        </p:txBody>
-      </p:sp>
-      <p:sp>
-        <p:nvSpPr>
-          <p:cNvPr id="13" name="TextBox 12"/>
-          <p:cNvSpPr txBox="1"/>
-          <p:nvPr/>
-        </p:nvSpPr>
-        <p:spPr>
-          <a:xfrm>
-            <a:off x="1005840" y="4270248"/>
-            <a:ext cx="10104120" cy="704088"/>
-          </a:xfrm>
-          <a:prstGeom prst="rect">
-            <a:avLst/>
-          </a:prstGeom>
-          <a:noFill/>
-        </p:spPr>
-        <p:txBody>
-          <a:bodyPr wrap="square" lIns="0" rIns="0">
-            <a:spAutoFit/>
-          </a:bodyPr>
-          <a:lstStyle/>
-          <a:p>
-            <a:pPr>
-              <a:defRPr b="1" sz="1500">
-                <a:solidFill>
-                  <a:srgbClr val="1E2761"/>
-                </a:solidFill>
-                <a:latin typeface="Aptos Display"/>
-              </a:defRPr>
-            </a:pPr>
-            <a:r>
-              <a:t>Lab connection</a:t>
-            </a:r>
-          </a:p>
-          <a:p>
-            <a:pPr>
-              <a:spcBef>
-                <a:spcPts val="400"/>
-              </a:spcBef>
-              <a:defRPr sz="1050">
-                <a:solidFill>
-                  <a:srgbClr val="242424"/>
-                </a:solidFill>
-                <a:latin typeface="Aptos"/>
-              </a:defRPr>
-            </a:pPr>
-            <a:r>
-              <a:t>Coverage: Covered. Use the lab README to demonstrate or discuss this topic. Review terms: decision, risks.</a:t>
+              <a:t>In the lab, you will apply this pattern, validate the expected behavior, and discuss where it fits in a real Power BI solution.</a:t>
             </a:r>
           </a:p>
         </p:txBody>
@@ -9444,42 +9124,6 @@
       </p:sp>
       <p:sp>
         <p:nvSpPr>
-          <p:cNvPr id="4" name="TextBox 3"/>
-          <p:cNvSpPr txBox="1"/>
-          <p:nvPr/>
-        </p:nvSpPr>
-        <p:spPr>
-          <a:xfrm>
-            <a:off x="530352" y="914400"/>
-            <a:ext cx="10515600" cy="320040"/>
-          </a:xfrm>
-          <a:prstGeom prst="rect">
-            <a:avLst/>
-          </a:prstGeom>
-          <a:noFill/>
-        </p:spPr>
-        <p:txBody>
-          <a:bodyPr wrap="none">
-            <a:spAutoFit/>
-          </a:bodyPr>
-          <a:lstStyle/>
-          <a:p>
-            <a:pPr>
-              <a:defRPr sz="1200">
-                <a:solidFill>
-                  <a:srgbClr val="5C5C5C"/>
-                </a:solidFill>
-                <a:latin typeface="Aptos"/>
-              </a:defRPr>
-            </a:pPr>
-            <a:r>
-              <a:t>Use this to introduce the section before hands-on labs.</a:t>
-            </a:r>
-          </a:p>
-        </p:txBody>
-      </p:sp>
-      <p:sp>
-        <p:nvSpPr>
           <p:cNvPr id="5" name="Rounded Rectangle 4"/>
           <p:cNvSpPr/>
           <p:nvPr/>
@@ -10732,42 +10376,6 @@
       </p:sp>
       <p:sp>
         <p:nvSpPr>
-          <p:cNvPr id="4" name="TextBox 3"/>
-          <p:cNvSpPr txBox="1"/>
-          <p:nvPr/>
-        </p:nvSpPr>
-        <p:spPr>
-          <a:xfrm>
-            <a:off x="530352" y="914400"/>
-            <a:ext cx="10515600" cy="320040"/>
-          </a:xfrm>
-          <a:prstGeom prst="rect">
-            <a:avLst/>
-          </a:prstGeom>
-          <a:noFill/>
-        </p:spPr>
-        <p:txBody>
-          <a:bodyPr wrap="none">
-            <a:spAutoFit/>
-          </a:bodyPr>
-          <a:lstStyle/>
-          <a:p>
-            <a:pPr>
-              <a:defRPr sz="1200">
-                <a:solidFill>
-                  <a:srgbClr val="5C5C5C"/>
-                </a:solidFill>
-                <a:latin typeface="Aptos"/>
-              </a:defRPr>
-            </a:pPr>
-            <a:r>
-              <a:t>Talking points, learner value, and lab connection</a:t>
-            </a:r>
-          </a:p>
-        </p:txBody>
-      </p:sp>
-      <p:sp>
-        <p:nvSpPr>
           <p:cNvPr id="5" name="Rounded Rectangle 4"/>
           <p:cNvSpPr/>
           <p:nvPr/>
@@ -10885,7 +10493,143 @@
               </a:defRPr>
             </a:pPr>
             <a:r>
-              <a:t>Talking points</a:t>
+              <a:t>Key ideas</a:t>
+            </a:r>
+            <a:br/>
+            <a:r>
+              <a:t>• User scale</a:t>
+            </a:r>
+            <a:br/>
+            <a:r>
+              <a:t>• Data size</a:t>
+            </a:r>
+            <a:br/>
+            <a:r>
+              <a:t>• Refresh needs</a:t>
+            </a:r>
+          </a:p>
+        </p:txBody>
+      </p:sp>
+      <p:sp>
+        <p:nvSpPr>
+          <p:cNvPr id="8" name="Rounded Rectangle 7"/>
+          <p:cNvSpPr/>
+          <p:nvPr/>
+        </p:nvSpPr>
+        <p:spPr>
+          <a:xfrm>
+            <a:off x="6263640" y="1234440"/>
+            <a:ext cx="5303520" cy="1828800"/>
+          </a:xfrm>
+          <a:prstGeom prst="roundRect">
+            <a:avLst/>
+          </a:prstGeom>
+          <a:solidFill>
+            <a:srgbClr val="FFFFFF"/>
+          </a:solidFill>
+          <a:ln>
+            <a:solidFill>
+              <a:srgbClr val="DCDCDC"/>
+            </a:solidFill>
+          </a:ln>
+        </p:spPr>
+        <p:style>
+          <a:lnRef idx="1">
+            <a:schemeClr val="accent1"/>
+          </a:lnRef>
+          <a:fillRef idx="3">
+            <a:schemeClr val="accent1"/>
+          </a:fillRef>
+          <a:effectRef idx="2">
+            <a:schemeClr val="accent1"/>
+          </a:effectRef>
+          <a:fontRef idx="minor">
+            <a:schemeClr val="lt1"/>
+          </a:fontRef>
+        </p:style>
+        <p:txBody>
+          <a:bodyPr rtlCol="0" anchor="ctr"/>
+          <a:lstStyle/>
+          <a:p>
+            <a:pPr algn="ctr"/>
+          </a:p>
+        </p:txBody>
+      </p:sp>
+      <p:sp>
+        <p:nvSpPr>
+          <p:cNvPr id="9" name="Rectangle 8"/>
+          <p:cNvSpPr/>
+          <p:nvPr/>
+        </p:nvSpPr>
+        <p:spPr>
+          <a:xfrm>
+            <a:off x="6263640" y="1234440"/>
+            <a:ext cx="91440" cy="1828800"/>
+          </a:xfrm>
+          <a:prstGeom prst="rect">
+            <a:avLst/>
+          </a:prstGeom>
+          <a:solidFill>
+            <a:srgbClr val="02C39A"/>
+          </a:solidFill>
+          <a:ln>
+            <a:noFill/>
+          </a:ln>
+        </p:spPr>
+        <p:style>
+          <a:lnRef idx="1">
+            <a:schemeClr val="accent1"/>
+          </a:lnRef>
+          <a:fillRef idx="3">
+            <a:schemeClr val="accent1"/>
+          </a:fillRef>
+          <a:effectRef idx="2">
+            <a:schemeClr val="accent1"/>
+          </a:effectRef>
+          <a:fontRef idx="minor">
+            <a:schemeClr val="lt1"/>
+          </a:fontRef>
+        </p:style>
+        <p:txBody>
+          <a:bodyPr rtlCol="0" anchor="ctr"/>
+          <a:lstStyle/>
+          <a:p>
+            <a:pPr algn="ctr"/>
+          </a:p>
+        </p:txBody>
+      </p:sp>
+      <p:sp>
+        <p:nvSpPr>
+          <p:cNvPr id="10" name="TextBox 9"/>
+          <p:cNvSpPr txBox="1"/>
+          <p:nvPr/>
+        </p:nvSpPr>
+        <p:spPr>
+          <a:xfrm>
+            <a:off x="6446520" y="1344168"/>
+            <a:ext cx="4983480" cy="1664208"/>
+          </a:xfrm>
+          <a:prstGeom prst="rect">
+            <a:avLst/>
+          </a:prstGeom>
+          <a:noFill/>
+        </p:spPr>
+        <p:txBody>
+          <a:bodyPr wrap="square" lIns="0" rIns="0">
+            <a:spAutoFit/>
+          </a:bodyPr>
+          <a:lstStyle/>
+          <a:p>
+            <a:pPr>
+              <a:defRPr b="1" sz="1500">
+                <a:solidFill>
+                  <a:srgbClr val="1E2761"/>
+                </a:solidFill>
+                <a:latin typeface="Aptos Display"/>
+              </a:defRPr>
+            </a:pPr>
+            <a:r>
+              <a:t>Why it helps</a:t>
             </a:r>
           </a:p>
           <a:p>
@@ -10901,29 +10645,25 @@
               </a:defRPr>
             </a:pPr>
             <a:r>
-              <a:t>• User scale</a:t>
+              <a:t>• Query performance</a:t>
             </a:r>
             <a:br/>
             <a:r>
-              <a:t>• Data size</a:t>
-            </a:r>
-            <a:br/>
-            <a:r>
-              <a:t>• Refresh needs</a:t>
-            </a:r>
-          </a:p>
-        </p:txBody>
-      </p:sp>
-      <p:sp>
-        <p:nvSpPr>
-          <p:cNvPr id="8" name="Rounded Rectangle 7"/>
+              <a:t>• Governance</a:t>
+            </a:r>
+          </a:p>
+        </p:txBody>
+      </p:sp>
+      <p:sp>
+        <p:nvSpPr>
+          <p:cNvPr id="11" name="Rounded Rectangle 10"/>
           <p:cNvSpPr/>
           <p:nvPr/>
         </p:nvSpPr>
         <p:spPr>
           <a:xfrm>
-            <a:off x="6263640" y="1234440"/>
-            <a:ext cx="5303520" cy="1828800"/>
+            <a:off x="822960" y="4160520"/>
+            <a:ext cx="10424160" cy="868680"/>
           </a:xfrm>
           <a:prstGeom prst="roundRect">
             <a:avLst/>
@@ -10961,20 +10701,20 @@
       </p:sp>
       <p:sp>
         <p:nvSpPr>
-          <p:cNvPr id="9" name="Rectangle 8"/>
+          <p:cNvPr id="12" name="Rectangle 11"/>
           <p:cNvSpPr/>
           <p:nvPr/>
         </p:nvSpPr>
         <p:spPr>
           <a:xfrm>
-            <a:off x="6263640" y="1234440"/>
-            <a:ext cx="91440" cy="1828800"/>
+            <a:off x="822960" y="4160520"/>
+            <a:ext cx="91440" cy="868680"/>
           </a:xfrm>
           <a:prstGeom prst="rect">
             <a:avLst/>
           </a:prstGeom>
           <a:solidFill>
-            <a:srgbClr val="02C39A"/>
+            <a:srgbClr val="F9B700"/>
           </a:solidFill>
           <a:ln>
             <a:noFill/>
@@ -11004,14 +10744,14 @@
       </p:sp>
       <p:sp>
         <p:nvSpPr>
-          <p:cNvPr id="10" name="TextBox 9"/>
+          <p:cNvPr id="13" name="TextBox 12"/>
           <p:cNvSpPr txBox="1"/>
           <p:nvPr/>
         </p:nvSpPr>
         <p:spPr>
           <a:xfrm>
-            <a:off x="6446520" y="1344168"/>
-            <a:ext cx="4983480" cy="1664208"/>
+            <a:off x="1005840" y="4270248"/>
+            <a:ext cx="10104120" cy="704088"/>
           </a:xfrm>
           <a:prstGeom prst="rect">
             <a:avLst/>
@@ -11033,167 +10773,7 @@
               </a:defRPr>
             </a:pPr>
             <a:r>
-              <a:t>Why it helps</a:t>
-            </a:r>
-          </a:p>
-          <a:p>
-            <a:pPr>
-              <a:spcBef>
-                <a:spcPts val="400"/>
-              </a:spcBef>
-              <a:defRPr sz="1050">
-                <a:solidFill>
-                  <a:srgbClr val="242424"/>
-                </a:solidFill>
-                <a:latin typeface="Aptos"/>
-              </a:defRPr>
-            </a:pPr>
-            <a:r>
-              <a:t>• Query performance</a:t>
-            </a:r>
-            <a:br/>
-            <a:r>
-              <a:t>• Governance</a:t>
-            </a:r>
-          </a:p>
-        </p:txBody>
-      </p:sp>
-      <p:sp>
-        <p:nvSpPr>
-          <p:cNvPr id="11" name="Rounded Rectangle 10"/>
-          <p:cNvSpPr/>
-          <p:nvPr/>
-        </p:nvSpPr>
-        <p:spPr>
-          <a:xfrm>
-            <a:off x="822960" y="4160520"/>
-            <a:ext cx="10424160" cy="868680"/>
-          </a:xfrm>
-          <a:prstGeom prst="roundRect">
-            <a:avLst/>
-          </a:prstGeom>
-          <a:solidFill>
-            <a:srgbClr val="FFFFFF"/>
-          </a:solidFill>
-          <a:ln>
-            <a:solidFill>
-              <a:srgbClr val="DCDCDC"/>
-            </a:solidFill>
-          </a:ln>
-        </p:spPr>
-        <p:style>
-          <a:lnRef idx="1">
-            <a:schemeClr val="accent1"/>
-          </a:lnRef>
-          <a:fillRef idx="3">
-            <a:schemeClr val="accent1"/>
-          </a:fillRef>
-          <a:effectRef idx="2">
-            <a:schemeClr val="accent1"/>
-          </a:effectRef>
-          <a:fontRef idx="minor">
-            <a:schemeClr val="lt1"/>
-          </a:fontRef>
-        </p:style>
-        <p:txBody>
-          <a:bodyPr rtlCol="0" anchor="ctr"/>
-          <a:lstStyle/>
-          <a:p>
-            <a:pPr algn="ctr"/>
-          </a:p>
-        </p:txBody>
-      </p:sp>
-      <p:sp>
-        <p:nvSpPr>
-          <p:cNvPr id="12" name="Rectangle 11"/>
-          <p:cNvSpPr/>
-          <p:nvPr/>
-        </p:nvSpPr>
-        <p:spPr>
-          <a:xfrm>
-            <a:off x="822960" y="4160520"/>
-            <a:ext cx="91440" cy="868680"/>
-          </a:xfrm>
-          <a:prstGeom prst="rect">
-            <a:avLst/>
-          </a:prstGeom>
-          <a:solidFill>
-            <a:srgbClr val="F9B700"/>
-          </a:solidFill>
-          <a:ln>
-            <a:noFill/>
-          </a:ln>
-        </p:spPr>
-        <p:style>
-          <a:lnRef idx="1">
-            <a:schemeClr val="accent1"/>
-          </a:lnRef>
-          <a:fillRef idx="3">
-            <a:schemeClr val="accent1"/>
-          </a:fillRef>
-          <a:effectRef idx="2">
-            <a:schemeClr val="accent1"/>
-          </a:effectRef>
-          <a:fontRef idx="minor">
-            <a:schemeClr val="lt1"/>
-          </a:fontRef>
-        </p:style>
-        <p:txBody>
-          <a:bodyPr rtlCol="0" anchor="ctr"/>
-          <a:lstStyle/>
-          <a:p>
-            <a:pPr algn="ctr"/>
-          </a:p>
-        </p:txBody>
-      </p:sp>
-      <p:sp>
-        <p:nvSpPr>
-          <p:cNvPr id="13" name="TextBox 12"/>
-          <p:cNvSpPr txBox="1"/>
-          <p:nvPr/>
-        </p:nvSpPr>
-        <p:spPr>
-          <a:xfrm>
-            <a:off x="1005840" y="4270248"/>
-            <a:ext cx="10104120" cy="704088"/>
-          </a:xfrm>
-          <a:prstGeom prst="rect">
-            <a:avLst/>
-          </a:prstGeom>
-          <a:noFill/>
-        </p:spPr>
-        <p:txBody>
-          <a:bodyPr wrap="square" lIns="0" rIns="0">
-            <a:spAutoFit/>
-          </a:bodyPr>
-          <a:lstStyle/>
-          <a:p>
-            <a:pPr>
-              <a:defRPr b="1" sz="1500">
-                <a:solidFill>
-                  <a:srgbClr val="1E2761"/>
-                </a:solidFill>
-                <a:latin typeface="Aptos Display"/>
-              </a:defRPr>
-            </a:pPr>
-            <a:r>
-              <a:t>Lab connection</a:t>
-            </a:r>
-          </a:p>
-          <a:p>
-            <a:pPr>
-              <a:spcBef>
-                <a:spcPts val="400"/>
-              </a:spcBef>
-              <a:defRPr sz="1050">
-                <a:solidFill>
-                  <a:srgbClr val="242424"/>
-                </a:solidFill>
-                <a:latin typeface="Aptos"/>
-              </a:defRPr>
-            </a:pPr>
-            <a:r>
-              <a:t>Coverage: Covered. Use the lab README to demonstrate or discuss this topic. Review terms: performance.</a:t>
+              <a:t>In the lab, you will apply this pattern, validate the expected behavior, and discuss where it fits in a real Power BI solution.</a:t>
             </a:r>
           </a:p>
         </p:txBody>
@@ -11332,42 +10912,6 @@
       </p:sp>
       <p:sp>
         <p:nvSpPr>
-          <p:cNvPr id="4" name="TextBox 3"/>
-          <p:cNvSpPr txBox="1"/>
-          <p:nvPr/>
-        </p:nvSpPr>
-        <p:spPr>
-          <a:xfrm>
-            <a:off x="530352" y="914400"/>
-            <a:ext cx="10515600" cy="320040"/>
-          </a:xfrm>
-          <a:prstGeom prst="rect">
-            <a:avLst/>
-          </a:prstGeom>
-          <a:noFill/>
-        </p:spPr>
-        <p:txBody>
-          <a:bodyPr wrap="none">
-            <a:spAutoFit/>
-          </a:bodyPr>
-          <a:lstStyle/>
-          <a:p>
-            <a:pPr>
-              <a:defRPr sz="1200">
-                <a:solidFill>
-                  <a:srgbClr val="5C5C5C"/>
-                </a:solidFill>
-                <a:latin typeface="Aptos"/>
-              </a:defRPr>
-            </a:pPr>
-            <a:r>
-              <a:t>Talking points, learner value, and lab connection</a:t>
-            </a:r>
-          </a:p>
-        </p:txBody>
-      </p:sp>
-      <p:sp>
-        <p:nvSpPr>
           <p:cNvPr id="5" name="Rounded Rectangle 4"/>
           <p:cNvSpPr/>
           <p:nvPr/>
@@ -11485,7 +11029,143 @@
               </a:defRPr>
             </a:pPr>
             <a:r>
-              <a:t>Talking points</a:t>
+              <a:t>Key ideas</a:t>
+            </a:r>
+            <a:br/>
+            <a:r>
+              <a:t>• Power BI Pro</a:t>
+            </a:r>
+            <a:br/>
+            <a:r>
+              <a:t>• Premium Per User</a:t>
+            </a:r>
+            <a:br/>
+            <a:r>
+              <a:t>• Premium capacity</a:t>
+            </a:r>
+          </a:p>
+        </p:txBody>
+      </p:sp>
+      <p:sp>
+        <p:nvSpPr>
+          <p:cNvPr id="8" name="Rounded Rectangle 7"/>
+          <p:cNvSpPr/>
+          <p:nvPr/>
+        </p:nvSpPr>
+        <p:spPr>
+          <a:xfrm>
+            <a:off x="6263640" y="1234440"/>
+            <a:ext cx="5303520" cy="1828800"/>
+          </a:xfrm>
+          <a:prstGeom prst="roundRect">
+            <a:avLst/>
+          </a:prstGeom>
+          <a:solidFill>
+            <a:srgbClr val="FFFFFF"/>
+          </a:solidFill>
+          <a:ln>
+            <a:solidFill>
+              <a:srgbClr val="DCDCDC"/>
+            </a:solidFill>
+          </a:ln>
+        </p:spPr>
+        <p:style>
+          <a:lnRef idx="1">
+            <a:schemeClr val="accent1"/>
+          </a:lnRef>
+          <a:fillRef idx="3">
+            <a:schemeClr val="accent1"/>
+          </a:fillRef>
+          <a:effectRef idx="2">
+            <a:schemeClr val="accent1"/>
+          </a:effectRef>
+          <a:fontRef idx="minor">
+            <a:schemeClr val="lt1"/>
+          </a:fontRef>
+        </p:style>
+        <p:txBody>
+          <a:bodyPr rtlCol="0" anchor="ctr"/>
+          <a:lstStyle/>
+          <a:p>
+            <a:pPr algn="ctr"/>
+          </a:p>
+        </p:txBody>
+      </p:sp>
+      <p:sp>
+        <p:nvSpPr>
+          <p:cNvPr id="9" name="Rectangle 8"/>
+          <p:cNvSpPr/>
+          <p:nvPr/>
+        </p:nvSpPr>
+        <p:spPr>
+          <a:xfrm>
+            <a:off x="6263640" y="1234440"/>
+            <a:ext cx="91440" cy="1828800"/>
+          </a:xfrm>
+          <a:prstGeom prst="rect">
+            <a:avLst/>
+          </a:prstGeom>
+          <a:solidFill>
+            <a:srgbClr val="02C39A"/>
+          </a:solidFill>
+          <a:ln>
+            <a:noFill/>
+          </a:ln>
+        </p:spPr>
+        <p:style>
+          <a:lnRef idx="1">
+            <a:schemeClr val="accent1"/>
+          </a:lnRef>
+          <a:fillRef idx="3">
+            <a:schemeClr val="accent1"/>
+          </a:fillRef>
+          <a:effectRef idx="2">
+            <a:schemeClr val="accent1"/>
+          </a:effectRef>
+          <a:fontRef idx="minor">
+            <a:schemeClr val="lt1"/>
+          </a:fontRef>
+        </p:style>
+        <p:txBody>
+          <a:bodyPr rtlCol="0" anchor="ctr"/>
+          <a:lstStyle/>
+          <a:p>
+            <a:pPr algn="ctr"/>
+          </a:p>
+        </p:txBody>
+      </p:sp>
+      <p:sp>
+        <p:nvSpPr>
+          <p:cNvPr id="10" name="TextBox 9"/>
+          <p:cNvSpPr txBox="1"/>
+          <p:nvPr/>
+        </p:nvSpPr>
+        <p:spPr>
+          <a:xfrm>
+            <a:off x="6446520" y="1344168"/>
+            <a:ext cx="4983480" cy="1664208"/>
+          </a:xfrm>
+          <a:prstGeom prst="rect">
+            <a:avLst/>
+          </a:prstGeom>
+          <a:noFill/>
+        </p:spPr>
+        <p:txBody>
+          <a:bodyPr wrap="square" lIns="0" rIns="0">
+            <a:spAutoFit/>
+          </a:bodyPr>
+          <a:lstStyle/>
+          <a:p>
+            <a:pPr>
+              <a:defRPr b="1" sz="1500">
+                <a:solidFill>
+                  <a:srgbClr val="1E2761"/>
+                </a:solidFill>
+                <a:latin typeface="Aptos Display"/>
+              </a:defRPr>
+            </a:pPr>
+            <a:r>
+              <a:t>Why it helps</a:t>
             </a:r>
           </a:p>
           <a:p>
@@ -11501,29 +11181,25 @@
               </a:defRPr>
             </a:pPr>
             <a:r>
-              <a:t>• Power BI Pro</a:t>
+              <a:t>• Fabric capacity</a:t>
             </a:r>
             <a:br/>
             <a:r>
-              <a:t>• Premium Per User</a:t>
-            </a:r>
-            <a:br/>
-            <a:r>
-              <a:t>• Premium capacity</a:t>
-            </a:r>
-          </a:p>
-        </p:txBody>
-      </p:sp>
-      <p:sp>
-        <p:nvSpPr>
-          <p:cNvPr id="8" name="Rounded Rectangle 7"/>
+              <a:t>• Workspace assignment</a:t>
+            </a:r>
+          </a:p>
+        </p:txBody>
+      </p:sp>
+      <p:sp>
+        <p:nvSpPr>
+          <p:cNvPr id="11" name="Rounded Rectangle 10"/>
           <p:cNvSpPr/>
           <p:nvPr/>
         </p:nvSpPr>
         <p:spPr>
           <a:xfrm>
-            <a:off x="6263640" y="1234440"/>
-            <a:ext cx="5303520" cy="1828800"/>
+            <a:off x="822960" y="4160520"/>
+            <a:ext cx="10424160" cy="868680"/>
           </a:xfrm>
           <a:prstGeom prst="roundRect">
             <a:avLst/>
@@ -11561,20 +11237,20 @@
       </p:sp>
       <p:sp>
         <p:nvSpPr>
-          <p:cNvPr id="9" name="Rectangle 8"/>
+          <p:cNvPr id="12" name="Rectangle 11"/>
           <p:cNvSpPr/>
           <p:nvPr/>
         </p:nvSpPr>
         <p:spPr>
           <a:xfrm>
-            <a:off x="6263640" y="1234440"/>
-            <a:ext cx="91440" cy="1828800"/>
+            <a:off x="822960" y="4160520"/>
+            <a:ext cx="91440" cy="868680"/>
           </a:xfrm>
           <a:prstGeom prst="rect">
             <a:avLst/>
           </a:prstGeom>
           <a:solidFill>
-            <a:srgbClr val="02C39A"/>
+            <a:srgbClr val="F9B700"/>
           </a:solidFill>
           <a:ln>
             <a:noFill/>
@@ -11604,14 +11280,14 @@
       </p:sp>
       <p:sp>
         <p:nvSpPr>
-          <p:cNvPr id="10" name="TextBox 9"/>
+          <p:cNvPr id="13" name="TextBox 12"/>
           <p:cNvSpPr txBox="1"/>
           <p:nvPr/>
         </p:nvSpPr>
         <p:spPr>
           <a:xfrm>
-            <a:off x="6446520" y="1344168"/>
-            <a:ext cx="4983480" cy="1664208"/>
+            <a:off x="1005840" y="4270248"/>
+            <a:ext cx="10104120" cy="704088"/>
           </a:xfrm>
           <a:prstGeom prst="rect">
             <a:avLst/>
@@ -11633,167 +11309,7 @@
               </a:defRPr>
             </a:pPr>
             <a:r>
-              <a:t>Why it helps</a:t>
-            </a:r>
-          </a:p>
-          <a:p>
-            <a:pPr>
-              <a:spcBef>
-                <a:spcPts val="400"/>
-              </a:spcBef>
-              <a:defRPr sz="1050">
-                <a:solidFill>
-                  <a:srgbClr val="242424"/>
-                </a:solidFill>
-                <a:latin typeface="Aptos"/>
-              </a:defRPr>
-            </a:pPr>
-            <a:r>
-              <a:t>• Fabric capacity</a:t>
-            </a:r>
-            <a:br/>
-            <a:r>
-              <a:t>• Workspace assignment</a:t>
-            </a:r>
-          </a:p>
-        </p:txBody>
-      </p:sp>
-      <p:sp>
-        <p:nvSpPr>
-          <p:cNvPr id="11" name="Rounded Rectangle 10"/>
-          <p:cNvSpPr/>
-          <p:nvPr/>
-        </p:nvSpPr>
-        <p:spPr>
-          <a:xfrm>
-            <a:off x="822960" y="4160520"/>
-            <a:ext cx="10424160" cy="868680"/>
-          </a:xfrm>
-          <a:prstGeom prst="roundRect">
-            <a:avLst/>
-          </a:prstGeom>
-          <a:solidFill>
-            <a:srgbClr val="FFFFFF"/>
-          </a:solidFill>
-          <a:ln>
-            <a:solidFill>
-              <a:srgbClr val="DCDCDC"/>
-            </a:solidFill>
-          </a:ln>
-        </p:spPr>
-        <p:style>
-          <a:lnRef idx="1">
-            <a:schemeClr val="accent1"/>
-          </a:lnRef>
-          <a:fillRef idx="3">
-            <a:schemeClr val="accent1"/>
-          </a:fillRef>
-          <a:effectRef idx="2">
-            <a:schemeClr val="accent1"/>
-          </a:effectRef>
-          <a:fontRef idx="minor">
-            <a:schemeClr val="lt1"/>
-          </a:fontRef>
-        </p:style>
-        <p:txBody>
-          <a:bodyPr rtlCol="0" anchor="ctr"/>
-          <a:lstStyle/>
-          <a:p>
-            <a:pPr algn="ctr"/>
-          </a:p>
-        </p:txBody>
-      </p:sp>
-      <p:sp>
-        <p:nvSpPr>
-          <p:cNvPr id="12" name="Rectangle 11"/>
-          <p:cNvSpPr/>
-          <p:nvPr/>
-        </p:nvSpPr>
-        <p:spPr>
-          <a:xfrm>
-            <a:off x="822960" y="4160520"/>
-            <a:ext cx="91440" cy="868680"/>
-          </a:xfrm>
-          <a:prstGeom prst="rect">
-            <a:avLst/>
-          </a:prstGeom>
-          <a:solidFill>
-            <a:srgbClr val="F9B700"/>
-          </a:solidFill>
-          <a:ln>
-            <a:noFill/>
-          </a:ln>
-        </p:spPr>
-        <p:style>
-          <a:lnRef idx="1">
-            <a:schemeClr val="accent1"/>
-          </a:lnRef>
-          <a:fillRef idx="3">
-            <a:schemeClr val="accent1"/>
-          </a:fillRef>
-          <a:effectRef idx="2">
-            <a:schemeClr val="accent1"/>
-          </a:effectRef>
-          <a:fontRef idx="minor">
-            <a:schemeClr val="lt1"/>
-          </a:fontRef>
-        </p:style>
-        <p:txBody>
-          <a:bodyPr rtlCol="0" anchor="ctr"/>
-          <a:lstStyle/>
-          <a:p>
-            <a:pPr algn="ctr"/>
-          </a:p>
-        </p:txBody>
-      </p:sp>
-      <p:sp>
-        <p:nvSpPr>
-          <p:cNvPr id="13" name="TextBox 12"/>
-          <p:cNvSpPr txBox="1"/>
-          <p:nvPr/>
-        </p:nvSpPr>
-        <p:spPr>
-          <a:xfrm>
-            <a:off x="1005840" y="4270248"/>
-            <a:ext cx="10104120" cy="704088"/>
-          </a:xfrm>
-          <a:prstGeom prst="rect">
-            <a:avLst/>
-          </a:prstGeom>
-          <a:noFill/>
-        </p:spPr>
-        <p:txBody>
-          <a:bodyPr wrap="square" lIns="0" rIns="0">
-            <a:spAutoFit/>
-          </a:bodyPr>
-          <a:lstStyle/>
-          <a:p>
-            <a:pPr>
-              <a:defRPr b="1" sz="1500">
-                <a:solidFill>
-                  <a:srgbClr val="1E2761"/>
-                </a:solidFill>
-                <a:latin typeface="Aptos Display"/>
-              </a:defRPr>
-            </a:pPr>
-            <a:r>
-              <a:t>Lab connection</a:t>
-            </a:r>
-          </a:p>
-          <a:p>
-            <a:pPr>
-              <a:spcBef>
-                <a:spcPts val="400"/>
-              </a:spcBef>
-              <a:defRPr sz="1050">
-                <a:solidFill>
-                  <a:srgbClr val="242424"/>
-                </a:solidFill>
-                <a:latin typeface="Aptos"/>
-              </a:defRPr>
-            </a:pPr>
-            <a:r>
-              <a:t>Coverage: Covered. Use the lab README to demonstrate or discuss this topic. Review terms: assignment.</a:t>
+              <a:t>In the lab, you will apply this pattern, validate the expected behavior, and discuss where it fits in a real Power BI solution.</a:t>
             </a:r>
           </a:p>
         </p:txBody>
@@ -11932,42 +11448,6 @@
       </p:sp>
       <p:sp>
         <p:nvSpPr>
-          <p:cNvPr id="4" name="TextBox 3"/>
-          <p:cNvSpPr txBox="1"/>
-          <p:nvPr/>
-        </p:nvSpPr>
-        <p:spPr>
-          <a:xfrm>
-            <a:off x="530352" y="914400"/>
-            <a:ext cx="10515600" cy="320040"/>
-          </a:xfrm>
-          <a:prstGeom prst="rect">
-            <a:avLst/>
-          </a:prstGeom>
-          <a:noFill/>
-        </p:spPr>
-        <p:txBody>
-          <a:bodyPr wrap="none">
-            <a:spAutoFit/>
-          </a:bodyPr>
-          <a:lstStyle/>
-          <a:p>
-            <a:pPr>
-              <a:defRPr sz="1200">
-                <a:solidFill>
-                  <a:srgbClr val="5C5C5C"/>
-                </a:solidFill>
-                <a:latin typeface="Aptos"/>
-              </a:defRPr>
-            </a:pPr>
-            <a:r>
-              <a:t>Talking points, learner value, and lab connection</a:t>
-            </a:r>
-          </a:p>
-        </p:txBody>
-      </p:sp>
-      <p:sp>
-        <p:nvSpPr>
           <p:cNvPr id="5" name="Rounded Rectangle 4"/>
           <p:cNvSpPr/>
           <p:nvPr/>
@@ -12085,7 +11565,143 @@
               </a:defRPr>
             </a:pPr>
             <a:r>
-              <a:t>Talking points</a:t>
+              <a:t>Key ideas</a:t>
+            </a:r>
+            <a:br/>
+            <a:r>
+              <a:t>• Model size</a:t>
+            </a:r>
+            <a:br/>
+            <a:r>
+              <a:t>• Memory</a:t>
+            </a:r>
+            <a:br/>
+            <a:r>
+              <a:t>• Refresh</a:t>
+            </a:r>
+          </a:p>
+        </p:txBody>
+      </p:sp>
+      <p:sp>
+        <p:nvSpPr>
+          <p:cNvPr id="8" name="Rounded Rectangle 7"/>
+          <p:cNvSpPr/>
+          <p:nvPr/>
+        </p:nvSpPr>
+        <p:spPr>
+          <a:xfrm>
+            <a:off x="6263640" y="1234440"/>
+            <a:ext cx="5303520" cy="1828800"/>
+          </a:xfrm>
+          <a:prstGeom prst="roundRect">
+            <a:avLst/>
+          </a:prstGeom>
+          <a:solidFill>
+            <a:srgbClr val="FFFFFF"/>
+          </a:solidFill>
+          <a:ln>
+            <a:solidFill>
+              <a:srgbClr val="DCDCDC"/>
+            </a:solidFill>
+          </a:ln>
+        </p:spPr>
+        <p:style>
+          <a:lnRef idx="1">
+            <a:schemeClr val="accent1"/>
+          </a:lnRef>
+          <a:fillRef idx="3">
+            <a:schemeClr val="accent1"/>
+          </a:fillRef>
+          <a:effectRef idx="2">
+            <a:schemeClr val="accent1"/>
+          </a:effectRef>
+          <a:fontRef idx="minor">
+            <a:schemeClr val="lt1"/>
+          </a:fontRef>
+        </p:style>
+        <p:txBody>
+          <a:bodyPr rtlCol="0" anchor="ctr"/>
+          <a:lstStyle/>
+          <a:p>
+            <a:pPr algn="ctr"/>
+          </a:p>
+        </p:txBody>
+      </p:sp>
+      <p:sp>
+        <p:nvSpPr>
+          <p:cNvPr id="9" name="Rectangle 8"/>
+          <p:cNvSpPr/>
+          <p:nvPr/>
+        </p:nvSpPr>
+        <p:spPr>
+          <a:xfrm>
+            <a:off x="6263640" y="1234440"/>
+            <a:ext cx="91440" cy="1828800"/>
+          </a:xfrm>
+          <a:prstGeom prst="rect">
+            <a:avLst/>
+          </a:prstGeom>
+          <a:solidFill>
+            <a:srgbClr val="02C39A"/>
+          </a:solidFill>
+          <a:ln>
+            <a:noFill/>
+          </a:ln>
+        </p:spPr>
+        <p:style>
+          <a:lnRef idx="1">
+            <a:schemeClr val="accent1"/>
+          </a:lnRef>
+          <a:fillRef idx="3">
+            <a:schemeClr val="accent1"/>
+          </a:fillRef>
+          <a:effectRef idx="2">
+            <a:schemeClr val="accent1"/>
+          </a:effectRef>
+          <a:fontRef idx="minor">
+            <a:schemeClr val="lt1"/>
+          </a:fontRef>
+        </p:style>
+        <p:txBody>
+          <a:bodyPr rtlCol="0" anchor="ctr"/>
+          <a:lstStyle/>
+          <a:p>
+            <a:pPr algn="ctr"/>
+          </a:p>
+        </p:txBody>
+      </p:sp>
+      <p:sp>
+        <p:nvSpPr>
+          <p:cNvPr id="10" name="TextBox 9"/>
+          <p:cNvSpPr txBox="1"/>
+          <p:nvPr/>
+        </p:nvSpPr>
+        <p:spPr>
+          <a:xfrm>
+            <a:off x="6446520" y="1344168"/>
+            <a:ext cx="4983480" cy="1664208"/>
+          </a:xfrm>
+          <a:prstGeom prst="rect">
+            <a:avLst/>
+          </a:prstGeom>
+          <a:noFill/>
+        </p:spPr>
+        <p:txBody>
+          <a:bodyPr wrap="square" lIns="0" rIns="0">
+            <a:spAutoFit/>
+          </a:bodyPr>
+          <a:lstStyle/>
+          <a:p>
+            <a:pPr>
+              <a:defRPr b="1" sz="1500">
+                <a:solidFill>
+                  <a:srgbClr val="1E2761"/>
+                </a:solidFill>
+                <a:latin typeface="Aptos Display"/>
+              </a:defRPr>
+            </a:pPr>
+            <a:r>
+              <a:t>Why it helps</a:t>
             </a:r>
           </a:p>
           <a:p>
@@ -12101,29 +11717,25 @@
               </a:defRPr>
             </a:pPr>
             <a:r>
-              <a:t>• Model size</a:t>
+              <a:t>• Storage format</a:t>
             </a:r>
             <a:br/>
             <a:r>
-              <a:t>• Memory</a:t>
-            </a:r>
-            <a:br/>
-            <a:r>
-              <a:t>• Refresh</a:t>
-            </a:r>
-          </a:p>
-        </p:txBody>
-      </p:sp>
-      <p:sp>
-        <p:nvSpPr>
-          <p:cNvPr id="8" name="Rounded Rectangle 7"/>
+              <a:t>• Capacity dependency</a:t>
+            </a:r>
+          </a:p>
+        </p:txBody>
+      </p:sp>
+      <p:sp>
+        <p:nvSpPr>
+          <p:cNvPr id="11" name="Rounded Rectangle 10"/>
           <p:cNvSpPr/>
           <p:nvPr/>
         </p:nvSpPr>
         <p:spPr>
           <a:xfrm>
-            <a:off x="6263640" y="1234440"/>
-            <a:ext cx="5303520" cy="1828800"/>
+            <a:off x="822960" y="4160520"/>
+            <a:ext cx="10424160" cy="868680"/>
           </a:xfrm>
           <a:prstGeom prst="roundRect">
             <a:avLst/>
@@ -12161,20 +11773,20 @@
       </p:sp>
       <p:sp>
         <p:nvSpPr>
-          <p:cNvPr id="9" name="Rectangle 8"/>
+          <p:cNvPr id="12" name="Rectangle 11"/>
           <p:cNvSpPr/>
           <p:nvPr/>
         </p:nvSpPr>
         <p:spPr>
           <a:xfrm>
-            <a:off x="6263640" y="1234440"/>
-            <a:ext cx="91440" cy="1828800"/>
+            <a:off x="822960" y="4160520"/>
+            <a:ext cx="91440" cy="868680"/>
           </a:xfrm>
           <a:prstGeom prst="rect">
             <a:avLst/>
           </a:prstGeom>
           <a:solidFill>
-            <a:srgbClr val="02C39A"/>
+            <a:srgbClr val="F9B700"/>
           </a:solidFill>
           <a:ln>
             <a:noFill/>
@@ -12204,14 +11816,14 @@
       </p:sp>
       <p:sp>
         <p:nvSpPr>
-          <p:cNvPr id="10" name="TextBox 9"/>
+          <p:cNvPr id="13" name="TextBox 12"/>
           <p:cNvSpPr txBox="1"/>
           <p:nvPr/>
         </p:nvSpPr>
         <p:spPr>
           <a:xfrm>
-            <a:off x="6446520" y="1344168"/>
-            <a:ext cx="4983480" cy="1664208"/>
+            <a:off x="1005840" y="4270248"/>
+            <a:ext cx="10104120" cy="704088"/>
           </a:xfrm>
           <a:prstGeom prst="rect">
             <a:avLst/>
@@ -12233,167 +11845,7 @@
               </a:defRPr>
             </a:pPr>
             <a:r>
-              <a:t>Why it helps</a:t>
-            </a:r>
-          </a:p>
-          <a:p>
-            <a:pPr>
-              <a:spcBef>
-                <a:spcPts val="400"/>
-              </a:spcBef>
-              <a:defRPr sz="1050">
-                <a:solidFill>
-                  <a:srgbClr val="242424"/>
-                </a:solidFill>
-                <a:latin typeface="Aptos"/>
-              </a:defRPr>
-            </a:pPr>
-            <a:r>
-              <a:t>• Storage format</a:t>
-            </a:r>
-            <a:br/>
-            <a:r>
-              <a:t>• Capacity dependency</a:t>
-            </a:r>
-          </a:p>
-        </p:txBody>
-      </p:sp>
-      <p:sp>
-        <p:nvSpPr>
-          <p:cNvPr id="11" name="Rounded Rectangle 10"/>
-          <p:cNvSpPr/>
-          <p:nvPr/>
-        </p:nvSpPr>
-        <p:spPr>
-          <a:xfrm>
-            <a:off x="822960" y="4160520"/>
-            <a:ext cx="10424160" cy="868680"/>
-          </a:xfrm>
-          <a:prstGeom prst="roundRect">
-            <a:avLst/>
-          </a:prstGeom>
-          <a:solidFill>
-            <a:srgbClr val="FFFFFF"/>
-          </a:solidFill>
-          <a:ln>
-            <a:solidFill>
-              <a:srgbClr val="DCDCDC"/>
-            </a:solidFill>
-          </a:ln>
-        </p:spPr>
-        <p:style>
-          <a:lnRef idx="1">
-            <a:schemeClr val="accent1"/>
-          </a:lnRef>
-          <a:fillRef idx="3">
-            <a:schemeClr val="accent1"/>
-          </a:fillRef>
-          <a:effectRef idx="2">
-            <a:schemeClr val="accent1"/>
-          </a:effectRef>
-          <a:fontRef idx="minor">
-            <a:schemeClr val="lt1"/>
-          </a:fontRef>
-        </p:style>
-        <p:txBody>
-          <a:bodyPr rtlCol="0" anchor="ctr"/>
-          <a:lstStyle/>
-          <a:p>
-            <a:pPr algn="ctr"/>
-          </a:p>
-        </p:txBody>
-      </p:sp>
-      <p:sp>
-        <p:nvSpPr>
-          <p:cNvPr id="12" name="Rectangle 11"/>
-          <p:cNvSpPr/>
-          <p:nvPr/>
-        </p:nvSpPr>
-        <p:spPr>
-          <a:xfrm>
-            <a:off x="822960" y="4160520"/>
-            <a:ext cx="91440" cy="868680"/>
-          </a:xfrm>
-          <a:prstGeom prst="rect">
-            <a:avLst/>
-          </a:prstGeom>
-          <a:solidFill>
-            <a:srgbClr val="F9B700"/>
-          </a:solidFill>
-          <a:ln>
-            <a:noFill/>
-          </a:ln>
-        </p:spPr>
-        <p:style>
-          <a:lnRef idx="1">
-            <a:schemeClr val="accent1"/>
-          </a:lnRef>
-          <a:fillRef idx="3">
-            <a:schemeClr val="accent1"/>
-          </a:fillRef>
-          <a:effectRef idx="2">
-            <a:schemeClr val="accent1"/>
-          </a:effectRef>
-          <a:fontRef idx="minor">
-            <a:schemeClr val="lt1"/>
-          </a:fontRef>
-        </p:style>
-        <p:txBody>
-          <a:bodyPr rtlCol="0" anchor="ctr"/>
-          <a:lstStyle/>
-          <a:p>
-            <a:pPr algn="ctr"/>
-          </a:p>
-        </p:txBody>
-      </p:sp>
-      <p:sp>
-        <p:nvSpPr>
-          <p:cNvPr id="13" name="TextBox 12"/>
-          <p:cNvSpPr txBox="1"/>
-          <p:nvPr/>
-        </p:nvSpPr>
-        <p:spPr>
-          <a:xfrm>
-            <a:off x="1005840" y="4270248"/>
-            <a:ext cx="10104120" cy="704088"/>
-          </a:xfrm>
-          <a:prstGeom prst="rect">
-            <a:avLst/>
-          </a:prstGeom>
-          <a:noFill/>
-        </p:spPr>
-        <p:txBody>
-          <a:bodyPr wrap="square" lIns="0" rIns="0">
-            <a:spAutoFit/>
-          </a:bodyPr>
-          <a:lstStyle/>
-          <a:p>
-            <a:pPr>
-              <a:defRPr b="1" sz="1500">
-                <a:solidFill>
-                  <a:srgbClr val="1E2761"/>
-                </a:solidFill>
-                <a:latin typeface="Aptos Display"/>
-              </a:defRPr>
-            </a:pPr>
-            <a:r>
-              <a:t>Lab connection</a:t>
-            </a:r>
-          </a:p>
-          <a:p>
-            <a:pPr>
-              <a:spcBef>
-                <a:spcPts val="400"/>
-              </a:spcBef>
-              <a:defRPr sz="1050">
-                <a:solidFill>
-                  <a:srgbClr val="242424"/>
-                </a:solidFill>
-                <a:latin typeface="Aptos"/>
-              </a:defRPr>
-            </a:pPr>
-            <a:r>
-              <a:t>Coverage: Covered. Use the lab README to demonstrate or discuss this topic. Review terms: dependency, format, storage.</a:t>
+              <a:t>In the lab, you will apply this pattern, validate the expected behavior, and discuss where it fits in a real Power BI solution.</a:t>
             </a:r>
           </a:p>
         </p:txBody>
@@ -12532,42 +11984,6 @@
       </p:sp>
       <p:sp>
         <p:nvSpPr>
-          <p:cNvPr id="4" name="TextBox 3"/>
-          <p:cNvSpPr txBox="1"/>
-          <p:nvPr/>
-        </p:nvSpPr>
-        <p:spPr>
-          <a:xfrm>
-            <a:off x="530352" y="914400"/>
-            <a:ext cx="10515600" cy="320040"/>
-          </a:xfrm>
-          <a:prstGeom prst="rect">
-            <a:avLst/>
-          </a:prstGeom>
-          <a:noFill/>
-        </p:spPr>
-        <p:txBody>
-          <a:bodyPr wrap="none">
-            <a:spAutoFit/>
-          </a:bodyPr>
-          <a:lstStyle/>
-          <a:p>
-            <a:pPr>
-              <a:defRPr sz="1200">
-                <a:solidFill>
-                  <a:srgbClr val="5C5C5C"/>
-                </a:solidFill>
-                <a:latin typeface="Aptos"/>
-              </a:defRPr>
-            </a:pPr>
-            <a:r>
-              <a:t>Talking points, learner value, and lab connection</a:t>
-            </a:r>
-          </a:p>
-        </p:txBody>
-      </p:sp>
-      <p:sp>
-        <p:nvSpPr>
           <p:cNvPr id="5" name="Rounded Rectangle 4"/>
           <p:cNvSpPr/>
           <p:nvPr/>
@@ -12685,7 +12101,139 @@
               </a:defRPr>
             </a:pPr>
             <a:r>
-              <a:t>Talking points</a:t>
+              <a:t>Key ideas</a:t>
+            </a:r>
+            <a:br/>
+            <a:r>
+              <a:t>• Read/write workflows</a:t>
+            </a:r>
+            <a:br/>
+            <a:r>
+              <a:t>• External tools</a:t>
+            </a:r>
+          </a:p>
+        </p:txBody>
+      </p:sp>
+      <p:sp>
+        <p:nvSpPr>
+          <p:cNvPr id="8" name="Rounded Rectangle 7"/>
+          <p:cNvSpPr/>
+          <p:nvPr/>
+        </p:nvSpPr>
+        <p:spPr>
+          <a:xfrm>
+            <a:off x="6263640" y="1234440"/>
+            <a:ext cx="5303520" cy="1828800"/>
+          </a:xfrm>
+          <a:prstGeom prst="roundRect">
+            <a:avLst/>
+          </a:prstGeom>
+          <a:solidFill>
+            <a:srgbClr val="FFFFFF"/>
+          </a:solidFill>
+          <a:ln>
+            <a:solidFill>
+              <a:srgbClr val="DCDCDC"/>
+            </a:solidFill>
+          </a:ln>
+        </p:spPr>
+        <p:style>
+          <a:lnRef idx="1">
+            <a:schemeClr val="accent1"/>
+          </a:lnRef>
+          <a:fillRef idx="3">
+            <a:schemeClr val="accent1"/>
+          </a:fillRef>
+          <a:effectRef idx="2">
+            <a:schemeClr val="accent1"/>
+          </a:effectRef>
+          <a:fontRef idx="minor">
+            <a:schemeClr val="lt1"/>
+          </a:fontRef>
+        </p:style>
+        <p:txBody>
+          <a:bodyPr rtlCol="0" anchor="ctr"/>
+          <a:lstStyle/>
+          <a:p>
+            <a:pPr algn="ctr"/>
+          </a:p>
+        </p:txBody>
+      </p:sp>
+      <p:sp>
+        <p:nvSpPr>
+          <p:cNvPr id="9" name="Rectangle 8"/>
+          <p:cNvSpPr/>
+          <p:nvPr/>
+        </p:nvSpPr>
+        <p:spPr>
+          <a:xfrm>
+            <a:off x="6263640" y="1234440"/>
+            <a:ext cx="91440" cy="1828800"/>
+          </a:xfrm>
+          <a:prstGeom prst="rect">
+            <a:avLst/>
+          </a:prstGeom>
+          <a:solidFill>
+            <a:srgbClr val="02C39A"/>
+          </a:solidFill>
+          <a:ln>
+            <a:noFill/>
+          </a:ln>
+        </p:spPr>
+        <p:style>
+          <a:lnRef idx="1">
+            <a:schemeClr val="accent1"/>
+          </a:lnRef>
+          <a:fillRef idx="3">
+            <a:schemeClr val="accent1"/>
+          </a:fillRef>
+          <a:effectRef idx="2">
+            <a:schemeClr val="accent1"/>
+          </a:effectRef>
+          <a:fontRef idx="minor">
+            <a:schemeClr val="lt1"/>
+          </a:fontRef>
+        </p:style>
+        <p:txBody>
+          <a:bodyPr rtlCol="0" anchor="ctr"/>
+          <a:lstStyle/>
+          <a:p>
+            <a:pPr algn="ctr"/>
+          </a:p>
+        </p:txBody>
+      </p:sp>
+      <p:sp>
+        <p:nvSpPr>
+          <p:cNvPr id="10" name="TextBox 9"/>
+          <p:cNvSpPr txBox="1"/>
+          <p:nvPr/>
+        </p:nvSpPr>
+        <p:spPr>
+          <a:xfrm>
+            <a:off x="6446520" y="1344168"/>
+            <a:ext cx="4983480" cy="1664208"/>
+          </a:xfrm>
+          <a:prstGeom prst="rect">
+            <a:avLst/>
+          </a:prstGeom>
+          <a:noFill/>
+        </p:spPr>
+        <p:txBody>
+          <a:bodyPr wrap="square" lIns="0" rIns="0">
+            <a:spAutoFit/>
+          </a:bodyPr>
+          <a:lstStyle/>
+          <a:p>
+            <a:pPr>
+              <a:defRPr b="1" sz="1500">
+                <a:solidFill>
+                  <a:srgbClr val="1E2761"/>
+                </a:solidFill>
+                <a:latin typeface="Aptos Display"/>
+              </a:defRPr>
+            </a:pPr>
+            <a:r>
+              <a:t>Why it helps</a:t>
             </a:r>
           </a:p>
           <a:p>
@@ -12701,25 +12249,25 @@
               </a:defRPr>
             </a:pPr>
             <a:r>
-              <a:t>• Read/write workflows</a:t>
+              <a:t>• ALM patterns</a:t>
             </a:r>
             <a:br/>
             <a:r>
-              <a:t>• External tools</a:t>
-            </a:r>
-          </a:p>
-        </p:txBody>
-      </p:sp>
-      <p:sp>
-        <p:nvSpPr>
-          <p:cNvPr id="8" name="Rounded Rectangle 7"/>
+              <a:t>• Security and admin settings</a:t>
+            </a:r>
+          </a:p>
+        </p:txBody>
+      </p:sp>
+      <p:sp>
+        <p:nvSpPr>
+          <p:cNvPr id="11" name="Rounded Rectangle 10"/>
           <p:cNvSpPr/>
           <p:nvPr/>
         </p:nvSpPr>
         <p:spPr>
           <a:xfrm>
-            <a:off x="6263640" y="1234440"/>
-            <a:ext cx="5303520" cy="1828800"/>
+            <a:off x="822960" y="4160520"/>
+            <a:ext cx="10424160" cy="868680"/>
           </a:xfrm>
           <a:prstGeom prst="roundRect">
             <a:avLst/>
@@ -12757,20 +12305,20 @@
       </p:sp>
       <p:sp>
         <p:nvSpPr>
-          <p:cNvPr id="9" name="Rectangle 8"/>
+          <p:cNvPr id="12" name="Rectangle 11"/>
           <p:cNvSpPr/>
           <p:nvPr/>
         </p:nvSpPr>
         <p:spPr>
           <a:xfrm>
-            <a:off x="6263640" y="1234440"/>
-            <a:ext cx="91440" cy="1828800"/>
+            <a:off x="822960" y="4160520"/>
+            <a:ext cx="91440" cy="868680"/>
           </a:xfrm>
           <a:prstGeom prst="rect">
             <a:avLst/>
           </a:prstGeom>
           <a:solidFill>
-            <a:srgbClr val="02C39A"/>
+            <a:srgbClr val="F9B700"/>
           </a:solidFill>
           <a:ln>
             <a:noFill/>
@@ -12800,14 +12348,14 @@
       </p:sp>
       <p:sp>
         <p:nvSpPr>
-          <p:cNvPr id="10" name="TextBox 9"/>
+          <p:cNvPr id="13" name="TextBox 12"/>
           <p:cNvSpPr txBox="1"/>
           <p:nvPr/>
         </p:nvSpPr>
         <p:spPr>
           <a:xfrm>
-            <a:off x="6446520" y="1344168"/>
-            <a:ext cx="4983480" cy="1664208"/>
+            <a:off x="1005840" y="4270248"/>
+            <a:ext cx="10104120" cy="704088"/>
           </a:xfrm>
           <a:prstGeom prst="rect">
             <a:avLst/>
@@ -12829,167 +12377,7 @@
               </a:defRPr>
             </a:pPr>
             <a:r>
-              <a:t>Why it helps</a:t>
-            </a:r>
-          </a:p>
-          <a:p>
-            <a:pPr>
-              <a:spcBef>
-                <a:spcPts val="400"/>
-              </a:spcBef>
-              <a:defRPr sz="1050">
-                <a:solidFill>
-                  <a:srgbClr val="242424"/>
-                </a:solidFill>
-                <a:latin typeface="Aptos"/>
-              </a:defRPr>
-            </a:pPr>
-            <a:r>
-              <a:t>• ALM patterns</a:t>
-            </a:r>
-            <a:br/>
-            <a:r>
-              <a:t>• Security and admin settings</a:t>
-            </a:r>
-          </a:p>
-        </p:txBody>
-      </p:sp>
-      <p:sp>
-        <p:nvSpPr>
-          <p:cNvPr id="11" name="Rounded Rectangle 10"/>
-          <p:cNvSpPr/>
-          <p:nvPr/>
-        </p:nvSpPr>
-        <p:spPr>
-          <a:xfrm>
-            <a:off x="822960" y="4160520"/>
-            <a:ext cx="10424160" cy="868680"/>
-          </a:xfrm>
-          <a:prstGeom prst="roundRect">
-            <a:avLst/>
-          </a:prstGeom>
-          <a:solidFill>
-            <a:srgbClr val="FFFFFF"/>
-          </a:solidFill>
-          <a:ln>
-            <a:solidFill>
-              <a:srgbClr val="DCDCDC"/>
-            </a:solidFill>
-          </a:ln>
-        </p:spPr>
-        <p:style>
-          <a:lnRef idx="1">
-            <a:schemeClr val="accent1"/>
-          </a:lnRef>
-          <a:fillRef idx="3">
-            <a:schemeClr val="accent1"/>
-          </a:fillRef>
-          <a:effectRef idx="2">
-            <a:schemeClr val="accent1"/>
-          </a:effectRef>
-          <a:fontRef idx="minor">
-            <a:schemeClr val="lt1"/>
-          </a:fontRef>
-        </p:style>
-        <p:txBody>
-          <a:bodyPr rtlCol="0" anchor="ctr"/>
-          <a:lstStyle/>
-          <a:p>
-            <a:pPr algn="ctr"/>
-          </a:p>
-        </p:txBody>
-      </p:sp>
-      <p:sp>
-        <p:nvSpPr>
-          <p:cNvPr id="12" name="Rectangle 11"/>
-          <p:cNvSpPr/>
-          <p:nvPr/>
-        </p:nvSpPr>
-        <p:spPr>
-          <a:xfrm>
-            <a:off x="822960" y="4160520"/>
-            <a:ext cx="91440" cy="868680"/>
-          </a:xfrm>
-          <a:prstGeom prst="rect">
-            <a:avLst/>
-          </a:prstGeom>
-          <a:solidFill>
-            <a:srgbClr val="F9B700"/>
-          </a:solidFill>
-          <a:ln>
-            <a:noFill/>
-          </a:ln>
-        </p:spPr>
-        <p:style>
-          <a:lnRef idx="1">
-            <a:schemeClr val="accent1"/>
-          </a:lnRef>
-          <a:fillRef idx="3">
-            <a:schemeClr val="accent1"/>
-          </a:fillRef>
-          <a:effectRef idx="2">
-            <a:schemeClr val="accent1"/>
-          </a:effectRef>
-          <a:fontRef idx="minor">
-            <a:schemeClr val="lt1"/>
-          </a:fontRef>
-        </p:style>
-        <p:txBody>
-          <a:bodyPr rtlCol="0" anchor="ctr"/>
-          <a:lstStyle/>
-          <a:p>
-            <a:pPr algn="ctr"/>
-          </a:p>
-        </p:txBody>
-      </p:sp>
-      <p:sp>
-        <p:nvSpPr>
-          <p:cNvPr id="13" name="TextBox 12"/>
-          <p:cNvSpPr txBox="1"/>
-          <p:nvPr/>
-        </p:nvSpPr>
-        <p:spPr>
-          <a:xfrm>
-            <a:off x="1005840" y="4270248"/>
-            <a:ext cx="10104120" cy="704088"/>
-          </a:xfrm>
-          <a:prstGeom prst="rect">
-            <a:avLst/>
-          </a:prstGeom>
-          <a:noFill/>
-        </p:spPr>
-        <p:txBody>
-          <a:bodyPr wrap="square" lIns="0" rIns="0">
-            <a:spAutoFit/>
-          </a:bodyPr>
-          <a:lstStyle/>
-          <a:p>
-            <a:pPr>
-              <a:defRPr b="1" sz="1500">
-                <a:solidFill>
-                  <a:srgbClr val="1E2761"/>
-                </a:solidFill>
-                <a:latin typeface="Aptos Display"/>
-              </a:defRPr>
-            </a:pPr>
-            <a:r>
-              <a:t>Lab connection</a:t>
-            </a:r>
-          </a:p>
-          <a:p>
-            <a:pPr>
-              <a:spcBef>
-                <a:spcPts val="400"/>
-              </a:spcBef>
-              <a:defRPr sz="1050">
-                <a:solidFill>
-                  <a:srgbClr val="242424"/>
-                </a:solidFill>
-                <a:latin typeface="Aptos"/>
-              </a:defRPr>
-            </a:pPr>
-            <a:r>
-              <a:t>Coverage: Covered. Use the lab README to demonstrate or discuss this topic. Review terms: external, patterns, tools, workflows.</a:t>
+              <a:t>In the lab, you will apply this pattern, validate the expected behavior, and discuss where it fits in a real Power BI solution.</a:t>
             </a:r>
           </a:p>
         </p:txBody>
@@ -13128,42 +12516,6 @@
       </p:sp>
       <p:sp>
         <p:nvSpPr>
-          <p:cNvPr id="4" name="TextBox 3"/>
-          <p:cNvSpPr txBox="1"/>
-          <p:nvPr/>
-        </p:nvSpPr>
-        <p:spPr>
-          <a:xfrm>
-            <a:off x="530352" y="914400"/>
-            <a:ext cx="10515600" cy="320040"/>
-          </a:xfrm>
-          <a:prstGeom prst="rect">
-            <a:avLst/>
-          </a:prstGeom>
-          <a:noFill/>
-        </p:spPr>
-        <p:txBody>
-          <a:bodyPr wrap="none">
-            <a:spAutoFit/>
-          </a:bodyPr>
-          <a:lstStyle/>
-          <a:p>
-            <a:pPr>
-              <a:defRPr sz="1200">
-                <a:solidFill>
-                  <a:srgbClr val="5C5C5C"/>
-                </a:solidFill>
-                <a:latin typeface="Aptos"/>
-              </a:defRPr>
-            </a:pPr>
-            <a:r>
-              <a:t>Talking points, learner value, and lab connection</a:t>
-            </a:r>
-          </a:p>
-        </p:txBody>
-      </p:sp>
-      <p:sp>
-        <p:nvSpPr>
           <p:cNvPr id="5" name="Rounded Rectangle 4"/>
           <p:cNvSpPr/>
           <p:nvPr/>
@@ -13281,7 +12633,139 @@
               </a:defRPr>
             </a:pPr>
             <a:r>
-              <a:t>Talking points</a:t>
+              <a:t>Key ideas</a:t>
+            </a:r>
+            <a:br/>
+            <a:r>
+              <a:t>• Pixel-perfect reporting</a:t>
+            </a:r>
+            <a:br/>
+            <a:r>
+              <a:t>• Operational reports</a:t>
+            </a:r>
+          </a:p>
+        </p:txBody>
+      </p:sp>
+      <p:sp>
+        <p:nvSpPr>
+          <p:cNvPr id="8" name="Rounded Rectangle 7"/>
+          <p:cNvSpPr/>
+          <p:nvPr/>
+        </p:nvSpPr>
+        <p:spPr>
+          <a:xfrm>
+            <a:off x="6263640" y="1234440"/>
+            <a:ext cx="5303520" cy="1828800"/>
+          </a:xfrm>
+          <a:prstGeom prst="roundRect">
+            <a:avLst/>
+          </a:prstGeom>
+          <a:solidFill>
+            <a:srgbClr val="FFFFFF"/>
+          </a:solidFill>
+          <a:ln>
+            <a:solidFill>
+              <a:srgbClr val="DCDCDC"/>
+            </a:solidFill>
+          </a:ln>
+        </p:spPr>
+        <p:style>
+          <a:lnRef idx="1">
+            <a:schemeClr val="accent1"/>
+          </a:lnRef>
+          <a:fillRef idx="3">
+            <a:schemeClr val="accent1"/>
+          </a:fillRef>
+          <a:effectRef idx="2">
+            <a:schemeClr val="accent1"/>
+          </a:effectRef>
+          <a:fontRef idx="minor">
+            <a:schemeClr val="lt1"/>
+          </a:fontRef>
+        </p:style>
+        <p:txBody>
+          <a:bodyPr rtlCol="0" anchor="ctr"/>
+          <a:lstStyle/>
+          <a:p>
+            <a:pPr algn="ctr"/>
+          </a:p>
+        </p:txBody>
+      </p:sp>
+      <p:sp>
+        <p:nvSpPr>
+          <p:cNvPr id="9" name="Rectangle 8"/>
+          <p:cNvSpPr/>
+          <p:nvPr/>
+        </p:nvSpPr>
+        <p:spPr>
+          <a:xfrm>
+            <a:off x="6263640" y="1234440"/>
+            <a:ext cx="91440" cy="1828800"/>
+          </a:xfrm>
+          <a:prstGeom prst="rect">
+            <a:avLst/>
+          </a:prstGeom>
+          <a:solidFill>
+            <a:srgbClr val="02C39A"/>
+          </a:solidFill>
+          <a:ln>
+            <a:noFill/>
+          </a:ln>
+        </p:spPr>
+        <p:style>
+          <a:lnRef idx="1">
+            <a:schemeClr val="accent1"/>
+          </a:lnRef>
+          <a:fillRef idx="3">
+            <a:schemeClr val="accent1"/>
+          </a:fillRef>
+          <a:effectRef idx="2">
+            <a:schemeClr val="accent1"/>
+          </a:effectRef>
+          <a:fontRef idx="minor">
+            <a:schemeClr val="lt1"/>
+          </a:fontRef>
+        </p:style>
+        <p:txBody>
+          <a:bodyPr rtlCol="0" anchor="ctr"/>
+          <a:lstStyle/>
+          <a:p>
+            <a:pPr algn="ctr"/>
+          </a:p>
+        </p:txBody>
+      </p:sp>
+      <p:sp>
+        <p:nvSpPr>
+          <p:cNvPr id="10" name="TextBox 9"/>
+          <p:cNvSpPr txBox="1"/>
+          <p:nvPr/>
+        </p:nvSpPr>
+        <p:spPr>
+          <a:xfrm>
+            <a:off x="6446520" y="1344168"/>
+            <a:ext cx="4983480" cy="1664208"/>
+          </a:xfrm>
+          <a:prstGeom prst="rect">
+            <a:avLst/>
+          </a:prstGeom>
+          <a:noFill/>
+        </p:spPr>
+        <p:txBody>
+          <a:bodyPr wrap="square" lIns="0" rIns="0">
+            <a:spAutoFit/>
+          </a:bodyPr>
+          <a:lstStyle/>
+          <a:p>
+            <a:pPr>
+              <a:defRPr b="1" sz="1500">
+                <a:solidFill>
+                  <a:srgbClr val="1E2761"/>
+                </a:solidFill>
+                <a:latin typeface="Aptos Display"/>
+              </a:defRPr>
+            </a:pPr>
+            <a:r>
+              <a:t>Why it helps</a:t>
             </a:r>
           </a:p>
           <a:p>
@@ -13297,25 +12781,25 @@
               </a:defRPr>
             </a:pPr>
             <a:r>
-              <a:t>• Pixel-perfect reporting</a:t>
+              <a:t>• Export scenarios</a:t>
             </a:r>
             <a:br/>
             <a:r>
-              <a:t>• Operational reports</a:t>
-            </a:r>
-          </a:p>
-        </p:txBody>
-      </p:sp>
-      <p:sp>
-        <p:nvSpPr>
-          <p:cNvPr id="8" name="Rounded Rectangle 7"/>
+              <a:t>• Report Builder</a:t>
+            </a:r>
+          </a:p>
+        </p:txBody>
+      </p:sp>
+      <p:sp>
+        <p:nvSpPr>
+          <p:cNvPr id="11" name="Rounded Rectangle 10"/>
           <p:cNvSpPr/>
           <p:nvPr/>
         </p:nvSpPr>
         <p:spPr>
           <a:xfrm>
-            <a:off x="6263640" y="1234440"/>
-            <a:ext cx="5303520" cy="1828800"/>
+            <a:off x="822960" y="4160520"/>
+            <a:ext cx="10424160" cy="868680"/>
           </a:xfrm>
           <a:prstGeom prst="roundRect">
             <a:avLst/>
@@ -13353,20 +12837,20 @@
       </p:sp>
       <p:sp>
         <p:nvSpPr>
-          <p:cNvPr id="9" name="Rectangle 8"/>
+          <p:cNvPr id="12" name="Rectangle 11"/>
           <p:cNvSpPr/>
           <p:nvPr/>
         </p:nvSpPr>
         <p:spPr>
           <a:xfrm>
-            <a:off x="6263640" y="1234440"/>
-            <a:ext cx="91440" cy="1828800"/>
+            <a:off x="822960" y="4160520"/>
+            <a:ext cx="91440" cy="868680"/>
           </a:xfrm>
           <a:prstGeom prst="rect">
             <a:avLst/>
           </a:prstGeom>
           <a:solidFill>
-            <a:srgbClr val="02C39A"/>
+            <a:srgbClr val="F9B700"/>
           </a:solidFill>
           <a:ln>
             <a:noFill/>
@@ -13396,14 +12880,14 @@
       </p:sp>
       <p:sp>
         <p:nvSpPr>
-          <p:cNvPr id="10" name="TextBox 9"/>
+          <p:cNvPr id="13" name="TextBox 12"/>
           <p:cNvSpPr txBox="1"/>
           <p:nvPr/>
         </p:nvSpPr>
         <p:spPr>
           <a:xfrm>
-            <a:off x="6446520" y="1344168"/>
-            <a:ext cx="4983480" cy="1664208"/>
+            <a:off x="1005840" y="4270248"/>
+            <a:ext cx="10104120" cy="704088"/>
           </a:xfrm>
           <a:prstGeom prst="rect">
             <a:avLst/>
@@ -13425,167 +12909,7 @@
               </a:defRPr>
             </a:pPr>
             <a:r>
-              <a:t>Why it helps</a:t>
-            </a:r>
-          </a:p>
-          <a:p>
-            <a:pPr>
-              <a:spcBef>
-                <a:spcPts val="400"/>
-              </a:spcBef>
-              <a:defRPr sz="1050">
-                <a:solidFill>
-                  <a:srgbClr val="242424"/>
-                </a:solidFill>
-                <a:latin typeface="Aptos"/>
-              </a:defRPr>
-            </a:pPr>
-            <a:r>
-              <a:t>• Export scenarios</a:t>
-            </a:r>
-            <a:br/>
-            <a:r>
-              <a:t>• Report Builder</a:t>
-            </a:r>
-          </a:p>
-        </p:txBody>
-      </p:sp>
-      <p:sp>
-        <p:nvSpPr>
-          <p:cNvPr id="11" name="Rounded Rectangle 10"/>
-          <p:cNvSpPr/>
-          <p:nvPr/>
-        </p:nvSpPr>
-        <p:spPr>
-          <a:xfrm>
-            <a:off x="822960" y="4160520"/>
-            <a:ext cx="10424160" cy="868680"/>
-          </a:xfrm>
-          <a:prstGeom prst="roundRect">
-            <a:avLst/>
-          </a:prstGeom>
-          <a:solidFill>
-            <a:srgbClr val="FFFFFF"/>
-          </a:solidFill>
-          <a:ln>
-            <a:solidFill>
-              <a:srgbClr val="DCDCDC"/>
-            </a:solidFill>
-          </a:ln>
-        </p:spPr>
-        <p:style>
-          <a:lnRef idx="1">
-            <a:schemeClr val="accent1"/>
-          </a:lnRef>
-          <a:fillRef idx="3">
-            <a:schemeClr val="accent1"/>
-          </a:fillRef>
-          <a:effectRef idx="2">
-            <a:schemeClr val="accent1"/>
-          </a:effectRef>
-          <a:fontRef idx="minor">
-            <a:schemeClr val="lt1"/>
-          </a:fontRef>
-        </p:style>
-        <p:txBody>
-          <a:bodyPr rtlCol="0" anchor="ctr"/>
-          <a:lstStyle/>
-          <a:p>
-            <a:pPr algn="ctr"/>
-          </a:p>
-        </p:txBody>
-      </p:sp>
-      <p:sp>
-        <p:nvSpPr>
-          <p:cNvPr id="12" name="Rectangle 11"/>
-          <p:cNvSpPr/>
-          <p:nvPr/>
-        </p:nvSpPr>
-        <p:spPr>
-          <a:xfrm>
-            <a:off x="822960" y="4160520"/>
-            <a:ext cx="91440" cy="868680"/>
-          </a:xfrm>
-          <a:prstGeom prst="rect">
-            <a:avLst/>
-          </a:prstGeom>
-          <a:solidFill>
-            <a:srgbClr val="F9B700"/>
-          </a:solidFill>
-          <a:ln>
-            <a:noFill/>
-          </a:ln>
-        </p:spPr>
-        <p:style>
-          <a:lnRef idx="1">
-            <a:schemeClr val="accent1"/>
-          </a:lnRef>
-          <a:fillRef idx="3">
-            <a:schemeClr val="accent1"/>
-          </a:fillRef>
-          <a:effectRef idx="2">
-            <a:schemeClr val="accent1"/>
-          </a:effectRef>
-          <a:fontRef idx="minor">
-            <a:schemeClr val="lt1"/>
-          </a:fontRef>
-        </p:style>
-        <p:txBody>
-          <a:bodyPr rtlCol="0" anchor="ctr"/>
-          <a:lstStyle/>
-          <a:p>
-            <a:pPr algn="ctr"/>
-          </a:p>
-        </p:txBody>
-      </p:sp>
-      <p:sp>
-        <p:nvSpPr>
-          <p:cNvPr id="13" name="TextBox 12"/>
-          <p:cNvSpPr txBox="1"/>
-          <p:nvPr/>
-        </p:nvSpPr>
-        <p:spPr>
-          <a:xfrm>
-            <a:off x="1005840" y="4270248"/>
-            <a:ext cx="10104120" cy="704088"/>
-          </a:xfrm>
-          <a:prstGeom prst="rect">
-            <a:avLst/>
-          </a:prstGeom>
-          <a:noFill/>
-        </p:spPr>
-        <p:txBody>
-          <a:bodyPr wrap="square" lIns="0" rIns="0">
-            <a:spAutoFit/>
-          </a:bodyPr>
-          <a:lstStyle/>
-          <a:p>
-            <a:pPr>
-              <a:defRPr b="1" sz="1500">
-                <a:solidFill>
-                  <a:srgbClr val="1E2761"/>
-                </a:solidFill>
-                <a:latin typeface="Aptos Display"/>
-              </a:defRPr>
-            </a:pPr>
-            <a:r>
-              <a:t>Lab connection</a:t>
-            </a:r>
-          </a:p>
-          <a:p>
-            <a:pPr>
-              <a:spcBef>
-                <a:spcPts val="400"/>
-              </a:spcBef>
-              <a:defRPr sz="1050">
-                <a:solidFill>
-                  <a:srgbClr val="242424"/>
-                </a:solidFill>
-                <a:latin typeface="Aptos"/>
-              </a:defRPr>
-            </a:pPr>
-            <a:r>
-              <a:t>Coverage: Covered. Use the lab README to demonstrate or discuss this topic. Review terms: perfect, pixel, reporting.</a:t>
+              <a:t>In the lab, you will apply this pattern, validate the expected behavior, and discuss where it fits in a real Power BI solution.</a:t>
             </a:r>
           </a:p>
         </p:txBody>
@@ -13724,42 +13048,6 @@
       </p:sp>
       <p:sp>
         <p:nvSpPr>
-          <p:cNvPr id="4" name="TextBox 3"/>
-          <p:cNvSpPr txBox="1"/>
-          <p:nvPr/>
-        </p:nvSpPr>
-        <p:spPr>
-          <a:xfrm>
-            <a:off x="530352" y="914400"/>
-            <a:ext cx="10515600" cy="320040"/>
-          </a:xfrm>
-          <a:prstGeom prst="rect">
-            <a:avLst/>
-          </a:prstGeom>
-          <a:noFill/>
-        </p:spPr>
-        <p:txBody>
-          <a:bodyPr wrap="none">
-            <a:spAutoFit/>
-          </a:bodyPr>
-          <a:lstStyle/>
-          <a:p>
-            <a:pPr>
-              <a:defRPr sz="1200">
-                <a:solidFill>
-                  <a:srgbClr val="5C5C5C"/>
-                </a:solidFill>
-                <a:latin typeface="Aptos"/>
-              </a:defRPr>
-            </a:pPr>
-            <a:r>
-              <a:t>Talking points, learner value, and lab connection</a:t>
-            </a:r>
-          </a:p>
-        </p:txBody>
-      </p:sp>
-      <p:sp>
-        <p:nvSpPr>
           <p:cNvPr id="5" name="Rounded Rectangle 4"/>
           <p:cNvSpPr/>
           <p:nvPr/>
@@ -13877,7 +13165,139 @@
               </a:defRPr>
             </a:pPr>
             <a:r>
-              <a:t>Talking points</a:t>
+              <a:t>Key ideas</a:t>
+            </a:r>
+            <a:br/>
+            <a:r>
+              <a:t>• Capacity units</a:t>
+            </a:r>
+            <a:br/>
+            <a:r>
+              <a:t>• Workloads</a:t>
+            </a:r>
+          </a:p>
+        </p:txBody>
+      </p:sp>
+      <p:sp>
+        <p:nvSpPr>
+          <p:cNvPr id="8" name="Rounded Rectangle 7"/>
+          <p:cNvSpPr/>
+          <p:nvPr/>
+        </p:nvSpPr>
+        <p:spPr>
+          <a:xfrm>
+            <a:off x="6263640" y="1234440"/>
+            <a:ext cx="5303520" cy="1828800"/>
+          </a:xfrm>
+          <a:prstGeom prst="roundRect">
+            <a:avLst/>
+          </a:prstGeom>
+          <a:solidFill>
+            <a:srgbClr val="FFFFFF"/>
+          </a:solidFill>
+          <a:ln>
+            <a:solidFill>
+              <a:srgbClr val="DCDCDC"/>
+            </a:solidFill>
+          </a:ln>
+        </p:spPr>
+        <p:style>
+          <a:lnRef idx="1">
+            <a:schemeClr val="accent1"/>
+          </a:lnRef>
+          <a:fillRef idx="3">
+            <a:schemeClr val="accent1"/>
+          </a:fillRef>
+          <a:effectRef idx="2">
+            <a:schemeClr val="accent1"/>
+          </a:effectRef>
+          <a:fontRef idx="minor">
+            <a:schemeClr val="lt1"/>
+          </a:fontRef>
+        </p:style>
+        <p:txBody>
+          <a:bodyPr rtlCol="0" anchor="ctr"/>
+          <a:lstStyle/>
+          <a:p>
+            <a:pPr algn="ctr"/>
+          </a:p>
+        </p:txBody>
+      </p:sp>
+      <p:sp>
+        <p:nvSpPr>
+          <p:cNvPr id="9" name="Rectangle 8"/>
+          <p:cNvSpPr/>
+          <p:nvPr/>
+        </p:nvSpPr>
+        <p:spPr>
+          <a:xfrm>
+            <a:off x="6263640" y="1234440"/>
+            <a:ext cx="91440" cy="1828800"/>
+          </a:xfrm>
+          <a:prstGeom prst="rect">
+            <a:avLst/>
+          </a:prstGeom>
+          <a:solidFill>
+            <a:srgbClr val="02C39A"/>
+          </a:solidFill>
+          <a:ln>
+            <a:noFill/>
+          </a:ln>
+        </p:spPr>
+        <p:style>
+          <a:lnRef idx="1">
+            <a:schemeClr val="accent1"/>
+          </a:lnRef>
+          <a:fillRef idx="3">
+            <a:schemeClr val="accent1"/>
+          </a:fillRef>
+          <a:effectRef idx="2">
+            <a:schemeClr val="accent1"/>
+          </a:effectRef>
+          <a:fontRef idx="minor">
+            <a:schemeClr val="lt1"/>
+          </a:fontRef>
+        </p:style>
+        <p:txBody>
+          <a:bodyPr rtlCol="0" anchor="ctr"/>
+          <a:lstStyle/>
+          <a:p>
+            <a:pPr algn="ctr"/>
+          </a:p>
+        </p:txBody>
+      </p:sp>
+      <p:sp>
+        <p:nvSpPr>
+          <p:cNvPr id="10" name="TextBox 9"/>
+          <p:cNvSpPr txBox="1"/>
+          <p:nvPr/>
+        </p:nvSpPr>
+        <p:spPr>
+          <a:xfrm>
+            <a:off x="6446520" y="1344168"/>
+            <a:ext cx="4983480" cy="1664208"/>
+          </a:xfrm>
+          <a:prstGeom prst="rect">
+            <a:avLst/>
+          </a:prstGeom>
+          <a:noFill/>
+        </p:spPr>
+        <p:txBody>
+          <a:bodyPr wrap="square" lIns="0" rIns="0">
+            <a:spAutoFit/>
+          </a:bodyPr>
+          <a:lstStyle/>
+          <a:p>
+            <a:pPr>
+              <a:defRPr b="1" sz="1500">
+                <a:solidFill>
+                  <a:srgbClr val="1E2761"/>
+                </a:solidFill>
+                <a:latin typeface="Aptos Display"/>
+              </a:defRPr>
+            </a:pPr>
+            <a:r>
+              <a:t>Why it helps</a:t>
             </a:r>
           </a:p>
           <a:p>
@@ -13893,25 +13313,25 @@
               </a:defRPr>
             </a:pPr>
             <a:r>
-              <a:t>• Capacity units</a:t>
+              <a:t>• Workspace experience</a:t>
             </a:r>
             <a:br/>
             <a:r>
-              <a:t>• Workloads</a:t>
-            </a:r>
-          </a:p>
-        </p:txBody>
-      </p:sp>
-      <p:sp>
-        <p:nvSpPr>
-          <p:cNvPr id="8" name="Rounded Rectangle 7"/>
+              <a:t>• Gov validation</a:t>
+            </a:r>
+          </a:p>
+        </p:txBody>
+      </p:sp>
+      <p:sp>
+        <p:nvSpPr>
+          <p:cNvPr id="11" name="Rounded Rectangle 10"/>
           <p:cNvSpPr/>
           <p:nvPr/>
         </p:nvSpPr>
         <p:spPr>
           <a:xfrm>
-            <a:off x="6263640" y="1234440"/>
-            <a:ext cx="5303520" cy="1828800"/>
+            <a:off x="822960" y="4160520"/>
+            <a:ext cx="10424160" cy="868680"/>
           </a:xfrm>
           <a:prstGeom prst="roundRect">
             <a:avLst/>
@@ -13949,20 +13369,20 @@
       </p:sp>
       <p:sp>
         <p:nvSpPr>
-          <p:cNvPr id="9" name="Rectangle 8"/>
+          <p:cNvPr id="12" name="Rectangle 11"/>
           <p:cNvSpPr/>
           <p:nvPr/>
         </p:nvSpPr>
         <p:spPr>
           <a:xfrm>
-            <a:off x="6263640" y="1234440"/>
-            <a:ext cx="91440" cy="1828800"/>
+            <a:off x="822960" y="4160520"/>
+            <a:ext cx="91440" cy="868680"/>
           </a:xfrm>
           <a:prstGeom prst="rect">
             <a:avLst/>
           </a:prstGeom>
           <a:solidFill>
-            <a:srgbClr val="02C39A"/>
+            <a:srgbClr val="F9B700"/>
           </a:solidFill>
           <a:ln>
             <a:noFill/>
@@ -13992,14 +13412,14 @@
       </p:sp>
       <p:sp>
         <p:nvSpPr>
-          <p:cNvPr id="10" name="TextBox 9"/>
+          <p:cNvPr id="13" name="TextBox 12"/>
           <p:cNvSpPr txBox="1"/>
           <p:nvPr/>
         </p:nvSpPr>
         <p:spPr>
           <a:xfrm>
-            <a:off x="6446520" y="1344168"/>
-            <a:ext cx="4983480" cy="1664208"/>
+            <a:off x="1005840" y="4270248"/>
+            <a:ext cx="10104120" cy="704088"/>
           </a:xfrm>
           <a:prstGeom prst="rect">
             <a:avLst/>
@@ -14021,167 +13441,7 @@
               </a:defRPr>
             </a:pPr>
             <a:r>
-              <a:t>Why it helps</a:t>
-            </a:r>
-          </a:p>
-          <a:p>
-            <a:pPr>
-              <a:spcBef>
-                <a:spcPts val="400"/>
-              </a:spcBef>
-              <a:defRPr sz="1050">
-                <a:solidFill>
-                  <a:srgbClr val="242424"/>
-                </a:solidFill>
-                <a:latin typeface="Aptos"/>
-              </a:defRPr>
-            </a:pPr>
-            <a:r>
-              <a:t>• Workspace experience</a:t>
-            </a:r>
-            <a:br/>
-            <a:r>
-              <a:t>• Gov validation</a:t>
-            </a:r>
-          </a:p>
-        </p:txBody>
-      </p:sp>
-      <p:sp>
-        <p:nvSpPr>
-          <p:cNvPr id="11" name="Rounded Rectangle 10"/>
-          <p:cNvSpPr/>
-          <p:nvPr/>
-        </p:nvSpPr>
-        <p:spPr>
-          <a:xfrm>
-            <a:off x="822960" y="4160520"/>
-            <a:ext cx="10424160" cy="868680"/>
-          </a:xfrm>
-          <a:prstGeom prst="roundRect">
-            <a:avLst/>
-          </a:prstGeom>
-          <a:solidFill>
-            <a:srgbClr val="FFFFFF"/>
-          </a:solidFill>
-          <a:ln>
-            <a:solidFill>
-              <a:srgbClr val="DCDCDC"/>
-            </a:solidFill>
-          </a:ln>
-        </p:spPr>
-        <p:style>
-          <a:lnRef idx="1">
-            <a:schemeClr val="accent1"/>
-          </a:lnRef>
-          <a:fillRef idx="3">
-            <a:schemeClr val="accent1"/>
-          </a:fillRef>
-          <a:effectRef idx="2">
-            <a:schemeClr val="accent1"/>
-          </a:effectRef>
-          <a:fontRef idx="minor">
-            <a:schemeClr val="lt1"/>
-          </a:fontRef>
-        </p:style>
-        <p:txBody>
-          <a:bodyPr rtlCol="0" anchor="ctr"/>
-          <a:lstStyle/>
-          <a:p>
-            <a:pPr algn="ctr"/>
-          </a:p>
-        </p:txBody>
-      </p:sp>
-      <p:sp>
-        <p:nvSpPr>
-          <p:cNvPr id="12" name="Rectangle 11"/>
-          <p:cNvSpPr/>
-          <p:nvPr/>
-        </p:nvSpPr>
-        <p:spPr>
-          <a:xfrm>
-            <a:off x="822960" y="4160520"/>
-            <a:ext cx="91440" cy="868680"/>
-          </a:xfrm>
-          <a:prstGeom prst="rect">
-            <a:avLst/>
-          </a:prstGeom>
-          <a:solidFill>
-            <a:srgbClr val="F9B700"/>
-          </a:solidFill>
-          <a:ln>
-            <a:noFill/>
-          </a:ln>
-        </p:spPr>
-        <p:style>
-          <a:lnRef idx="1">
-            <a:schemeClr val="accent1"/>
-          </a:lnRef>
-          <a:fillRef idx="3">
-            <a:schemeClr val="accent1"/>
-          </a:fillRef>
-          <a:effectRef idx="2">
-            <a:schemeClr val="accent1"/>
-          </a:effectRef>
-          <a:fontRef idx="minor">
-            <a:schemeClr val="lt1"/>
-          </a:fontRef>
-        </p:style>
-        <p:txBody>
-          <a:bodyPr rtlCol="0" anchor="ctr"/>
-          <a:lstStyle/>
-          <a:p>
-            <a:pPr algn="ctr"/>
-          </a:p>
-        </p:txBody>
-      </p:sp>
-      <p:sp>
-        <p:nvSpPr>
-          <p:cNvPr id="13" name="TextBox 12"/>
-          <p:cNvSpPr txBox="1"/>
-          <p:nvPr/>
-        </p:nvSpPr>
-        <p:spPr>
-          <a:xfrm>
-            <a:off x="1005840" y="4270248"/>
-            <a:ext cx="10104120" cy="704088"/>
-          </a:xfrm>
-          <a:prstGeom prst="rect">
-            <a:avLst/>
-          </a:prstGeom>
-          <a:noFill/>
-        </p:spPr>
-        <p:txBody>
-          <a:bodyPr wrap="square" lIns="0" rIns="0">
-            <a:spAutoFit/>
-          </a:bodyPr>
-          <a:lstStyle/>
-          <a:p>
-            <a:pPr>
-              <a:defRPr b="1" sz="1500">
-                <a:solidFill>
-                  <a:srgbClr val="1E2761"/>
-                </a:solidFill>
-                <a:latin typeface="Aptos Display"/>
-              </a:defRPr>
-            </a:pPr>
-            <a:r>
-              <a:t>Lab connection</a:t>
-            </a:r>
-          </a:p>
-          <a:p>
-            <a:pPr>
-              <a:spcBef>
-                <a:spcPts val="400"/>
-              </a:spcBef>
-              <a:defRPr sz="1050">
-                <a:solidFill>
-                  <a:srgbClr val="242424"/>
-                </a:solidFill>
-                <a:latin typeface="Aptos"/>
-              </a:defRPr>
-            </a:pPr>
-            <a:r>
-              <a:t>Coverage: Covered. Use the lab README to demonstrate or discuss this topic. Review terms: experience, units, workloads.</a:t>
+              <a:t>In the lab, you will apply this pattern, validate the expected behavior, and discuss where it fits in a real Power BI solution.</a:t>
             </a:r>
           </a:p>
         </p:txBody>
@@ -14320,42 +13580,6 @@
       </p:sp>
       <p:sp>
         <p:nvSpPr>
-          <p:cNvPr id="4" name="TextBox 3"/>
-          <p:cNvSpPr txBox="1"/>
-          <p:nvPr/>
-        </p:nvSpPr>
-        <p:spPr>
-          <a:xfrm>
-            <a:off x="530352" y="914400"/>
-            <a:ext cx="10515600" cy="320040"/>
-          </a:xfrm>
-          <a:prstGeom prst="rect">
-            <a:avLst/>
-          </a:prstGeom>
-          <a:noFill/>
-        </p:spPr>
-        <p:txBody>
-          <a:bodyPr wrap="none">
-            <a:spAutoFit/>
-          </a:bodyPr>
-          <a:lstStyle/>
-          <a:p>
-            <a:pPr>
-              <a:defRPr sz="1200">
-                <a:solidFill>
-                  <a:srgbClr val="5C5C5C"/>
-                </a:solidFill>
-                <a:latin typeface="Aptos"/>
-              </a:defRPr>
-            </a:pPr>
-            <a:r>
-              <a:t>Talking points, learner value, and lab connection</a:t>
-            </a:r>
-          </a:p>
-        </p:txBody>
-      </p:sp>
-      <p:sp>
-        <p:nvSpPr>
           <p:cNvPr id="5" name="Rounded Rectangle 4"/>
           <p:cNvSpPr/>
           <p:nvPr/>
@@ -14473,7 +13697,139 @@
               </a:defRPr>
             </a:pPr>
             <a:r>
-              <a:t>Talking points</a:t>
+              <a:t>Key ideas</a:t>
+            </a:r>
+            <a:br/>
+            <a:r>
+              <a:t>• Import vs. DirectQuery vs. Direct Lake</a:t>
+            </a:r>
+            <a:br/>
+            <a:r>
+              <a:t>• Data freshness</a:t>
+            </a:r>
+          </a:p>
+        </p:txBody>
+      </p:sp>
+      <p:sp>
+        <p:nvSpPr>
+          <p:cNvPr id="8" name="Rounded Rectangle 7"/>
+          <p:cNvSpPr/>
+          <p:nvPr/>
+        </p:nvSpPr>
+        <p:spPr>
+          <a:xfrm>
+            <a:off x="6263640" y="1234440"/>
+            <a:ext cx="5303520" cy="1828800"/>
+          </a:xfrm>
+          <a:prstGeom prst="roundRect">
+            <a:avLst/>
+          </a:prstGeom>
+          <a:solidFill>
+            <a:srgbClr val="FFFFFF"/>
+          </a:solidFill>
+          <a:ln>
+            <a:solidFill>
+              <a:srgbClr val="DCDCDC"/>
+            </a:solidFill>
+          </a:ln>
+        </p:spPr>
+        <p:style>
+          <a:lnRef idx="1">
+            <a:schemeClr val="accent1"/>
+          </a:lnRef>
+          <a:fillRef idx="3">
+            <a:schemeClr val="accent1"/>
+          </a:fillRef>
+          <a:effectRef idx="2">
+            <a:schemeClr val="accent1"/>
+          </a:effectRef>
+          <a:fontRef idx="minor">
+            <a:schemeClr val="lt1"/>
+          </a:fontRef>
+        </p:style>
+        <p:txBody>
+          <a:bodyPr rtlCol="0" anchor="ctr"/>
+          <a:lstStyle/>
+          <a:p>
+            <a:pPr algn="ctr"/>
+          </a:p>
+        </p:txBody>
+      </p:sp>
+      <p:sp>
+        <p:nvSpPr>
+          <p:cNvPr id="9" name="Rectangle 8"/>
+          <p:cNvSpPr/>
+          <p:nvPr/>
+        </p:nvSpPr>
+        <p:spPr>
+          <a:xfrm>
+            <a:off x="6263640" y="1234440"/>
+            <a:ext cx="91440" cy="1828800"/>
+          </a:xfrm>
+          <a:prstGeom prst="rect">
+            <a:avLst/>
+          </a:prstGeom>
+          <a:solidFill>
+            <a:srgbClr val="02C39A"/>
+          </a:solidFill>
+          <a:ln>
+            <a:noFill/>
+          </a:ln>
+        </p:spPr>
+        <p:style>
+          <a:lnRef idx="1">
+            <a:schemeClr val="accent1"/>
+          </a:lnRef>
+          <a:fillRef idx="3">
+            <a:schemeClr val="accent1"/>
+          </a:fillRef>
+          <a:effectRef idx="2">
+            <a:schemeClr val="accent1"/>
+          </a:effectRef>
+          <a:fontRef idx="minor">
+            <a:schemeClr val="lt1"/>
+          </a:fontRef>
+        </p:style>
+        <p:txBody>
+          <a:bodyPr rtlCol="0" anchor="ctr"/>
+          <a:lstStyle/>
+          <a:p>
+            <a:pPr algn="ctr"/>
+          </a:p>
+        </p:txBody>
+      </p:sp>
+      <p:sp>
+        <p:nvSpPr>
+          <p:cNvPr id="10" name="TextBox 9"/>
+          <p:cNvSpPr txBox="1"/>
+          <p:nvPr/>
+        </p:nvSpPr>
+        <p:spPr>
+          <a:xfrm>
+            <a:off x="6446520" y="1344168"/>
+            <a:ext cx="4983480" cy="1664208"/>
+          </a:xfrm>
+          <a:prstGeom prst="rect">
+            <a:avLst/>
+          </a:prstGeom>
+          <a:noFill/>
+        </p:spPr>
+        <p:txBody>
+          <a:bodyPr wrap="square" lIns="0" rIns="0">
+            <a:spAutoFit/>
+          </a:bodyPr>
+          <a:lstStyle/>
+          <a:p>
+            <a:pPr>
+              <a:defRPr b="1" sz="1500">
+                <a:solidFill>
+                  <a:srgbClr val="1E2761"/>
+                </a:solidFill>
+                <a:latin typeface="Aptos Display"/>
+              </a:defRPr>
+            </a:pPr>
+            <a:r>
+              <a:t>Why it helps</a:t>
             </a:r>
           </a:p>
           <a:p>
@@ -14489,25 +13845,25 @@
               </a:defRPr>
             </a:pPr>
             <a:r>
-              <a:t>• Import vs. DirectQuery vs. Direct Lake</a:t>
+              <a:t>• Modeling considerations</a:t>
             </a:r>
             <a:br/>
             <a:r>
-              <a:t>• Data freshness</a:t>
-            </a:r>
-          </a:p>
-        </p:txBody>
-      </p:sp>
-      <p:sp>
-        <p:nvSpPr>
-          <p:cNvPr id="8" name="Rounded Rectangle 7"/>
+              <a:t>• Fallback options</a:t>
+            </a:r>
+          </a:p>
+        </p:txBody>
+      </p:sp>
+      <p:sp>
+        <p:nvSpPr>
+          <p:cNvPr id="11" name="Rounded Rectangle 10"/>
           <p:cNvSpPr/>
           <p:nvPr/>
         </p:nvSpPr>
         <p:spPr>
           <a:xfrm>
-            <a:off x="6263640" y="1234440"/>
-            <a:ext cx="5303520" cy="1828800"/>
+            <a:off x="822960" y="4160520"/>
+            <a:ext cx="10424160" cy="868680"/>
           </a:xfrm>
           <a:prstGeom prst="roundRect">
             <a:avLst/>
@@ -14545,20 +13901,20 @@
       </p:sp>
       <p:sp>
         <p:nvSpPr>
-          <p:cNvPr id="9" name="Rectangle 8"/>
+          <p:cNvPr id="12" name="Rectangle 11"/>
           <p:cNvSpPr/>
           <p:nvPr/>
         </p:nvSpPr>
         <p:spPr>
           <a:xfrm>
-            <a:off x="6263640" y="1234440"/>
-            <a:ext cx="91440" cy="1828800"/>
+            <a:off x="822960" y="4160520"/>
+            <a:ext cx="91440" cy="868680"/>
           </a:xfrm>
           <a:prstGeom prst="rect">
             <a:avLst/>
           </a:prstGeom>
           <a:solidFill>
-            <a:srgbClr val="02C39A"/>
+            <a:srgbClr val="F9B700"/>
           </a:solidFill>
           <a:ln>
             <a:noFill/>
@@ -14588,14 +13944,14 @@
       </p:sp>
       <p:sp>
         <p:nvSpPr>
-          <p:cNvPr id="10" name="TextBox 9"/>
+          <p:cNvPr id="13" name="TextBox 12"/>
           <p:cNvSpPr txBox="1"/>
           <p:nvPr/>
         </p:nvSpPr>
         <p:spPr>
           <a:xfrm>
-            <a:off x="6446520" y="1344168"/>
-            <a:ext cx="4983480" cy="1664208"/>
+            <a:off x="1005840" y="4270248"/>
+            <a:ext cx="10104120" cy="704088"/>
           </a:xfrm>
           <a:prstGeom prst="rect">
             <a:avLst/>
@@ -14617,167 +13973,7 @@
               </a:defRPr>
             </a:pPr>
             <a:r>
-              <a:t>Why it helps</a:t>
-            </a:r>
-          </a:p>
-          <a:p>
-            <a:pPr>
-              <a:spcBef>
-                <a:spcPts val="400"/>
-              </a:spcBef>
-              <a:defRPr sz="1050">
-                <a:solidFill>
-                  <a:srgbClr val="242424"/>
-                </a:solidFill>
-                <a:latin typeface="Aptos"/>
-              </a:defRPr>
-            </a:pPr>
-            <a:r>
-              <a:t>• Modeling considerations</a:t>
-            </a:r>
-            <a:br/>
-            <a:r>
-              <a:t>• Fallback options</a:t>
-            </a:r>
-          </a:p>
-        </p:txBody>
-      </p:sp>
-      <p:sp>
-        <p:nvSpPr>
-          <p:cNvPr id="11" name="Rounded Rectangle 10"/>
-          <p:cNvSpPr/>
-          <p:nvPr/>
-        </p:nvSpPr>
-        <p:spPr>
-          <a:xfrm>
-            <a:off x="822960" y="4160520"/>
-            <a:ext cx="10424160" cy="868680"/>
-          </a:xfrm>
-          <a:prstGeom prst="roundRect">
-            <a:avLst/>
-          </a:prstGeom>
-          <a:solidFill>
-            <a:srgbClr val="FFFFFF"/>
-          </a:solidFill>
-          <a:ln>
-            <a:solidFill>
-              <a:srgbClr val="DCDCDC"/>
-            </a:solidFill>
-          </a:ln>
-        </p:spPr>
-        <p:style>
-          <a:lnRef idx="1">
-            <a:schemeClr val="accent1"/>
-          </a:lnRef>
-          <a:fillRef idx="3">
-            <a:schemeClr val="accent1"/>
-          </a:fillRef>
-          <a:effectRef idx="2">
-            <a:schemeClr val="accent1"/>
-          </a:effectRef>
-          <a:fontRef idx="minor">
-            <a:schemeClr val="lt1"/>
-          </a:fontRef>
-        </p:style>
-        <p:txBody>
-          <a:bodyPr rtlCol="0" anchor="ctr"/>
-          <a:lstStyle/>
-          <a:p>
-            <a:pPr algn="ctr"/>
-          </a:p>
-        </p:txBody>
-      </p:sp>
-      <p:sp>
-        <p:nvSpPr>
-          <p:cNvPr id="12" name="Rectangle 11"/>
-          <p:cNvSpPr/>
-          <p:nvPr/>
-        </p:nvSpPr>
-        <p:spPr>
-          <a:xfrm>
-            <a:off x="822960" y="4160520"/>
-            <a:ext cx="91440" cy="868680"/>
-          </a:xfrm>
-          <a:prstGeom prst="rect">
-            <a:avLst/>
-          </a:prstGeom>
-          <a:solidFill>
-            <a:srgbClr val="F9B700"/>
-          </a:solidFill>
-          <a:ln>
-            <a:noFill/>
-          </a:ln>
-        </p:spPr>
-        <p:style>
-          <a:lnRef idx="1">
-            <a:schemeClr val="accent1"/>
-          </a:lnRef>
-          <a:fillRef idx="3">
-            <a:schemeClr val="accent1"/>
-          </a:fillRef>
-          <a:effectRef idx="2">
-            <a:schemeClr val="accent1"/>
-          </a:effectRef>
-          <a:fontRef idx="minor">
-            <a:schemeClr val="lt1"/>
-          </a:fontRef>
-        </p:style>
-        <p:txBody>
-          <a:bodyPr rtlCol="0" anchor="ctr"/>
-          <a:lstStyle/>
-          <a:p>
-            <a:pPr algn="ctr"/>
-          </a:p>
-        </p:txBody>
-      </p:sp>
-      <p:sp>
-        <p:nvSpPr>
-          <p:cNvPr id="13" name="TextBox 12"/>
-          <p:cNvSpPr txBox="1"/>
-          <p:nvPr/>
-        </p:nvSpPr>
-        <p:spPr>
-          <a:xfrm>
-            <a:off x="1005840" y="4270248"/>
-            <a:ext cx="10104120" cy="704088"/>
-          </a:xfrm>
-          <a:prstGeom prst="rect">
-            <a:avLst/>
-          </a:prstGeom>
-          <a:noFill/>
-        </p:spPr>
-        <p:txBody>
-          <a:bodyPr wrap="square" lIns="0" rIns="0">
-            <a:spAutoFit/>
-          </a:bodyPr>
-          <a:lstStyle/>
-          <a:p>
-            <a:pPr>
-              <a:defRPr b="1" sz="1500">
-                <a:solidFill>
-                  <a:srgbClr val="1E2761"/>
-                </a:solidFill>
-                <a:latin typeface="Aptos Display"/>
-              </a:defRPr>
-            </a:pPr>
-            <a:r>
-              <a:t>Lab connection</a:t>
-            </a:r>
-          </a:p>
-          <a:p>
-            <a:pPr>
-              <a:spcBef>
-                <a:spcPts val="400"/>
-              </a:spcBef>
-              <a:defRPr sz="1050">
-                <a:solidFill>
-                  <a:srgbClr val="242424"/>
-                </a:solidFill>
-                <a:latin typeface="Aptos"/>
-              </a:defRPr>
-            </a:pPr>
-            <a:r>
-              <a:t>Coverage: Covered. Use the lab README to demonstrate or discuss this topic. Review terms: freshness, modeling.</a:t>
+              <a:t>In the lab, you will apply this pattern, validate the expected behavior, and discuss where it fits in a real Power BI solution.</a:t>
             </a:r>
           </a:p>
         </p:txBody>
